--- a/LOVEQUEST_MASTERS_提案書.pptx
+++ b/LOVEQUEST_MASTERS_提案書.pptx
@@ -8448,8 +8448,8 @@
         </p:nvSpPr>
         <p:spPr>
           <a:xfrm>
-            <a:off x="365760" y="164592"/>
-            <a:ext cx="8412480" cy="438912"/>
+            <a:off x="274320" y="128016"/>
+            <a:ext cx="8595360" cy="384048"/>
           </a:xfrm>
           <a:prstGeom prst="rect">
             <a:avLst/>
@@ -8465,7 +8465,7 @@
               <a:buNone/>
             </a:pPr>
             <a:r>
-              <a:rPr lang="en-US" sz="2600" b="1" dirty="0">
+              <a:rPr lang="en-US" sz="2300" b="1" dirty="0">
                 <a:solidFill>
                   <a:srgbClr val="F5A623"/>
                 </a:solidFill>
@@ -8475,7 +8475,7 @@
               </a:rPr>
               <a:t>費用概算 — パターン別比較</a:t>
             </a:r>
-            <a:endParaRPr lang="en-US" sz="2600" dirty="0"/>
+            <a:endParaRPr lang="en-US" sz="2300" dirty="0"/>
           </a:p>
         </p:txBody>
       </p:sp>
@@ -8487,8 +8487,8 @@
         </p:nvSpPr>
         <p:spPr>
           <a:xfrm>
-            <a:off x="365760" y="585216"/>
-            <a:ext cx="8412480" cy="274320"/>
+            <a:off x="274320" y="493776"/>
+            <a:ext cx="8595360" cy="237744"/>
           </a:xfrm>
           <a:prstGeom prst="rect">
             <a:avLst/>
@@ -8504,7 +8504,7 @@
               <a:buNone/>
             </a:pPr>
             <a:r>
-              <a:rPr lang="en-US" sz="1200" dirty="0">
+              <a:rPr lang="en-US" sz="1100" dirty="0">
                 <a:solidFill>
                   <a:srgbClr val="8888AA"/>
                 </a:solidFill>
@@ -8512,9 +8512,9 @@
                 <a:ea typeface="Arial" pitchFamily="34" charset="-122"/>
                 <a:cs typeface="Arial" pitchFamily="34" charset="-120"/>
               </a:rPr>
-              <a:t>ニーズに合わせてパターンを選択してください</a:t>
-            </a:r>
-            <a:endParaRPr lang="en-US" sz="1200" dirty="0"/>
+              <a:t>UTAGEは必須ではない。ニーズに合わせてパターンを選択できます</a:t>
+            </a:r>
+            <a:endParaRPr lang="en-US" sz="1100" dirty="0"/>
           </a:p>
         </p:txBody>
       </p:sp>
@@ -8526,8 +8526,8 @@
         </p:nvSpPr>
         <p:spPr>
           <a:xfrm>
-            <a:off x="347472" y="932688"/>
-            <a:ext cx="2542032" cy="475488"/>
+            <a:off x="274320" y="804672"/>
+            <a:ext cx="2011680" cy="384048"/>
           </a:xfrm>
           <a:prstGeom prst="rect">
             <a:avLst/>
@@ -8546,8 +8546,8 @@
         </p:nvSpPr>
         <p:spPr>
           <a:xfrm>
-            <a:off x="2907792" y="932688"/>
-            <a:ext cx="1298448" cy="475488"/>
+            <a:off x="2286000" y="804672"/>
+            <a:ext cx="1005840" cy="384048"/>
           </a:xfrm>
           <a:prstGeom prst="rect">
             <a:avLst/>
@@ -8566,8 +8566,8 @@
         </p:nvSpPr>
         <p:spPr>
           <a:xfrm>
-            <a:off x="4224528" y="932688"/>
-            <a:ext cx="1444752" cy="475488"/>
+            <a:off x="3291840" y="804672"/>
+            <a:ext cx="1325880" cy="384048"/>
           </a:xfrm>
           <a:prstGeom prst="rect">
             <a:avLst/>
@@ -8591,8 +8591,8 @@
         </p:nvSpPr>
         <p:spPr>
           <a:xfrm>
-            <a:off x="5687568" y="932688"/>
-            <a:ext cx="1444752" cy="475488"/>
+            <a:off x="4617720" y="804672"/>
+            <a:ext cx="1325880" cy="384048"/>
           </a:xfrm>
           <a:prstGeom prst="rect">
             <a:avLst/>
@@ -8616,8 +8616,8 @@
         </p:nvSpPr>
         <p:spPr>
           <a:xfrm>
-            <a:off x="7150608" y="932688"/>
-            <a:ext cx="1572768" cy="475488"/>
+            <a:off x="5943600" y="804672"/>
+            <a:ext cx="1325880" cy="384048"/>
           </a:xfrm>
           <a:prstGeom prst="rect">
             <a:avLst/>
@@ -8635,30 +8635,55 @@
       </p:sp>
       <p:sp>
         <p:nvSpPr>
-          <p:cNvPr id="10" name="Text 8"/>
-          <p:cNvSpPr/>
-          <p:nvPr/>
-        </p:nvSpPr>
-        <p:spPr>
-          <a:xfrm>
-            <a:off x="411480" y="996696"/>
-            <a:ext cx="2450592" cy="384048"/>
-          </a:xfrm>
-          <a:prstGeom prst="rect">
-            <a:avLst/>
-          </a:prstGeom>
-          <a:noFill/>
-          <a:ln/>
-        </p:spPr>
-        <p:txBody>
-          <a:bodyPr wrap="square" lIns="0" tIns="0" rIns="0" bIns="0" rtlCol="0" anchor="ctr"/>
-          <a:lstStyle/>
-          <a:p>
-            <a:pPr algn="ctr" indent="0" marL="0">
-              <a:buNone/>
-            </a:pPr>
-            <a:r>
-              <a:rPr lang="en-US" sz="1150" b="1" dirty="0">
+          <p:cNvPr id="10" name="Shape 8"/>
+          <p:cNvSpPr/>
+          <p:nvPr/>
+        </p:nvSpPr>
+        <p:spPr>
+          <a:xfrm>
+            <a:off x="7269480" y="804672"/>
+            <a:ext cx="1325880" cy="384048"/>
+          </a:xfrm>
+          <a:prstGeom prst="rect">
+            <a:avLst/>
+          </a:prstGeom>
+          <a:solidFill>
+            <a:srgbClr val="251A25"/>
+          </a:solidFill>
+          <a:ln w="12700">
+            <a:solidFill>
+              <a:srgbClr val="E94560"/>
+            </a:solidFill>
+            <a:prstDash val="solid"/>
+          </a:ln>
+        </p:spPr>
+      </p:sp>
+      <p:sp>
+        <p:nvSpPr>
+          <p:cNvPr id="11" name="Text 9"/>
+          <p:cNvSpPr/>
+          <p:nvPr/>
+        </p:nvSpPr>
+        <p:spPr>
+          <a:xfrm>
+            <a:off x="310896" y="822960"/>
+            <a:ext cx="1938528" cy="347472"/>
+          </a:xfrm>
+          <a:prstGeom prst="rect">
+            <a:avLst/>
+          </a:prstGeom>
+          <a:noFill/>
+          <a:ln/>
+        </p:spPr>
+        <p:txBody>
+          <a:bodyPr wrap="square" lIns="0" tIns="0" rIns="0" bIns="0" rtlCol="0" anchor="ctr"/>
+          <a:lstStyle/>
+          <a:p>
+            <a:pPr algn="ctr" indent="0" marL="0">
+              <a:buNone/>
+            </a:pPr>
+            <a:r>
+              <a:rPr lang="en-US" sz="950" b="1" dirty="0">
                 <a:solidFill>
                   <a:srgbClr val="FFFFFF"/>
                 </a:solidFill>
@@ -8668,36 +8693,36 @@
               </a:rPr>
               <a:t>項目</a:t>
             </a:r>
-            <a:endParaRPr lang="en-US" sz="1150" dirty="0"/>
-          </a:p>
-        </p:txBody>
-      </p:sp>
-      <p:sp>
-        <p:nvSpPr>
-          <p:cNvPr id="11" name="Text 9"/>
-          <p:cNvSpPr/>
-          <p:nvPr/>
-        </p:nvSpPr>
-        <p:spPr>
-          <a:xfrm>
-            <a:off x="2971800" y="996696"/>
-            <a:ext cx="1207008" cy="384048"/>
-          </a:xfrm>
-          <a:prstGeom prst="rect">
-            <a:avLst/>
-          </a:prstGeom>
-          <a:noFill/>
-          <a:ln/>
-        </p:spPr>
-        <p:txBody>
-          <a:bodyPr wrap="square" lIns="0" tIns="0" rIns="0" bIns="0" rtlCol="0" anchor="ctr"/>
-          <a:lstStyle/>
-          <a:p>
-            <a:pPr algn="ctr" indent="0" marL="0">
-              <a:buNone/>
-            </a:pPr>
-            <a:r>
-              <a:rPr lang="en-US" sz="1150" b="1" dirty="0">
+            <a:endParaRPr lang="en-US" sz="950" dirty="0"/>
+          </a:p>
+        </p:txBody>
+      </p:sp>
+      <p:sp>
+        <p:nvSpPr>
+          <p:cNvPr id="12" name="Text 10"/>
+          <p:cNvSpPr/>
+          <p:nvPr/>
+        </p:nvSpPr>
+        <p:spPr>
+          <a:xfrm>
+            <a:off x="2322576" y="822960"/>
+            <a:ext cx="932688" cy="347472"/>
+          </a:xfrm>
+          <a:prstGeom prst="rect">
+            <a:avLst/>
+          </a:prstGeom>
+          <a:noFill/>
+          <a:ln/>
+        </p:spPr>
+        <p:txBody>
+          <a:bodyPr wrap="square" lIns="0" tIns="0" rIns="0" bIns="0" rtlCol="0" anchor="ctr"/>
+          <a:lstStyle/>
+          <a:p>
+            <a:pPr algn="ctr" indent="0" marL="0">
+              <a:buNone/>
+            </a:pPr>
+            <a:r>
+              <a:rPr lang="en-US" sz="950" b="1" dirty="0">
                 <a:solidFill>
                   <a:srgbClr val="FFFFFF"/>
                 </a:solidFill>
@@ -8707,36 +8732,36 @@
               </a:rPr>
               <a:t>費用/月</a:t>
             </a:r>
-            <a:endParaRPr lang="en-US" sz="1150" dirty="0"/>
-          </a:p>
-        </p:txBody>
-      </p:sp>
-      <p:sp>
-        <p:nvSpPr>
-          <p:cNvPr id="12" name="Text 10"/>
-          <p:cNvSpPr/>
-          <p:nvPr/>
-        </p:nvSpPr>
-        <p:spPr>
-          <a:xfrm>
-            <a:off x="4288536" y="996696"/>
-            <a:ext cx="1353312" cy="384048"/>
-          </a:xfrm>
-          <a:prstGeom prst="rect">
-            <a:avLst/>
-          </a:prstGeom>
-          <a:noFill/>
-          <a:ln/>
-        </p:spPr>
-        <p:txBody>
-          <a:bodyPr wrap="square" lIns="0" tIns="0" rIns="0" bIns="0" rtlCol="0" anchor="ctr"/>
-          <a:lstStyle/>
-          <a:p>
-            <a:pPr algn="ctr" indent="0" marL="0">
-              <a:buNone/>
-            </a:pPr>
-            <a:r>
-              <a:rPr lang="en-US" sz="1150" b="1" dirty="0">
+            <a:endParaRPr lang="en-US" sz="950" dirty="0"/>
+          </a:p>
+        </p:txBody>
+      </p:sp>
+      <p:sp>
+        <p:nvSpPr>
+          <p:cNvPr id="13" name="Text 11"/>
+          <p:cNvSpPr/>
+          <p:nvPr/>
+        </p:nvSpPr>
+        <p:spPr>
+          <a:xfrm>
+            <a:off x="3328416" y="822960"/>
+            <a:ext cx="1252728" cy="347472"/>
+          </a:xfrm>
+          <a:prstGeom prst="rect">
+            <a:avLst/>
+          </a:prstGeom>
+          <a:noFill/>
+          <a:ln/>
+        </p:spPr>
+        <p:txBody>
+          <a:bodyPr wrap="square" lIns="0" tIns="0" rIns="0" bIns="0" rtlCol="0" anchor="ctr"/>
+          <a:lstStyle/>
+          <a:p>
+            <a:pPr algn="ctr" indent="0" marL="0">
+              <a:buNone/>
+            </a:pPr>
+            <a:r>
+              <a:rPr lang="en-US" sz="950" b="1" dirty="0">
                 <a:solidFill>
                   <a:srgbClr val="4A9EDB"/>
                 </a:solidFill>
@@ -8744,38 +8769,55 @@
                 <a:ea typeface="Arial" pitchFamily="34" charset="-122"/>
                 <a:cs typeface="Arial" pitchFamily="34" charset="-120"/>
               </a:rPr>
-              <a:t>P1 超ミニマム</a:t>
-            </a:r>
-            <a:endParaRPr lang="en-US" sz="1150" dirty="0"/>
-          </a:p>
-        </p:txBody>
-      </p:sp>
-      <p:sp>
-        <p:nvSpPr>
-          <p:cNvPr id="13" name="Text 11"/>
-          <p:cNvSpPr/>
-          <p:nvPr/>
-        </p:nvSpPr>
-        <p:spPr>
-          <a:xfrm>
-            <a:off x="5751576" y="996696"/>
-            <a:ext cx="1353312" cy="384048"/>
-          </a:xfrm>
-          <a:prstGeom prst="rect">
-            <a:avLst/>
-          </a:prstGeom>
-          <a:noFill/>
-          <a:ln/>
-        </p:spPr>
-        <p:txBody>
-          <a:bodyPr wrap="square" lIns="0" tIns="0" rIns="0" bIns="0" rtlCol="0" anchor="ctr"/>
-          <a:lstStyle/>
-          <a:p>
-            <a:pPr algn="ctr" indent="0" marL="0">
-              <a:buNone/>
-            </a:pPr>
-            <a:r>
-              <a:rPr lang="en-US" sz="1150" b="1" dirty="0">
+              <a:t>P1</a:t>
+            </a:r>
+            <a:endParaRPr lang="en-US" sz="950" dirty="0"/>
+          </a:p>
+          <a:p>
+            <a:pPr algn="ctr" indent="0" marL="0">
+              <a:buNone/>
+            </a:pPr>
+            <a:r>
+              <a:rPr lang="en-US" sz="950" b="1" dirty="0">
+                <a:solidFill>
+                  <a:srgbClr val="4A9EDB"/>
+                </a:solidFill>
+                <a:latin typeface="Arial" pitchFamily="34" charset="0"/>
+                <a:ea typeface="Arial" pitchFamily="34" charset="-122"/>
+                <a:cs typeface="Arial" pitchFamily="34" charset="-120"/>
+              </a:rPr>
+              <a:t>超ミニマム</a:t>
+            </a:r>
+            <a:endParaRPr lang="en-US" sz="950" dirty="0"/>
+          </a:p>
+        </p:txBody>
+      </p:sp>
+      <p:sp>
+        <p:nvSpPr>
+          <p:cNvPr id="14" name="Text 12"/>
+          <p:cNvSpPr/>
+          <p:nvPr/>
+        </p:nvSpPr>
+        <p:spPr>
+          <a:xfrm>
+            <a:off x="4654296" y="822960"/>
+            <a:ext cx="1252728" cy="347472"/>
+          </a:xfrm>
+          <a:prstGeom prst="rect">
+            <a:avLst/>
+          </a:prstGeom>
+          <a:noFill/>
+          <a:ln/>
+        </p:spPr>
+        <p:txBody>
+          <a:bodyPr wrap="square" lIns="0" tIns="0" rIns="0" bIns="0" rtlCol="0" anchor="ctr"/>
+          <a:lstStyle/>
+          <a:p>
+            <a:pPr algn="ctr" indent="0" marL="0">
+              <a:buNone/>
+            </a:pPr>
+            <a:r>
+              <a:rPr lang="en-US" sz="950" b="1" dirty="0">
                 <a:solidFill>
                   <a:srgbClr val="4CAF73"/>
                 </a:solidFill>
@@ -8783,38 +8825,55 @@
                 <a:ea typeface="Arial" pitchFamily="34" charset="-122"/>
                 <a:cs typeface="Arial" pitchFamily="34" charset="-120"/>
               </a:rPr>
-              <a:t>P2 標準  ★推奨</a:t>
-            </a:r>
-            <a:endParaRPr lang="en-US" sz="1150" dirty="0"/>
-          </a:p>
-        </p:txBody>
-      </p:sp>
-      <p:sp>
-        <p:nvSpPr>
-          <p:cNvPr id="14" name="Text 12"/>
-          <p:cNvSpPr/>
-          <p:nvPr/>
-        </p:nvSpPr>
-        <p:spPr>
-          <a:xfrm>
-            <a:off x="7214616" y="996696"/>
-            <a:ext cx="1481328" cy="384048"/>
-          </a:xfrm>
-          <a:prstGeom prst="rect">
-            <a:avLst/>
-          </a:prstGeom>
-          <a:noFill/>
-          <a:ln/>
-        </p:spPr>
-        <p:txBody>
-          <a:bodyPr wrap="square" lIns="0" tIns="0" rIns="0" bIns="0" rtlCol="0" anchor="ctr"/>
-          <a:lstStyle/>
-          <a:p>
-            <a:pPr algn="ctr" indent="0" marL="0">
-              <a:buNone/>
-            </a:pPr>
-            <a:r>
-              <a:rPr lang="en-US" sz="1150" b="1" dirty="0">
+              <a:t>P2 標準</a:t>
+            </a:r>
+            <a:endParaRPr lang="en-US" sz="950" dirty="0"/>
+          </a:p>
+          <a:p>
+            <a:pPr algn="ctr" indent="0" marL="0">
+              <a:buNone/>
+            </a:pPr>
+            <a:r>
+              <a:rPr lang="en-US" sz="950" b="1" dirty="0">
+                <a:solidFill>
+                  <a:srgbClr val="4CAF73"/>
+                </a:solidFill>
+                <a:latin typeface="Arial" pitchFamily="34" charset="0"/>
+                <a:ea typeface="Arial" pitchFamily="34" charset="-122"/>
+                <a:cs typeface="Arial" pitchFamily="34" charset="-120"/>
+              </a:rPr>
+              <a:t>★推奨</a:t>
+            </a:r>
+            <a:endParaRPr lang="en-US" sz="950" dirty="0"/>
+          </a:p>
+        </p:txBody>
+      </p:sp>
+      <p:sp>
+        <p:nvSpPr>
+          <p:cNvPr id="15" name="Text 13"/>
+          <p:cNvSpPr/>
+          <p:nvPr/>
+        </p:nvSpPr>
+        <p:spPr>
+          <a:xfrm>
+            <a:off x="5980176" y="822960"/>
+            <a:ext cx="1252728" cy="347472"/>
+          </a:xfrm>
+          <a:prstGeom prst="rect">
+            <a:avLst/>
+          </a:prstGeom>
+          <a:noFill/>
+          <a:ln/>
+        </p:spPr>
+        <p:txBody>
+          <a:bodyPr wrap="square" lIns="0" tIns="0" rIns="0" bIns="0" rtlCol="0" anchor="ctr"/>
+          <a:lstStyle/>
+          <a:p>
+            <a:pPr algn="ctr" indent="0" marL="0">
+              <a:buNone/>
+            </a:pPr>
+            <a:r>
+              <a:rPr lang="en-US" sz="950" b="1" dirty="0">
                 <a:solidFill>
                   <a:srgbClr val="F5A623"/>
                 </a:solidFill>
@@ -8822,22 +8881,95 @@
                 <a:ea typeface="Arial" pitchFamily="34" charset="-122"/>
                 <a:cs typeface="Arial" pitchFamily="34" charset="-120"/>
               </a:rPr>
-              <a:t>P3 AWS本格</a:t>
-            </a:r>
-            <a:endParaRPr lang="en-US" sz="1150" dirty="0"/>
-          </a:p>
-        </p:txBody>
-      </p:sp>
-      <p:sp>
-        <p:nvSpPr>
-          <p:cNvPr id="15" name="Shape 13"/>
-          <p:cNvSpPr/>
-          <p:nvPr/>
-        </p:nvSpPr>
-        <p:spPr>
-          <a:xfrm>
-            <a:off x="347472" y="1408176"/>
-            <a:ext cx="2542032" cy="475488"/>
+              <a:t>P3</a:t>
+            </a:r>
+            <a:endParaRPr lang="en-US" sz="950" dirty="0"/>
+          </a:p>
+          <a:p>
+            <a:pPr algn="ctr" indent="0" marL="0">
+              <a:buNone/>
+            </a:pPr>
+            <a:r>
+              <a:rPr lang="en-US" sz="950" b="1" dirty="0">
+                <a:solidFill>
+                  <a:srgbClr val="F5A623"/>
+                </a:solidFill>
+                <a:latin typeface="Arial" pitchFamily="34" charset="0"/>
+                <a:ea typeface="Arial" pitchFamily="34" charset="-122"/>
+                <a:cs typeface="Arial" pitchFamily="34" charset="-120"/>
+              </a:rPr>
+              <a:t>AWS本格</a:t>
+            </a:r>
+            <a:endParaRPr lang="en-US" sz="950" dirty="0"/>
+          </a:p>
+        </p:txBody>
+      </p:sp>
+      <p:sp>
+        <p:nvSpPr>
+          <p:cNvPr id="16" name="Text 14"/>
+          <p:cNvSpPr/>
+          <p:nvPr/>
+        </p:nvSpPr>
+        <p:spPr>
+          <a:xfrm>
+            <a:off x="7306056" y="822960"/>
+            <a:ext cx="1252728" cy="347472"/>
+          </a:xfrm>
+          <a:prstGeom prst="rect">
+            <a:avLst/>
+          </a:prstGeom>
+          <a:noFill/>
+          <a:ln/>
+        </p:spPr>
+        <p:txBody>
+          <a:bodyPr wrap="square" lIns="0" tIns="0" rIns="0" bIns="0" rtlCol="0" anchor="ctr"/>
+          <a:lstStyle/>
+          <a:p>
+            <a:pPr algn="ctr" indent="0" marL="0">
+              <a:buNone/>
+            </a:pPr>
+            <a:r>
+              <a:rPr lang="en-US" sz="950" b="1" dirty="0">
+                <a:solidFill>
+                  <a:srgbClr val="E94560"/>
+                </a:solidFill>
+                <a:latin typeface="Arial" pitchFamily="34" charset="0"/>
+                <a:ea typeface="Arial" pitchFamily="34" charset="-122"/>
+                <a:cs typeface="Arial" pitchFamily="34" charset="-120"/>
+              </a:rPr>
+              <a:t>P4 UTAGE</a:t>
+            </a:r>
+            <a:endParaRPr lang="en-US" sz="950" dirty="0"/>
+          </a:p>
+          <a:p>
+            <a:pPr algn="ctr" indent="0" marL="0">
+              <a:buNone/>
+            </a:pPr>
+            <a:r>
+              <a:rPr lang="en-US" sz="950" b="1" dirty="0">
+                <a:solidFill>
+                  <a:srgbClr val="E94560"/>
+                </a:solidFill>
+                <a:latin typeface="Arial" pitchFamily="34" charset="0"/>
+                <a:ea typeface="Arial" pitchFamily="34" charset="-122"/>
+                <a:cs typeface="Arial" pitchFamily="34" charset="-120"/>
+              </a:rPr>
+              <a:t>なし</a:t>
+            </a:r>
+            <a:endParaRPr lang="en-US" sz="950" dirty="0"/>
+          </a:p>
+        </p:txBody>
+      </p:sp>
+      <p:sp>
+        <p:nvSpPr>
+          <p:cNvPr id="17" name="Shape 15"/>
+          <p:cNvSpPr/>
+          <p:nvPr/>
+        </p:nvSpPr>
+        <p:spPr>
+          <a:xfrm>
+            <a:off x="274320" y="1188720"/>
+            <a:ext cx="2011680" cy="310896"/>
           </a:xfrm>
           <a:prstGeom prst="rect">
             <a:avLst/>
@@ -8850,14 +8982,14 @@
       </p:sp>
       <p:sp>
         <p:nvSpPr>
-          <p:cNvPr id="16" name="Shape 14"/>
-          <p:cNvSpPr/>
-          <p:nvPr/>
-        </p:nvSpPr>
-        <p:spPr>
-          <a:xfrm>
-            <a:off x="2907792" y="1408176"/>
-            <a:ext cx="1298448" cy="475488"/>
+          <p:cNvPr id="18" name="Shape 16"/>
+          <p:cNvSpPr/>
+          <p:nvPr/>
+        </p:nvSpPr>
+        <p:spPr>
+          <a:xfrm>
+            <a:off x="2286000" y="1188720"/>
+            <a:ext cx="1005840" cy="310896"/>
           </a:xfrm>
           <a:prstGeom prst="rect">
             <a:avLst/>
@@ -8870,14 +9002,14 @@
       </p:sp>
       <p:sp>
         <p:nvSpPr>
-          <p:cNvPr id="17" name="Shape 15"/>
-          <p:cNvSpPr/>
-          <p:nvPr/>
-        </p:nvSpPr>
-        <p:spPr>
-          <a:xfrm>
-            <a:off x="4224528" y="1408176"/>
-            <a:ext cx="1444752" cy="475488"/>
+          <p:cNvPr id="19" name="Shape 17"/>
+          <p:cNvSpPr/>
+          <p:nvPr/>
+        </p:nvSpPr>
+        <p:spPr>
+          <a:xfrm>
+            <a:off x="3291840" y="1188720"/>
+            <a:ext cx="1325880" cy="310896"/>
           </a:xfrm>
           <a:prstGeom prst="rect">
             <a:avLst/>
@@ -8895,14 +9027,14 @@
       </p:sp>
       <p:sp>
         <p:nvSpPr>
-          <p:cNvPr id="18" name="Shape 16"/>
-          <p:cNvSpPr/>
-          <p:nvPr/>
-        </p:nvSpPr>
-        <p:spPr>
-          <a:xfrm>
-            <a:off x="5687568" y="1408176"/>
-            <a:ext cx="1444752" cy="475488"/>
+          <p:cNvPr id="20" name="Shape 18"/>
+          <p:cNvSpPr/>
+          <p:nvPr/>
+        </p:nvSpPr>
+        <p:spPr>
+          <a:xfrm>
+            <a:off x="4617720" y="1188720"/>
+            <a:ext cx="1325880" cy="310896"/>
           </a:xfrm>
           <a:prstGeom prst="rect">
             <a:avLst/>
@@ -8920,14 +9052,14 @@
       </p:sp>
       <p:sp>
         <p:nvSpPr>
-          <p:cNvPr id="19" name="Shape 17"/>
-          <p:cNvSpPr/>
-          <p:nvPr/>
-        </p:nvSpPr>
-        <p:spPr>
-          <a:xfrm>
-            <a:off x="7150608" y="1408176"/>
-            <a:ext cx="1572768" cy="475488"/>
+          <p:cNvPr id="21" name="Shape 19"/>
+          <p:cNvSpPr/>
+          <p:nvPr/>
+        </p:nvSpPr>
+        <p:spPr>
+          <a:xfrm>
+            <a:off x="5943600" y="1188720"/>
+            <a:ext cx="1325880" cy="310896"/>
           </a:xfrm>
           <a:prstGeom prst="rect">
             <a:avLst/>
@@ -8945,14 +9077,39 @@
       </p:sp>
       <p:sp>
         <p:nvSpPr>
-          <p:cNvPr id="20" name="Text 18"/>
-          <p:cNvSpPr/>
-          <p:nvPr/>
-        </p:nvSpPr>
-        <p:spPr>
-          <a:xfrm>
-            <a:off x="411480" y="1481328"/>
-            <a:ext cx="2450592" cy="365760"/>
+          <p:cNvPr id="22" name="Shape 20"/>
+          <p:cNvSpPr/>
+          <p:nvPr/>
+        </p:nvSpPr>
+        <p:spPr>
+          <a:xfrm>
+            <a:off x="7269480" y="1188720"/>
+            <a:ext cx="1325880" cy="310896"/>
+          </a:xfrm>
+          <a:prstGeom prst="rect">
+            <a:avLst/>
+          </a:prstGeom>
+          <a:solidFill>
+            <a:srgbClr val="1A1A35"/>
+          </a:solidFill>
+          <a:ln w="12700">
+            <a:solidFill>
+              <a:srgbClr val="251A25"/>
+            </a:solidFill>
+            <a:prstDash val="solid"/>
+          </a:ln>
+        </p:spPr>
+      </p:sp>
+      <p:sp>
+        <p:nvSpPr>
+          <p:cNvPr id="23" name="Text 21"/>
+          <p:cNvSpPr/>
+          <p:nvPr/>
+        </p:nvSpPr>
+        <p:spPr>
+          <a:xfrm>
+            <a:off x="329184" y="1188720"/>
+            <a:ext cx="1920240" cy="310896"/>
           </a:xfrm>
           <a:prstGeom prst="rect">
             <a:avLst/>
@@ -8968,7 +9125,7 @@
               <a:buNone/>
             </a:pPr>
             <a:r>
-              <a:rPr lang="en-US" sz="1150" dirty="0">
+              <a:rPr lang="en-US" sz="950" dirty="0">
                 <a:solidFill>
                   <a:srgbClr val="E0E0E0"/>
                 </a:solidFill>
@@ -8978,36 +9135,36 @@
               </a:rPr>
               <a:t>UTAGE（会員管理・動画配信）</a:t>
             </a:r>
-            <a:endParaRPr lang="en-US" sz="1150" dirty="0"/>
-          </a:p>
-        </p:txBody>
-      </p:sp>
-      <p:sp>
-        <p:nvSpPr>
-          <p:cNvPr id="21" name="Text 19"/>
-          <p:cNvSpPr/>
-          <p:nvPr/>
-        </p:nvSpPr>
-        <p:spPr>
-          <a:xfrm>
-            <a:off x="2953512" y="1463040"/>
-            <a:ext cx="1225296" cy="402336"/>
-          </a:xfrm>
-          <a:prstGeom prst="rect">
-            <a:avLst/>
-          </a:prstGeom>
-          <a:noFill/>
-          <a:ln/>
-        </p:spPr>
-        <p:txBody>
-          <a:bodyPr wrap="square" lIns="0" tIns="0" rIns="0" bIns="0" rtlCol="0" anchor="ctr"/>
-          <a:lstStyle/>
-          <a:p>
-            <a:pPr algn="ctr" indent="0" marL="0">
-              <a:buNone/>
-            </a:pPr>
-            <a:r>
-              <a:rPr lang="en-US" sz="1100" b="1" dirty="0">
+            <a:endParaRPr lang="en-US" sz="950" dirty="0"/>
+          </a:p>
+        </p:txBody>
+      </p:sp>
+      <p:sp>
+        <p:nvSpPr>
+          <p:cNvPr id="24" name="Text 22"/>
+          <p:cNvSpPr/>
+          <p:nvPr/>
+        </p:nvSpPr>
+        <p:spPr>
+          <a:xfrm>
+            <a:off x="2313432" y="1188720"/>
+            <a:ext cx="950976" cy="310896"/>
+          </a:xfrm>
+          <a:prstGeom prst="rect">
+            <a:avLst/>
+          </a:prstGeom>
+          <a:noFill/>
+          <a:ln/>
+        </p:spPr>
+        <p:txBody>
+          <a:bodyPr wrap="square" lIns="0" tIns="0" rIns="0" bIns="0" rtlCol="0" anchor="ctr"/>
+          <a:lstStyle/>
+          <a:p>
+            <a:pPr algn="ctr" indent="0" marL="0">
+              <a:buNone/>
+            </a:pPr>
+            <a:r>
+              <a:rPr lang="en-US" sz="870" b="1" dirty="0">
                 <a:solidFill>
                   <a:srgbClr val="F5A623"/>
                 </a:solidFill>
@@ -9017,36 +9174,36 @@
               </a:rPr>
               <a:t>約20,000円</a:t>
             </a:r>
-            <a:endParaRPr lang="en-US" sz="1100" dirty="0"/>
-          </a:p>
-        </p:txBody>
-      </p:sp>
-      <p:sp>
-        <p:nvSpPr>
-          <p:cNvPr id="22" name="Text 20"/>
-          <p:cNvSpPr/>
-          <p:nvPr/>
-        </p:nvSpPr>
-        <p:spPr>
-          <a:xfrm>
-            <a:off x="4270248" y="1499616"/>
-            <a:ext cx="1353312" cy="329184"/>
-          </a:xfrm>
-          <a:prstGeom prst="rect">
-            <a:avLst/>
-          </a:prstGeom>
-          <a:noFill/>
-          <a:ln/>
-        </p:spPr>
-        <p:txBody>
-          <a:bodyPr wrap="square" lIns="0" tIns="0" rIns="0" bIns="0" rtlCol="0" anchor="ctr"/>
-          <a:lstStyle/>
-          <a:p>
-            <a:pPr algn="ctr" indent="0" marL="0">
-              <a:buNone/>
-            </a:pPr>
-            <a:r>
-              <a:rPr lang="en-US" sz="1600" b="1" dirty="0">
+            <a:endParaRPr lang="en-US" sz="870" dirty="0"/>
+          </a:p>
+        </p:txBody>
+      </p:sp>
+      <p:sp>
+        <p:nvSpPr>
+          <p:cNvPr id="25" name="Text 23"/>
+          <p:cNvSpPr/>
+          <p:nvPr/>
+        </p:nvSpPr>
+        <p:spPr>
+          <a:xfrm>
+            <a:off x="3319272" y="1188720"/>
+            <a:ext cx="1271016" cy="310896"/>
+          </a:xfrm>
+          <a:prstGeom prst="rect">
+            <a:avLst/>
+          </a:prstGeom>
+          <a:noFill/>
+          <a:ln/>
+        </p:spPr>
+        <p:txBody>
+          <a:bodyPr wrap="square" lIns="0" tIns="0" rIns="0" bIns="0" rtlCol="0" anchor="ctr"/>
+          <a:lstStyle/>
+          <a:p>
+            <a:pPr algn="ctr" indent="0" marL="0">
+              <a:buNone/>
+            </a:pPr>
+            <a:r>
+              <a:rPr lang="en-US" sz="1300" b="1" dirty="0">
                 <a:solidFill>
                   <a:srgbClr val="4A9EDB"/>
                 </a:solidFill>
@@ -9056,36 +9213,36 @@
               </a:rPr>
               <a:t>○</a:t>
             </a:r>
-            <a:endParaRPr lang="en-US" sz="1600" dirty="0"/>
-          </a:p>
-        </p:txBody>
-      </p:sp>
-      <p:sp>
-        <p:nvSpPr>
-          <p:cNvPr id="23" name="Text 21"/>
-          <p:cNvSpPr/>
-          <p:nvPr/>
-        </p:nvSpPr>
-        <p:spPr>
-          <a:xfrm>
-            <a:off x="5733288" y="1499616"/>
-            <a:ext cx="1353312" cy="329184"/>
-          </a:xfrm>
-          <a:prstGeom prst="rect">
-            <a:avLst/>
-          </a:prstGeom>
-          <a:noFill/>
-          <a:ln/>
-        </p:spPr>
-        <p:txBody>
-          <a:bodyPr wrap="square" lIns="0" tIns="0" rIns="0" bIns="0" rtlCol="0" anchor="ctr"/>
-          <a:lstStyle/>
-          <a:p>
-            <a:pPr algn="ctr" indent="0" marL="0">
-              <a:buNone/>
-            </a:pPr>
-            <a:r>
-              <a:rPr lang="en-US" sz="1600" b="1" dirty="0">
+            <a:endParaRPr lang="en-US" sz="1300" dirty="0"/>
+          </a:p>
+        </p:txBody>
+      </p:sp>
+      <p:sp>
+        <p:nvSpPr>
+          <p:cNvPr id="26" name="Text 24"/>
+          <p:cNvSpPr/>
+          <p:nvPr/>
+        </p:nvSpPr>
+        <p:spPr>
+          <a:xfrm>
+            <a:off x="4645152" y="1188720"/>
+            <a:ext cx="1271016" cy="310896"/>
+          </a:xfrm>
+          <a:prstGeom prst="rect">
+            <a:avLst/>
+          </a:prstGeom>
+          <a:noFill/>
+          <a:ln/>
+        </p:spPr>
+        <p:txBody>
+          <a:bodyPr wrap="square" lIns="0" tIns="0" rIns="0" bIns="0" rtlCol="0" anchor="ctr"/>
+          <a:lstStyle/>
+          <a:p>
+            <a:pPr algn="ctr" indent="0" marL="0">
+              <a:buNone/>
+            </a:pPr>
+            <a:r>
+              <a:rPr lang="en-US" sz="1300" b="1" dirty="0">
                 <a:solidFill>
                   <a:srgbClr val="4CAF73"/>
                 </a:solidFill>
@@ -9095,36 +9252,36 @@
               </a:rPr>
               <a:t>○</a:t>
             </a:r>
-            <a:endParaRPr lang="en-US" sz="1600" dirty="0"/>
-          </a:p>
-        </p:txBody>
-      </p:sp>
-      <p:sp>
-        <p:nvSpPr>
-          <p:cNvPr id="24" name="Text 22"/>
-          <p:cNvSpPr/>
-          <p:nvPr/>
-        </p:nvSpPr>
-        <p:spPr>
-          <a:xfrm>
-            <a:off x="7196328" y="1499616"/>
-            <a:ext cx="1481328" cy="329184"/>
-          </a:xfrm>
-          <a:prstGeom prst="rect">
-            <a:avLst/>
-          </a:prstGeom>
-          <a:noFill/>
-          <a:ln/>
-        </p:spPr>
-        <p:txBody>
-          <a:bodyPr wrap="square" lIns="0" tIns="0" rIns="0" bIns="0" rtlCol="0" anchor="ctr"/>
-          <a:lstStyle/>
-          <a:p>
-            <a:pPr algn="ctr" indent="0" marL="0">
-              <a:buNone/>
-            </a:pPr>
-            <a:r>
-              <a:rPr lang="en-US" sz="1600" b="1" dirty="0">
+            <a:endParaRPr lang="en-US" sz="1300" dirty="0"/>
+          </a:p>
+        </p:txBody>
+      </p:sp>
+      <p:sp>
+        <p:nvSpPr>
+          <p:cNvPr id="27" name="Text 25"/>
+          <p:cNvSpPr/>
+          <p:nvPr/>
+        </p:nvSpPr>
+        <p:spPr>
+          <a:xfrm>
+            <a:off x="5971032" y="1188720"/>
+            <a:ext cx="1271016" cy="310896"/>
+          </a:xfrm>
+          <a:prstGeom prst="rect">
+            <a:avLst/>
+          </a:prstGeom>
+          <a:noFill/>
+          <a:ln/>
+        </p:spPr>
+        <p:txBody>
+          <a:bodyPr wrap="square" lIns="0" tIns="0" rIns="0" bIns="0" rtlCol="0" anchor="ctr"/>
+          <a:lstStyle/>
+          <a:p>
+            <a:pPr algn="ctr" indent="0" marL="0">
+              <a:buNone/>
+            </a:pPr>
+            <a:r>
+              <a:rPr lang="en-US" sz="1300" b="1" dirty="0">
                 <a:solidFill>
                   <a:srgbClr val="F5A623"/>
                 </a:solidFill>
@@ -9134,20 +9291,59 @@
               </a:rPr>
               <a:t>○</a:t>
             </a:r>
-            <a:endParaRPr lang="en-US" sz="1600" dirty="0"/>
-          </a:p>
-        </p:txBody>
-      </p:sp>
-      <p:sp>
-        <p:nvSpPr>
-          <p:cNvPr id="25" name="Shape 23"/>
-          <p:cNvSpPr/>
-          <p:nvPr/>
-        </p:nvSpPr>
-        <p:spPr>
-          <a:xfrm>
-            <a:off x="347472" y="1883664"/>
-            <a:ext cx="2542032" cy="475488"/>
+            <a:endParaRPr lang="en-US" sz="1300" dirty="0"/>
+          </a:p>
+        </p:txBody>
+      </p:sp>
+      <p:sp>
+        <p:nvSpPr>
+          <p:cNvPr id="28" name="Text 26"/>
+          <p:cNvSpPr/>
+          <p:nvPr/>
+        </p:nvSpPr>
+        <p:spPr>
+          <a:xfrm>
+            <a:off x="7296912" y="1188720"/>
+            <a:ext cx="1271016" cy="310896"/>
+          </a:xfrm>
+          <a:prstGeom prst="rect">
+            <a:avLst/>
+          </a:prstGeom>
+          <a:noFill/>
+          <a:ln/>
+        </p:spPr>
+        <p:txBody>
+          <a:bodyPr wrap="square" lIns="0" tIns="0" rIns="0" bIns="0" rtlCol="0" anchor="ctr"/>
+          <a:lstStyle/>
+          <a:p>
+            <a:pPr algn="ctr" indent="0" marL="0">
+              <a:buNone/>
+            </a:pPr>
+            <a:r>
+              <a:rPr lang="en-US" sz="1300" dirty="0">
+                <a:solidFill>
+                  <a:srgbClr val="333355"/>
+                </a:solidFill>
+                <a:latin typeface="Arial" pitchFamily="34" charset="0"/>
+                <a:ea typeface="Arial" pitchFamily="34" charset="-122"/>
+                <a:cs typeface="Arial" pitchFamily="34" charset="-120"/>
+              </a:rPr>
+              <a:t>—</a:t>
+            </a:r>
+            <a:endParaRPr lang="en-US" sz="1300" dirty="0"/>
+          </a:p>
+        </p:txBody>
+      </p:sp>
+      <p:sp>
+        <p:nvSpPr>
+          <p:cNvPr id="29" name="Shape 27"/>
+          <p:cNvSpPr/>
+          <p:nvPr/>
+        </p:nvSpPr>
+        <p:spPr>
+          <a:xfrm>
+            <a:off x="274320" y="1499616"/>
+            <a:ext cx="2011680" cy="310896"/>
           </a:xfrm>
           <a:prstGeom prst="rect">
             <a:avLst/>
@@ -9160,14 +9356,14 @@
       </p:sp>
       <p:sp>
         <p:nvSpPr>
-          <p:cNvPr id="26" name="Shape 24"/>
-          <p:cNvSpPr/>
-          <p:nvPr/>
-        </p:nvSpPr>
-        <p:spPr>
-          <a:xfrm>
-            <a:off x="2907792" y="1883664"/>
-            <a:ext cx="1298448" cy="475488"/>
+          <p:cNvPr id="30" name="Shape 28"/>
+          <p:cNvSpPr/>
+          <p:nvPr/>
+        </p:nvSpPr>
+        <p:spPr>
+          <a:xfrm>
+            <a:off x="2286000" y="1499616"/>
+            <a:ext cx="1005840" cy="310896"/>
           </a:xfrm>
           <a:prstGeom prst="rect">
             <a:avLst/>
@@ -9180,14 +9376,14 @@
       </p:sp>
       <p:sp>
         <p:nvSpPr>
-          <p:cNvPr id="27" name="Shape 25"/>
-          <p:cNvSpPr/>
-          <p:nvPr/>
-        </p:nvSpPr>
-        <p:spPr>
-          <a:xfrm>
-            <a:off x="4224528" y="1883664"/>
-            <a:ext cx="1444752" cy="475488"/>
+          <p:cNvPr id="31" name="Shape 29"/>
+          <p:cNvSpPr/>
+          <p:nvPr/>
+        </p:nvSpPr>
+        <p:spPr>
+          <a:xfrm>
+            <a:off x="3291840" y="1499616"/>
+            <a:ext cx="1325880" cy="310896"/>
           </a:xfrm>
           <a:prstGeom prst="rect">
             <a:avLst/>
@@ -9205,14 +9401,14 @@
       </p:sp>
       <p:sp>
         <p:nvSpPr>
-          <p:cNvPr id="28" name="Shape 26"/>
-          <p:cNvSpPr/>
-          <p:nvPr/>
-        </p:nvSpPr>
-        <p:spPr>
-          <a:xfrm>
-            <a:off x="5687568" y="1883664"/>
-            <a:ext cx="1444752" cy="475488"/>
+          <p:cNvPr id="32" name="Shape 30"/>
+          <p:cNvSpPr/>
+          <p:nvPr/>
+        </p:nvSpPr>
+        <p:spPr>
+          <a:xfrm>
+            <a:off x="4617720" y="1499616"/>
+            <a:ext cx="1325880" cy="310896"/>
           </a:xfrm>
           <a:prstGeom prst="rect">
             <a:avLst/>
@@ -9230,14 +9426,14 @@
       </p:sp>
       <p:sp>
         <p:nvSpPr>
-          <p:cNvPr id="29" name="Shape 27"/>
-          <p:cNvSpPr/>
-          <p:nvPr/>
-        </p:nvSpPr>
-        <p:spPr>
-          <a:xfrm>
-            <a:off x="7150608" y="1883664"/>
-            <a:ext cx="1572768" cy="475488"/>
+          <p:cNvPr id="33" name="Shape 31"/>
+          <p:cNvSpPr/>
+          <p:nvPr/>
+        </p:nvSpPr>
+        <p:spPr>
+          <a:xfrm>
+            <a:off x="5943600" y="1499616"/>
+            <a:ext cx="1325880" cy="310896"/>
           </a:xfrm>
           <a:prstGeom prst="rect">
             <a:avLst/>
@@ -9255,14 +9451,39 @@
       </p:sp>
       <p:sp>
         <p:nvSpPr>
-          <p:cNvPr id="30" name="Text 28"/>
-          <p:cNvSpPr/>
-          <p:nvPr/>
-        </p:nvSpPr>
-        <p:spPr>
-          <a:xfrm>
-            <a:off x="411480" y="1956816"/>
-            <a:ext cx="2450592" cy="365760"/>
+          <p:cNvPr id="34" name="Shape 32"/>
+          <p:cNvSpPr/>
+          <p:nvPr/>
+        </p:nvSpPr>
+        <p:spPr>
+          <a:xfrm>
+            <a:off x="7269480" y="1499616"/>
+            <a:ext cx="1325880" cy="310896"/>
+          </a:xfrm>
+          <a:prstGeom prst="rect">
+            <a:avLst/>
+          </a:prstGeom>
+          <a:solidFill>
+            <a:srgbClr val="121225"/>
+          </a:solidFill>
+          <a:ln w="12700">
+            <a:solidFill>
+              <a:srgbClr val="251A25"/>
+            </a:solidFill>
+            <a:prstDash val="solid"/>
+          </a:ln>
+        </p:spPr>
+      </p:sp>
+      <p:sp>
+        <p:nvSpPr>
+          <p:cNvPr id="35" name="Text 33"/>
+          <p:cNvSpPr/>
+          <p:nvPr/>
+        </p:nvSpPr>
+        <p:spPr>
+          <a:xfrm>
+            <a:off x="329184" y="1499616"/>
+            <a:ext cx="1920240" cy="310896"/>
           </a:xfrm>
           <a:prstGeom prst="rect">
             <a:avLst/>
@@ -9278,7 +9499,7 @@
               <a:buNone/>
             </a:pPr>
             <a:r>
-              <a:rPr lang="en-US" sz="1150" dirty="0">
+              <a:rPr lang="en-US" sz="950" dirty="0">
                 <a:solidFill>
                   <a:srgbClr val="E0E0E0"/>
                 </a:solidFill>
@@ -9288,36 +9509,36 @@
               </a:rPr>
               <a:t>GitHub Pages（RPGアプリ）</a:t>
             </a:r>
-            <a:endParaRPr lang="en-US" sz="1150" dirty="0"/>
-          </a:p>
-        </p:txBody>
-      </p:sp>
-      <p:sp>
-        <p:nvSpPr>
-          <p:cNvPr id="31" name="Text 29"/>
-          <p:cNvSpPr/>
-          <p:nvPr/>
-        </p:nvSpPr>
-        <p:spPr>
-          <a:xfrm>
-            <a:off x="2953512" y="1938528"/>
-            <a:ext cx="1225296" cy="402336"/>
-          </a:xfrm>
-          <a:prstGeom prst="rect">
-            <a:avLst/>
-          </a:prstGeom>
-          <a:noFill/>
-          <a:ln/>
-        </p:spPr>
-        <p:txBody>
-          <a:bodyPr wrap="square" lIns="0" tIns="0" rIns="0" bIns="0" rtlCol="0" anchor="ctr"/>
-          <a:lstStyle/>
-          <a:p>
-            <a:pPr algn="ctr" indent="0" marL="0">
-              <a:buNone/>
-            </a:pPr>
-            <a:r>
-              <a:rPr lang="en-US" sz="1100" b="1" dirty="0">
+            <a:endParaRPr lang="en-US" sz="950" dirty="0"/>
+          </a:p>
+        </p:txBody>
+      </p:sp>
+      <p:sp>
+        <p:nvSpPr>
+          <p:cNvPr id="36" name="Text 34"/>
+          <p:cNvSpPr/>
+          <p:nvPr/>
+        </p:nvSpPr>
+        <p:spPr>
+          <a:xfrm>
+            <a:off x="2313432" y="1499616"/>
+            <a:ext cx="950976" cy="310896"/>
+          </a:xfrm>
+          <a:prstGeom prst="rect">
+            <a:avLst/>
+          </a:prstGeom>
+          <a:noFill/>
+          <a:ln/>
+        </p:spPr>
+        <p:txBody>
+          <a:bodyPr wrap="square" lIns="0" tIns="0" rIns="0" bIns="0" rtlCol="0" anchor="ctr"/>
+          <a:lstStyle/>
+          <a:p>
+            <a:pPr algn="ctr" indent="0" marL="0">
+              <a:buNone/>
+            </a:pPr>
+            <a:r>
+              <a:rPr lang="en-US" sz="870" b="1" dirty="0">
                 <a:solidFill>
                   <a:srgbClr val="4CAF73"/>
                 </a:solidFill>
@@ -9327,36 +9548,36 @@
               </a:rPr>
               <a:t>¥0</a:t>
             </a:r>
-            <a:endParaRPr lang="en-US" sz="1100" dirty="0"/>
-          </a:p>
-        </p:txBody>
-      </p:sp>
-      <p:sp>
-        <p:nvSpPr>
-          <p:cNvPr id="32" name="Text 30"/>
-          <p:cNvSpPr/>
-          <p:nvPr/>
-        </p:nvSpPr>
-        <p:spPr>
-          <a:xfrm>
-            <a:off x="4270248" y="1975104"/>
-            <a:ext cx="1353312" cy="329184"/>
-          </a:xfrm>
-          <a:prstGeom prst="rect">
-            <a:avLst/>
-          </a:prstGeom>
-          <a:noFill/>
-          <a:ln/>
-        </p:spPr>
-        <p:txBody>
-          <a:bodyPr wrap="square" lIns="0" tIns="0" rIns="0" bIns="0" rtlCol="0" anchor="ctr"/>
-          <a:lstStyle/>
-          <a:p>
-            <a:pPr algn="ctr" indent="0" marL="0">
-              <a:buNone/>
-            </a:pPr>
-            <a:r>
-              <a:rPr lang="en-US" sz="1600" b="1" dirty="0">
+            <a:endParaRPr lang="en-US" sz="870" dirty="0"/>
+          </a:p>
+        </p:txBody>
+      </p:sp>
+      <p:sp>
+        <p:nvSpPr>
+          <p:cNvPr id="37" name="Text 35"/>
+          <p:cNvSpPr/>
+          <p:nvPr/>
+        </p:nvSpPr>
+        <p:spPr>
+          <a:xfrm>
+            <a:off x="3319272" y="1499616"/>
+            <a:ext cx="1271016" cy="310896"/>
+          </a:xfrm>
+          <a:prstGeom prst="rect">
+            <a:avLst/>
+          </a:prstGeom>
+          <a:noFill/>
+          <a:ln/>
+        </p:spPr>
+        <p:txBody>
+          <a:bodyPr wrap="square" lIns="0" tIns="0" rIns="0" bIns="0" rtlCol="0" anchor="ctr"/>
+          <a:lstStyle/>
+          <a:p>
+            <a:pPr algn="ctr" indent="0" marL="0">
+              <a:buNone/>
+            </a:pPr>
+            <a:r>
+              <a:rPr lang="en-US" sz="1300" b="1" dirty="0">
                 <a:solidFill>
                   <a:srgbClr val="4A9EDB"/>
                 </a:solidFill>
@@ -9366,36 +9587,36 @@
               </a:rPr>
               <a:t>○</a:t>
             </a:r>
-            <a:endParaRPr lang="en-US" sz="1600" dirty="0"/>
-          </a:p>
-        </p:txBody>
-      </p:sp>
-      <p:sp>
-        <p:nvSpPr>
-          <p:cNvPr id="33" name="Text 31"/>
-          <p:cNvSpPr/>
-          <p:nvPr/>
-        </p:nvSpPr>
-        <p:spPr>
-          <a:xfrm>
-            <a:off x="5733288" y="1975104"/>
-            <a:ext cx="1353312" cy="329184"/>
-          </a:xfrm>
-          <a:prstGeom prst="rect">
-            <a:avLst/>
-          </a:prstGeom>
-          <a:noFill/>
-          <a:ln/>
-        </p:spPr>
-        <p:txBody>
-          <a:bodyPr wrap="square" lIns="0" tIns="0" rIns="0" bIns="0" rtlCol="0" anchor="ctr"/>
-          <a:lstStyle/>
-          <a:p>
-            <a:pPr algn="ctr" indent="0" marL="0">
-              <a:buNone/>
-            </a:pPr>
-            <a:r>
-              <a:rPr lang="en-US" sz="1600" b="1" dirty="0">
+            <a:endParaRPr lang="en-US" sz="1300" dirty="0"/>
+          </a:p>
+        </p:txBody>
+      </p:sp>
+      <p:sp>
+        <p:nvSpPr>
+          <p:cNvPr id="38" name="Text 36"/>
+          <p:cNvSpPr/>
+          <p:nvPr/>
+        </p:nvSpPr>
+        <p:spPr>
+          <a:xfrm>
+            <a:off x="4645152" y="1499616"/>
+            <a:ext cx="1271016" cy="310896"/>
+          </a:xfrm>
+          <a:prstGeom prst="rect">
+            <a:avLst/>
+          </a:prstGeom>
+          <a:noFill/>
+          <a:ln/>
+        </p:spPr>
+        <p:txBody>
+          <a:bodyPr wrap="square" lIns="0" tIns="0" rIns="0" bIns="0" rtlCol="0" anchor="ctr"/>
+          <a:lstStyle/>
+          <a:p>
+            <a:pPr algn="ctr" indent="0" marL="0">
+              <a:buNone/>
+            </a:pPr>
+            <a:r>
+              <a:rPr lang="en-US" sz="1300" b="1" dirty="0">
                 <a:solidFill>
                   <a:srgbClr val="4CAF73"/>
                 </a:solidFill>
@@ -9405,36 +9626,36 @@
               </a:rPr>
               <a:t>○</a:t>
             </a:r>
-            <a:endParaRPr lang="en-US" sz="1600" dirty="0"/>
-          </a:p>
-        </p:txBody>
-      </p:sp>
-      <p:sp>
-        <p:nvSpPr>
-          <p:cNvPr id="34" name="Text 32"/>
-          <p:cNvSpPr/>
-          <p:nvPr/>
-        </p:nvSpPr>
-        <p:spPr>
-          <a:xfrm>
-            <a:off x="7196328" y="1975104"/>
-            <a:ext cx="1481328" cy="329184"/>
-          </a:xfrm>
-          <a:prstGeom prst="rect">
-            <a:avLst/>
-          </a:prstGeom>
-          <a:noFill/>
-          <a:ln/>
-        </p:spPr>
-        <p:txBody>
-          <a:bodyPr wrap="square" lIns="0" tIns="0" rIns="0" bIns="0" rtlCol="0" anchor="ctr"/>
-          <a:lstStyle/>
-          <a:p>
-            <a:pPr algn="ctr" indent="0" marL="0">
-              <a:buNone/>
-            </a:pPr>
-            <a:r>
-              <a:rPr lang="en-US" sz="1600" dirty="0">
+            <a:endParaRPr lang="en-US" sz="1300" dirty="0"/>
+          </a:p>
+        </p:txBody>
+      </p:sp>
+      <p:sp>
+        <p:nvSpPr>
+          <p:cNvPr id="39" name="Text 37"/>
+          <p:cNvSpPr/>
+          <p:nvPr/>
+        </p:nvSpPr>
+        <p:spPr>
+          <a:xfrm>
+            <a:off x="5971032" y="1499616"/>
+            <a:ext cx="1271016" cy="310896"/>
+          </a:xfrm>
+          <a:prstGeom prst="rect">
+            <a:avLst/>
+          </a:prstGeom>
+          <a:noFill/>
+          <a:ln/>
+        </p:spPr>
+        <p:txBody>
+          <a:bodyPr wrap="square" lIns="0" tIns="0" rIns="0" bIns="0" rtlCol="0" anchor="ctr"/>
+          <a:lstStyle/>
+          <a:p>
+            <a:pPr algn="ctr" indent="0" marL="0">
+              <a:buNone/>
+            </a:pPr>
+            <a:r>
+              <a:rPr lang="en-US" sz="1300" dirty="0">
                 <a:solidFill>
                   <a:srgbClr val="333355"/>
                 </a:solidFill>
@@ -9444,20 +9665,59 @@
               </a:rPr>
               <a:t>—</a:t>
             </a:r>
-            <a:endParaRPr lang="en-US" sz="1600" dirty="0"/>
-          </a:p>
-        </p:txBody>
-      </p:sp>
-      <p:sp>
-        <p:nvSpPr>
-          <p:cNvPr id="35" name="Shape 33"/>
-          <p:cNvSpPr/>
-          <p:nvPr/>
-        </p:nvSpPr>
-        <p:spPr>
-          <a:xfrm>
-            <a:off x="347472" y="2359152"/>
-            <a:ext cx="2542032" cy="475488"/>
+            <a:endParaRPr lang="en-US" sz="1300" dirty="0"/>
+          </a:p>
+        </p:txBody>
+      </p:sp>
+      <p:sp>
+        <p:nvSpPr>
+          <p:cNvPr id="40" name="Text 38"/>
+          <p:cNvSpPr/>
+          <p:nvPr/>
+        </p:nvSpPr>
+        <p:spPr>
+          <a:xfrm>
+            <a:off x="7296912" y="1499616"/>
+            <a:ext cx="1271016" cy="310896"/>
+          </a:xfrm>
+          <a:prstGeom prst="rect">
+            <a:avLst/>
+          </a:prstGeom>
+          <a:noFill/>
+          <a:ln/>
+        </p:spPr>
+        <p:txBody>
+          <a:bodyPr wrap="square" lIns="0" tIns="0" rIns="0" bIns="0" rtlCol="0" anchor="ctr"/>
+          <a:lstStyle/>
+          <a:p>
+            <a:pPr algn="ctr" indent="0" marL="0">
+              <a:buNone/>
+            </a:pPr>
+            <a:r>
+              <a:rPr lang="en-US" sz="1300" b="1" dirty="0">
+                <a:solidFill>
+                  <a:srgbClr val="E94560"/>
+                </a:solidFill>
+                <a:latin typeface="Arial" pitchFamily="34" charset="0"/>
+                <a:ea typeface="Arial" pitchFamily="34" charset="-122"/>
+                <a:cs typeface="Arial" pitchFamily="34" charset="-120"/>
+              </a:rPr>
+              <a:t>○</a:t>
+            </a:r>
+            <a:endParaRPr lang="en-US" sz="1300" dirty="0"/>
+          </a:p>
+        </p:txBody>
+      </p:sp>
+      <p:sp>
+        <p:nvSpPr>
+          <p:cNvPr id="41" name="Shape 39"/>
+          <p:cNvSpPr/>
+          <p:nvPr/>
+        </p:nvSpPr>
+        <p:spPr>
+          <a:xfrm>
+            <a:off x="274320" y="1810512"/>
+            <a:ext cx="2011680" cy="310896"/>
           </a:xfrm>
           <a:prstGeom prst="rect">
             <a:avLst/>
@@ -9470,14 +9730,14 @@
       </p:sp>
       <p:sp>
         <p:nvSpPr>
-          <p:cNvPr id="36" name="Shape 34"/>
-          <p:cNvSpPr/>
-          <p:nvPr/>
-        </p:nvSpPr>
-        <p:spPr>
-          <a:xfrm>
-            <a:off x="2907792" y="2359152"/>
-            <a:ext cx="1298448" cy="475488"/>
+          <p:cNvPr id="42" name="Shape 40"/>
+          <p:cNvSpPr/>
+          <p:nvPr/>
+        </p:nvSpPr>
+        <p:spPr>
+          <a:xfrm>
+            <a:off x="2286000" y="1810512"/>
+            <a:ext cx="1005840" cy="310896"/>
           </a:xfrm>
           <a:prstGeom prst="rect">
             <a:avLst/>
@@ -9490,14 +9750,14 @@
       </p:sp>
       <p:sp>
         <p:nvSpPr>
-          <p:cNvPr id="37" name="Shape 35"/>
-          <p:cNvSpPr/>
-          <p:nvPr/>
-        </p:nvSpPr>
-        <p:spPr>
-          <a:xfrm>
-            <a:off x="4224528" y="2359152"/>
-            <a:ext cx="1444752" cy="475488"/>
+          <p:cNvPr id="43" name="Shape 41"/>
+          <p:cNvSpPr/>
+          <p:nvPr/>
+        </p:nvSpPr>
+        <p:spPr>
+          <a:xfrm>
+            <a:off x="3291840" y="1810512"/>
+            <a:ext cx="1325880" cy="310896"/>
           </a:xfrm>
           <a:prstGeom prst="rect">
             <a:avLst/>
@@ -9515,14 +9775,14 @@
       </p:sp>
       <p:sp>
         <p:nvSpPr>
-          <p:cNvPr id="38" name="Shape 36"/>
-          <p:cNvSpPr/>
-          <p:nvPr/>
-        </p:nvSpPr>
-        <p:spPr>
-          <a:xfrm>
-            <a:off x="5687568" y="2359152"/>
-            <a:ext cx="1444752" cy="475488"/>
+          <p:cNvPr id="44" name="Shape 42"/>
+          <p:cNvSpPr/>
+          <p:nvPr/>
+        </p:nvSpPr>
+        <p:spPr>
+          <a:xfrm>
+            <a:off x="4617720" y="1810512"/>
+            <a:ext cx="1325880" cy="310896"/>
           </a:xfrm>
           <a:prstGeom prst="rect">
             <a:avLst/>
@@ -9540,14 +9800,14 @@
       </p:sp>
       <p:sp>
         <p:nvSpPr>
-          <p:cNvPr id="39" name="Shape 37"/>
-          <p:cNvSpPr/>
-          <p:nvPr/>
-        </p:nvSpPr>
-        <p:spPr>
-          <a:xfrm>
-            <a:off x="7150608" y="2359152"/>
-            <a:ext cx="1572768" cy="475488"/>
+          <p:cNvPr id="45" name="Shape 43"/>
+          <p:cNvSpPr/>
+          <p:nvPr/>
+        </p:nvSpPr>
+        <p:spPr>
+          <a:xfrm>
+            <a:off x="5943600" y="1810512"/>
+            <a:ext cx="1325880" cy="310896"/>
           </a:xfrm>
           <a:prstGeom prst="rect">
             <a:avLst/>
@@ -9565,14 +9825,39 @@
       </p:sp>
       <p:sp>
         <p:nvSpPr>
-          <p:cNvPr id="40" name="Text 38"/>
-          <p:cNvSpPr/>
-          <p:nvPr/>
-        </p:nvSpPr>
-        <p:spPr>
-          <a:xfrm>
-            <a:off x="411480" y="2432304"/>
-            <a:ext cx="2450592" cy="365760"/>
+          <p:cNvPr id="46" name="Shape 44"/>
+          <p:cNvSpPr/>
+          <p:nvPr/>
+        </p:nvSpPr>
+        <p:spPr>
+          <a:xfrm>
+            <a:off x="7269480" y="1810512"/>
+            <a:ext cx="1325880" cy="310896"/>
+          </a:xfrm>
+          <a:prstGeom prst="rect">
+            <a:avLst/>
+          </a:prstGeom>
+          <a:solidFill>
+            <a:srgbClr val="1A1A35"/>
+          </a:solidFill>
+          <a:ln w="12700">
+            <a:solidFill>
+              <a:srgbClr val="251A25"/>
+            </a:solidFill>
+            <a:prstDash val="solid"/>
+          </a:ln>
+        </p:spPr>
+      </p:sp>
+      <p:sp>
+        <p:nvSpPr>
+          <p:cNvPr id="47" name="Text 45"/>
+          <p:cNvSpPr/>
+          <p:nvPr/>
+        </p:nvSpPr>
+        <p:spPr>
+          <a:xfrm>
+            <a:off x="329184" y="1810512"/>
+            <a:ext cx="1920240" cy="310896"/>
           </a:xfrm>
           <a:prstGeom prst="rect">
             <a:avLst/>
@@ -9588,7 +9873,7 @@
               <a:buNone/>
             </a:pPr>
             <a:r>
-              <a:rPr lang="en-US" sz="1150" dirty="0">
+              <a:rPr lang="en-US" sz="950" dirty="0">
                 <a:solidFill>
                   <a:srgbClr val="E0E0E0"/>
                 </a:solidFill>
@@ -9598,36 +9883,36 @@
               </a:rPr>
               <a:t>独自ドメイン</a:t>
             </a:r>
-            <a:endParaRPr lang="en-US" sz="1150" dirty="0"/>
-          </a:p>
-        </p:txBody>
-      </p:sp>
-      <p:sp>
-        <p:nvSpPr>
-          <p:cNvPr id="41" name="Text 39"/>
-          <p:cNvSpPr/>
-          <p:nvPr/>
-        </p:nvSpPr>
-        <p:spPr>
-          <a:xfrm>
-            <a:off x="2953512" y="2414016"/>
-            <a:ext cx="1225296" cy="402336"/>
-          </a:xfrm>
-          <a:prstGeom prst="rect">
-            <a:avLst/>
-          </a:prstGeom>
-          <a:noFill/>
-          <a:ln/>
-        </p:spPr>
-        <p:txBody>
-          <a:bodyPr wrap="square" lIns="0" tIns="0" rIns="0" bIns="0" rtlCol="0" anchor="ctr"/>
-          <a:lstStyle/>
-          <a:p>
-            <a:pPr algn="ctr" indent="0" marL="0">
-              <a:buNone/>
-            </a:pPr>
-            <a:r>
-              <a:rPr lang="en-US" sz="1100" b="1" dirty="0">
+            <a:endParaRPr lang="en-US" sz="950" dirty="0"/>
+          </a:p>
+        </p:txBody>
+      </p:sp>
+      <p:sp>
+        <p:nvSpPr>
+          <p:cNvPr id="48" name="Text 46"/>
+          <p:cNvSpPr/>
+          <p:nvPr/>
+        </p:nvSpPr>
+        <p:spPr>
+          <a:xfrm>
+            <a:off x="2313432" y="1810512"/>
+            <a:ext cx="950976" cy="310896"/>
+          </a:xfrm>
+          <a:prstGeom prst="rect">
+            <a:avLst/>
+          </a:prstGeom>
+          <a:noFill/>
+          <a:ln/>
+        </p:spPr>
+        <p:txBody>
+          <a:bodyPr wrap="square" lIns="0" tIns="0" rIns="0" bIns="0" rtlCol="0" anchor="ctr"/>
+          <a:lstStyle/>
+          <a:p>
+            <a:pPr algn="ctr" indent="0" marL="0">
+              <a:buNone/>
+            </a:pPr>
+            <a:r>
+              <a:rPr lang="en-US" sz="870" b="1" dirty="0">
                 <a:solidFill>
                   <a:srgbClr val="E0E0E0"/>
                 </a:solidFill>
@@ -9637,36 +9922,36 @@
               </a:rPr>
               <a:t>約150円</a:t>
             </a:r>
-            <a:endParaRPr lang="en-US" sz="1100" dirty="0"/>
-          </a:p>
-        </p:txBody>
-      </p:sp>
-      <p:sp>
-        <p:nvSpPr>
-          <p:cNvPr id="42" name="Text 40"/>
-          <p:cNvSpPr/>
-          <p:nvPr/>
-        </p:nvSpPr>
-        <p:spPr>
-          <a:xfrm>
-            <a:off x="4270248" y="2450592"/>
-            <a:ext cx="1353312" cy="329184"/>
-          </a:xfrm>
-          <a:prstGeom prst="rect">
-            <a:avLst/>
-          </a:prstGeom>
-          <a:noFill/>
-          <a:ln/>
-        </p:spPr>
-        <p:txBody>
-          <a:bodyPr wrap="square" lIns="0" tIns="0" rIns="0" bIns="0" rtlCol="0" anchor="ctr"/>
-          <a:lstStyle/>
-          <a:p>
-            <a:pPr algn="ctr" indent="0" marL="0">
-              <a:buNone/>
-            </a:pPr>
-            <a:r>
-              <a:rPr lang="en-US" sz="1600" dirty="0">
+            <a:endParaRPr lang="en-US" sz="870" dirty="0"/>
+          </a:p>
+        </p:txBody>
+      </p:sp>
+      <p:sp>
+        <p:nvSpPr>
+          <p:cNvPr id="49" name="Text 47"/>
+          <p:cNvSpPr/>
+          <p:nvPr/>
+        </p:nvSpPr>
+        <p:spPr>
+          <a:xfrm>
+            <a:off x="3319272" y="1810512"/>
+            <a:ext cx="1271016" cy="310896"/>
+          </a:xfrm>
+          <a:prstGeom prst="rect">
+            <a:avLst/>
+          </a:prstGeom>
+          <a:noFill/>
+          <a:ln/>
+        </p:spPr>
+        <p:txBody>
+          <a:bodyPr wrap="square" lIns="0" tIns="0" rIns="0" bIns="0" rtlCol="0" anchor="ctr"/>
+          <a:lstStyle/>
+          <a:p>
+            <a:pPr algn="ctr" indent="0" marL="0">
+              <a:buNone/>
+            </a:pPr>
+            <a:r>
+              <a:rPr lang="en-US" sz="1300" dirty="0">
                 <a:solidFill>
                   <a:srgbClr val="333355"/>
                 </a:solidFill>
@@ -9676,36 +9961,36 @@
               </a:rPr>
               <a:t>—</a:t>
             </a:r>
-            <a:endParaRPr lang="en-US" sz="1600" dirty="0"/>
-          </a:p>
-        </p:txBody>
-      </p:sp>
-      <p:sp>
-        <p:nvSpPr>
-          <p:cNvPr id="43" name="Text 41"/>
-          <p:cNvSpPr/>
-          <p:nvPr/>
-        </p:nvSpPr>
-        <p:spPr>
-          <a:xfrm>
-            <a:off x="5733288" y="2450592"/>
-            <a:ext cx="1353312" cy="329184"/>
-          </a:xfrm>
-          <a:prstGeom prst="rect">
-            <a:avLst/>
-          </a:prstGeom>
-          <a:noFill/>
-          <a:ln/>
-        </p:spPr>
-        <p:txBody>
-          <a:bodyPr wrap="square" lIns="0" tIns="0" rIns="0" bIns="0" rtlCol="0" anchor="ctr"/>
-          <a:lstStyle/>
-          <a:p>
-            <a:pPr algn="ctr" indent="0" marL="0">
-              <a:buNone/>
-            </a:pPr>
-            <a:r>
-              <a:rPr lang="en-US" sz="1600" b="1" dirty="0">
+            <a:endParaRPr lang="en-US" sz="1300" dirty="0"/>
+          </a:p>
+        </p:txBody>
+      </p:sp>
+      <p:sp>
+        <p:nvSpPr>
+          <p:cNvPr id="50" name="Text 48"/>
+          <p:cNvSpPr/>
+          <p:nvPr/>
+        </p:nvSpPr>
+        <p:spPr>
+          <a:xfrm>
+            <a:off x="4645152" y="1810512"/>
+            <a:ext cx="1271016" cy="310896"/>
+          </a:xfrm>
+          <a:prstGeom prst="rect">
+            <a:avLst/>
+          </a:prstGeom>
+          <a:noFill/>
+          <a:ln/>
+        </p:spPr>
+        <p:txBody>
+          <a:bodyPr wrap="square" lIns="0" tIns="0" rIns="0" bIns="0" rtlCol="0" anchor="ctr"/>
+          <a:lstStyle/>
+          <a:p>
+            <a:pPr algn="ctr" indent="0" marL="0">
+              <a:buNone/>
+            </a:pPr>
+            <a:r>
+              <a:rPr lang="en-US" sz="1300" b="1" dirty="0">
                 <a:solidFill>
                   <a:srgbClr val="4CAF73"/>
                 </a:solidFill>
@@ -9715,36 +10000,36 @@
               </a:rPr>
               <a:t>○</a:t>
             </a:r>
-            <a:endParaRPr lang="en-US" sz="1600" dirty="0"/>
-          </a:p>
-        </p:txBody>
-      </p:sp>
-      <p:sp>
-        <p:nvSpPr>
-          <p:cNvPr id="44" name="Text 42"/>
-          <p:cNvSpPr/>
-          <p:nvPr/>
-        </p:nvSpPr>
-        <p:spPr>
-          <a:xfrm>
-            <a:off x="7196328" y="2450592"/>
-            <a:ext cx="1481328" cy="329184"/>
-          </a:xfrm>
-          <a:prstGeom prst="rect">
-            <a:avLst/>
-          </a:prstGeom>
-          <a:noFill/>
-          <a:ln/>
-        </p:spPr>
-        <p:txBody>
-          <a:bodyPr wrap="square" lIns="0" tIns="0" rIns="0" bIns="0" rtlCol="0" anchor="ctr"/>
-          <a:lstStyle/>
-          <a:p>
-            <a:pPr algn="ctr" indent="0" marL="0">
-              <a:buNone/>
-            </a:pPr>
-            <a:r>
-              <a:rPr lang="en-US" sz="1600" b="1" dirty="0">
+            <a:endParaRPr lang="en-US" sz="1300" dirty="0"/>
+          </a:p>
+        </p:txBody>
+      </p:sp>
+      <p:sp>
+        <p:nvSpPr>
+          <p:cNvPr id="51" name="Text 49"/>
+          <p:cNvSpPr/>
+          <p:nvPr/>
+        </p:nvSpPr>
+        <p:spPr>
+          <a:xfrm>
+            <a:off x="5971032" y="1810512"/>
+            <a:ext cx="1271016" cy="310896"/>
+          </a:xfrm>
+          <a:prstGeom prst="rect">
+            <a:avLst/>
+          </a:prstGeom>
+          <a:noFill/>
+          <a:ln/>
+        </p:spPr>
+        <p:txBody>
+          <a:bodyPr wrap="square" lIns="0" tIns="0" rIns="0" bIns="0" rtlCol="0" anchor="ctr"/>
+          <a:lstStyle/>
+          <a:p>
+            <a:pPr algn="ctr" indent="0" marL="0">
+              <a:buNone/>
+            </a:pPr>
+            <a:r>
+              <a:rPr lang="en-US" sz="1300" b="1" dirty="0">
                 <a:solidFill>
                   <a:srgbClr val="F5A623"/>
                 </a:solidFill>
@@ -9754,20 +10039,59 @@
               </a:rPr>
               <a:t>○</a:t>
             </a:r>
-            <a:endParaRPr lang="en-US" sz="1600" dirty="0"/>
-          </a:p>
-        </p:txBody>
-      </p:sp>
-      <p:sp>
-        <p:nvSpPr>
-          <p:cNvPr id="45" name="Shape 43"/>
-          <p:cNvSpPr/>
-          <p:nvPr/>
-        </p:nvSpPr>
-        <p:spPr>
-          <a:xfrm>
-            <a:off x="347472" y="2834640"/>
-            <a:ext cx="2542032" cy="475488"/>
+            <a:endParaRPr lang="en-US" sz="1300" dirty="0"/>
+          </a:p>
+        </p:txBody>
+      </p:sp>
+      <p:sp>
+        <p:nvSpPr>
+          <p:cNvPr id="52" name="Text 50"/>
+          <p:cNvSpPr/>
+          <p:nvPr/>
+        </p:nvSpPr>
+        <p:spPr>
+          <a:xfrm>
+            <a:off x="7296912" y="1810512"/>
+            <a:ext cx="1271016" cy="310896"/>
+          </a:xfrm>
+          <a:prstGeom prst="rect">
+            <a:avLst/>
+          </a:prstGeom>
+          <a:noFill/>
+          <a:ln/>
+        </p:spPr>
+        <p:txBody>
+          <a:bodyPr wrap="square" lIns="0" tIns="0" rIns="0" bIns="0" rtlCol="0" anchor="ctr"/>
+          <a:lstStyle/>
+          <a:p>
+            <a:pPr algn="ctr" indent="0" marL="0">
+              <a:buNone/>
+            </a:pPr>
+            <a:r>
+              <a:rPr lang="en-US" sz="1300" b="1" dirty="0">
+                <a:solidFill>
+                  <a:srgbClr val="E94560"/>
+                </a:solidFill>
+                <a:latin typeface="Arial" pitchFamily="34" charset="0"/>
+                <a:ea typeface="Arial" pitchFamily="34" charset="-122"/>
+                <a:cs typeface="Arial" pitchFamily="34" charset="-120"/>
+              </a:rPr>
+              <a:t>○</a:t>
+            </a:r>
+            <a:endParaRPr lang="en-US" sz="1300" dirty="0"/>
+          </a:p>
+        </p:txBody>
+      </p:sp>
+      <p:sp>
+        <p:nvSpPr>
+          <p:cNvPr id="53" name="Shape 51"/>
+          <p:cNvSpPr/>
+          <p:nvPr/>
+        </p:nvSpPr>
+        <p:spPr>
+          <a:xfrm>
+            <a:off x="274320" y="2121408"/>
+            <a:ext cx="2011680" cy="310896"/>
           </a:xfrm>
           <a:prstGeom prst="rect">
             <a:avLst/>
@@ -9780,14 +10104,14 @@
       </p:sp>
       <p:sp>
         <p:nvSpPr>
-          <p:cNvPr id="46" name="Shape 44"/>
-          <p:cNvSpPr/>
-          <p:nvPr/>
-        </p:nvSpPr>
-        <p:spPr>
-          <a:xfrm>
-            <a:off x="2907792" y="2834640"/>
-            <a:ext cx="1298448" cy="475488"/>
+          <p:cNvPr id="54" name="Shape 52"/>
+          <p:cNvSpPr/>
+          <p:nvPr/>
+        </p:nvSpPr>
+        <p:spPr>
+          <a:xfrm>
+            <a:off x="2286000" y="2121408"/>
+            <a:ext cx="1005840" cy="310896"/>
           </a:xfrm>
           <a:prstGeom prst="rect">
             <a:avLst/>
@@ -9800,14 +10124,14 @@
       </p:sp>
       <p:sp>
         <p:nvSpPr>
-          <p:cNvPr id="47" name="Shape 45"/>
-          <p:cNvSpPr/>
-          <p:nvPr/>
-        </p:nvSpPr>
-        <p:spPr>
-          <a:xfrm>
-            <a:off x="4224528" y="2834640"/>
-            <a:ext cx="1444752" cy="475488"/>
+          <p:cNvPr id="55" name="Shape 53"/>
+          <p:cNvSpPr/>
+          <p:nvPr/>
+        </p:nvSpPr>
+        <p:spPr>
+          <a:xfrm>
+            <a:off x="3291840" y="2121408"/>
+            <a:ext cx="1325880" cy="310896"/>
           </a:xfrm>
           <a:prstGeom prst="rect">
             <a:avLst/>
@@ -9825,14 +10149,14 @@
       </p:sp>
       <p:sp>
         <p:nvSpPr>
-          <p:cNvPr id="48" name="Shape 46"/>
-          <p:cNvSpPr/>
-          <p:nvPr/>
-        </p:nvSpPr>
-        <p:spPr>
-          <a:xfrm>
-            <a:off x="5687568" y="2834640"/>
-            <a:ext cx="1444752" cy="475488"/>
+          <p:cNvPr id="56" name="Shape 54"/>
+          <p:cNvSpPr/>
+          <p:nvPr/>
+        </p:nvSpPr>
+        <p:spPr>
+          <a:xfrm>
+            <a:off x="4617720" y="2121408"/>
+            <a:ext cx="1325880" cy="310896"/>
           </a:xfrm>
           <a:prstGeom prst="rect">
             <a:avLst/>
@@ -9850,14 +10174,14 @@
       </p:sp>
       <p:sp>
         <p:nvSpPr>
-          <p:cNvPr id="49" name="Shape 47"/>
-          <p:cNvSpPr/>
-          <p:nvPr/>
-        </p:nvSpPr>
-        <p:spPr>
-          <a:xfrm>
-            <a:off x="7150608" y="2834640"/>
-            <a:ext cx="1572768" cy="475488"/>
+          <p:cNvPr id="57" name="Shape 55"/>
+          <p:cNvSpPr/>
+          <p:nvPr/>
+        </p:nvSpPr>
+        <p:spPr>
+          <a:xfrm>
+            <a:off x="5943600" y="2121408"/>
+            <a:ext cx="1325880" cy="310896"/>
           </a:xfrm>
           <a:prstGeom prst="rect">
             <a:avLst/>
@@ -9875,14 +10199,39 @@
       </p:sp>
       <p:sp>
         <p:nvSpPr>
-          <p:cNvPr id="50" name="Text 48"/>
-          <p:cNvSpPr/>
-          <p:nvPr/>
-        </p:nvSpPr>
-        <p:spPr>
-          <a:xfrm>
-            <a:off x="411480" y="2907792"/>
-            <a:ext cx="2450592" cy="365760"/>
+          <p:cNvPr id="58" name="Shape 56"/>
+          <p:cNvSpPr/>
+          <p:nvPr/>
+        </p:nvSpPr>
+        <p:spPr>
+          <a:xfrm>
+            <a:off x="7269480" y="2121408"/>
+            <a:ext cx="1325880" cy="310896"/>
+          </a:xfrm>
+          <a:prstGeom prst="rect">
+            <a:avLst/>
+          </a:prstGeom>
+          <a:solidFill>
+            <a:srgbClr val="121225"/>
+          </a:solidFill>
+          <a:ln w="12700">
+            <a:solidFill>
+              <a:srgbClr val="251A25"/>
+            </a:solidFill>
+            <a:prstDash val="solid"/>
+          </a:ln>
+        </p:spPr>
+      </p:sp>
+      <p:sp>
+        <p:nvSpPr>
+          <p:cNvPr id="59" name="Text 57"/>
+          <p:cNvSpPr/>
+          <p:nvPr/>
+        </p:nvSpPr>
+        <p:spPr>
+          <a:xfrm>
+            <a:off x="329184" y="2121408"/>
+            <a:ext cx="1920240" cy="310896"/>
           </a:xfrm>
           <a:prstGeom prst="rect">
             <a:avLst/>
@@ -9898,7 +10247,7 @@
               <a:buNone/>
             </a:pPr>
             <a:r>
-              <a:rPr lang="en-US" sz="1150" dirty="0">
+              <a:rPr lang="en-US" sz="950" dirty="0">
                 <a:solidFill>
                   <a:srgbClr val="E0E0E0"/>
                 </a:solidFill>
@@ -9908,36 +10257,36 @@
               </a:rPr>
               <a:t>AWS S3 + CloudFront</a:t>
             </a:r>
-            <a:endParaRPr lang="en-US" sz="1150" dirty="0"/>
-          </a:p>
-        </p:txBody>
-      </p:sp>
-      <p:sp>
-        <p:nvSpPr>
-          <p:cNvPr id="51" name="Text 49"/>
-          <p:cNvSpPr/>
-          <p:nvPr/>
-        </p:nvSpPr>
-        <p:spPr>
-          <a:xfrm>
-            <a:off x="2953512" y="2889504"/>
-            <a:ext cx="1225296" cy="402336"/>
-          </a:xfrm>
-          <a:prstGeom prst="rect">
-            <a:avLst/>
-          </a:prstGeom>
-          <a:noFill/>
-          <a:ln/>
-        </p:spPr>
-        <p:txBody>
-          <a:bodyPr wrap="square" lIns="0" tIns="0" rIns="0" bIns="0" rtlCol="0" anchor="ctr"/>
-          <a:lstStyle/>
-          <a:p>
-            <a:pPr algn="ctr" indent="0" marL="0">
-              <a:buNone/>
-            </a:pPr>
-            <a:r>
-              <a:rPr lang="en-US" sz="1100" b="1" dirty="0">
+            <a:endParaRPr lang="en-US" sz="950" dirty="0"/>
+          </a:p>
+        </p:txBody>
+      </p:sp>
+      <p:sp>
+        <p:nvSpPr>
+          <p:cNvPr id="60" name="Text 58"/>
+          <p:cNvSpPr/>
+          <p:nvPr/>
+        </p:nvSpPr>
+        <p:spPr>
+          <a:xfrm>
+            <a:off x="2313432" y="2121408"/>
+            <a:ext cx="950976" cy="310896"/>
+          </a:xfrm>
+          <a:prstGeom prst="rect">
+            <a:avLst/>
+          </a:prstGeom>
+          <a:noFill/>
+          <a:ln/>
+        </p:spPr>
+        <p:txBody>
+          <a:bodyPr wrap="square" lIns="0" tIns="0" rIns="0" bIns="0" rtlCol="0" anchor="ctr"/>
+          <a:lstStyle/>
+          <a:p>
+            <a:pPr algn="ctr" indent="0" marL="0">
+              <a:buNone/>
+            </a:pPr>
+            <a:r>
+              <a:rPr lang="en-US" sz="870" b="1" dirty="0">
                 <a:solidFill>
                   <a:srgbClr val="E0E0E0"/>
                 </a:solidFill>
@@ -9947,36 +10296,36 @@
               </a:rPr>
               <a:t>約100円</a:t>
             </a:r>
-            <a:endParaRPr lang="en-US" sz="1100" dirty="0"/>
-          </a:p>
-        </p:txBody>
-      </p:sp>
-      <p:sp>
-        <p:nvSpPr>
-          <p:cNvPr id="52" name="Text 50"/>
-          <p:cNvSpPr/>
-          <p:nvPr/>
-        </p:nvSpPr>
-        <p:spPr>
-          <a:xfrm>
-            <a:off x="4270248" y="2926080"/>
-            <a:ext cx="1353312" cy="329184"/>
-          </a:xfrm>
-          <a:prstGeom prst="rect">
-            <a:avLst/>
-          </a:prstGeom>
-          <a:noFill/>
-          <a:ln/>
-        </p:spPr>
-        <p:txBody>
-          <a:bodyPr wrap="square" lIns="0" tIns="0" rIns="0" bIns="0" rtlCol="0" anchor="ctr"/>
-          <a:lstStyle/>
-          <a:p>
-            <a:pPr algn="ctr" indent="0" marL="0">
-              <a:buNone/>
-            </a:pPr>
-            <a:r>
-              <a:rPr lang="en-US" sz="1600" dirty="0">
+            <a:endParaRPr lang="en-US" sz="870" dirty="0"/>
+          </a:p>
+        </p:txBody>
+      </p:sp>
+      <p:sp>
+        <p:nvSpPr>
+          <p:cNvPr id="61" name="Text 59"/>
+          <p:cNvSpPr/>
+          <p:nvPr/>
+        </p:nvSpPr>
+        <p:spPr>
+          <a:xfrm>
+            <a:off x="3319272" y="2121408"/>
+            <a:ext cx="1271016" cy="310896"/>
+          </a:xfrm>
+          <a:prstGeom prst="rect">
+            <a:avLst/>
+          </a:prstGeom>
+          <a:noFill/>
+          <a:ln/>
+        </p:spPr>
+        <p:txBody>
+          <a:bodyPr wrap="square" lIns="0" tIns="0" rIns="0" bIns="0" rtlCol="0" anchor="ctr"/>
+          <a:lstStyle/>
+          <a:p>
+            <a:pPr algn="ctr" indent="0" marL="0">
+              <a:buNone/>
+            </a:pPr>
+            <a:r>
+              <a:rPr lang="en-US" sz="1300" dirty="0">
                 <a:solidFill>
                   <a:srgbClr val="333355"/>
                 </a:solidFill>
@@ -9986,36 +10335,36 @@
               </a:rPr>
               <a:t>—</a:t>
             </a:r>
-            <a:endParaRPr lang="en-US" sz="1600" dirty="0"/>
-          </a:p>
-        </p:txBody>
-      </p:sp>
-      <p:sp>
-        <p:nvSpPr>
-          <p:cNvPr id="53" name="Text 51"/>
-          <p:cNvSpPr/>
-          <p:nvPr/>
-        </p:nvSpPr>
-        <p:spPr>
-          <a:xfrm>
-            <a:off x="5733288" y="2926080"/>
-            <a:ext cx="1353312" cy="329184"/>
-          </a:xfrm>
-          <a:prstGeom prst="rect">
-            <a:avLst/>
-          </a:prstGeom>
-          <a:noFill/>
-          <a:ln/>
-        </p:spPr>
-        <p:txBody>
-          <a:bodyPr wrap="square" lIns="0" tIns="0" rIns="0" bIns="0" rtlCol="0" anchor="ctr"/>
-          <a:lstStyle/>
-          <a:p>
-            <a:pPr algn="ctr" indent="0" marL="0">
-              <a:buNone/>
-            </a:pPr>
-            <a:r>
-              <a:rPr lang="en-US" sz="1600" dirty="0">
+            <a:endParaRPr lang="en-US" sz="1300" dirty="0"/>
+          </a:p>
+        </p:txBody>
+      </p:sp>
+      <p:sp>
+        <p:nvSpPr>
+          <p:cNvPr id="62" name="Text 60"/>
+          <p:cNvSpPr/>
+          <p:nvPr/>
+        </p:nvSpPr>
+        <p:spPr>
+          <a:xfrm>
+            <a:off x="4645152" y="2121408"/>
+            <a:ext cx="1271016" cy="310896"/>
+          </a:xfrm>
+          <a:prstGeom prst="rect">
+            <a:avLst/>
+          </a:prstGeom>
+          <a:noFill/>
+          <a:ln/>
+        </p:spPr>
+        <p:txBody>
+          <a:bodyPr wrap="square" lIns="0" tIns="0" rIns="0" bIns="0" rtlCol="0" anchor="ctr"/>
+          <a:lstStyle/>
+          <a:p>
+            <a:pPr algn="ctr" indent="0" marL="0">
+              <a:buNone/>
+            </a:pPr>
+            <a:r>
+              <a:rPr lang="en-US" sz="1300" dirty="0">
                 <a:solidFill>
                   <a:srgbClr val="333355"/>
                 </a:solidFill>
@@ -10025,36 +10374,36 @@
               </a:rPr>
               <a:t>—</a:t>
             </a:r>
-            <a:endParaRPr lang="en-US" sz="1600" dirty="0"/>
-          </a:p>
-        </p:txBody>
-      </p:sp>
-      <p:sp>
-        <p:nvSpPr>
-          <p:cNvPr id="54" name="Text 52"/>
-          <p:cNvSpPr/>
-          <p:nvPr/>
-        </p:nvSpPr>
-        <p:spPr>
-          <a:xfrm>
-            <a:off x="7196328" y="2926080"/>
-            <a:ext cx="1481328" cy="329184"/>
-          </a:xfrm>
-          <a:prstGeom prst="rect">
-            <a:avLst/>
-          </a:prstGeom>
-          <a:noFill/>
-          <a:ln/>
-        </p:spPr>
-        <p:txBody>
-          <a:bodyPr wrap="square" lIns="0" tIns="0" rIns="0" bIns="0" rtlCol="0" anchor="ctr"/>
-          <a:lstStyle/>
-          <a:p>
-            <a:pPr algn="ctr" indent="0" marL="0">
-              <a:buNone/>
-            </a:pPr>
-            <a:r>
-              <a:rPr lang="en-US" sz="1600" b="1" dirty="0">
+            <a:endParaRPr lang="en-US" sz="1300" dirty="0"/>
+          </a:p>
+        </p:txBody>
+      </p:sp>
+      <p:sp>
+        <p:nvSpPr>
+          <p:cNvPr id="63" name="Text 61"/>
+          <p:cNvSpPr/>
+          <p:nvPr/>
+        </p:nvSpPr>
+        <p:spPr>
+          <a:xfrm>
+            <a:off x="5971032" y="2121408"/>
+            <a:ext cx="1271016" cy="310896"/>
+          </a:xfrm>
+          <a:prstGeom prst="rect">
+            <a:avLst/>
+          </a:prstGeom>
+          <a:noFill/>
+          <a:ln/>
+        </p:spPr>
+        <p:txBody>
+          <a:bodyPr wrap="square" lIns="0" tIns="0" rIns="0" bIns="0" rtlCol="0" anchor="ctr"/>
+          <a:lstStyle/>
+          <a:p>
+            <a:pPr algn="ctr" indent="0" marL="0">
+              <a:buNone/>
+            </a:pPr>
+            <a:r>
+              <a:rPr lang="en-US" sz="1300" b="1" dirty="0">
                 <a:solidFill>
                   <a:srgbClr val="F5A623"/>
                 </a:solidFill>
@@ -10064,20 +10413,59 @@
               </a:rPr>
               <a:t>○</a:t>
             </a:r>
-            <a:endParaRPr lang="en-US" sz="1600" dirty="0"/>
-          </a:p>
-        </p:txBody>
-      </p:sp>
-      <p:sp>
-        <p:nvSpPr>
-          <p:cNvPr id="55" name="Shape 53"/>
-          <p:cNvSpPr/>
-          <p:nvPr/>
-        </p:nvSpPr>
-        <p:spPr>
-          <a:xfrm>
-            <a:off x="347472" y="3310128"/>
-            <a:ext cx="2542032" cy="475488"/>
+            <a:endParaRPr lang="en-US" sz="1300" dirty="0"/>
+          </a:p>
+        </p:txBody>
+      </p:sp>
+      <p:sp>
+        <p:nvSpPr>
+          <p:cNvPr id="64" name="Text 62"/>
+          <p:cNvSpPr/>
+          <p:nvPr/>
+        </p:nvSpPr>
+        <p:spPr>
+          <a:xfrm>
+            <a:off x="7296912" y="2121408"/>
+            <a:ext cx="1271016" cy="310896"/>
+          </a:xfrm>
+          <a:prstGeom prst="rect">
+            <a:avLst/>
+          </a:prstGeom>
+          <a:noFill/>
+          <a:ln/>
+        </p:spPr>
+        <p:txBody>
+          <a:bodyPr wrap="square" lIns="0" tIns="0" rIns="0" bIns="0" rtlCol="0" anchor="ctr"/>
+          <a:lstStyle/>
+          <a:p>
+            <a:pPr algn="ctr" indent="0" marL="0">
+              <a:buNone/>
+            </a:pPr>
+            <a:r>
+              <a:rPr lang="en-US" sz="1300" dirty="0">
+                <a:solidFill>
+                  <a:srgbClr val="333355"/>
+                </a:solidFill>
+                <a:latin typeface="Arial" pitchFamily="34" charset="0"/>
+                <a:ea typeface="Arial" pitchFamily="34" charset="-122"/>
+                <a:cs typeface="Arial" pitchFamily="34" charset="-120"/>
+              </a:rPr>
+              <a:t>—</a:t>
+            </a:r>
+            <a:endParaRPr lang="en-US" sz="1300" dirty="0"/>
+          </a:p>
+        </p:txBody>
+      </p:sp>
+      <p:sp>
+        <p:nvSpPr>
+          <p:cNvPr id="65" name="Shape 63"/>
+          <p:cNvSpPr/>
+          <p:nvPr/>
+        </p:nvSpPr>
+        <p:spPr>
+          <a:xfrm>
+            <a:off x="274320" y="2432304"/>
+            <a:ext cx="2011680" cy="310896"/>
           </a:xfrm>
           <a:prstGeom prst="rect">
             <a:avLst/>
@@ -10090,14 +10478,14 @@
       </p:sp>
       <p:sp>
         <p:nvSpPr>
-          <p:cNvPr id="56" name="Shape 54"/>
-          <p:cNvSpPr/>
-          <p:nvPr/>
-        </p:nvSpPr>
-        <p:spPr>
-          <a:xfrm>
-            <a:off x="2907792" y="3310128"/>
-            <a:ext cx="1298448" cy="475488"/>
+          <p:cNvPr id="66" name="Shape 64"/>
+          <p:cNvSpPr/>
+          <p:nvPr/>
+        </p:nvSpPr>
+        <p:spPr>
+          <a:xfrm>
+            <a:off x="2286000" y="2432304"/>
+            <a:ext cx="1005840" cy="310896"/>
           </a:xfrm>
           <a:prstGeom prst="rect">
             <a:avLst/>
@@ -10110,14 +10498,14 @@
       </p:sp>
       <p:sp>
         <p:nvSpPr>
-          <p:cNvPr id="57" name="Shape 55"/>
-          <p:cNvSpPr/>
-          <p:nvPr/>
-        </p:nvSpPr>
-        <p:spPr>
-          <a:xfrm>
-            <a:off x="4224528" y="3310128"/>
-            <a:ext cx="1444752" cy="475488"/>
+          <p:cNvPr id="67" name="Shape 65"/>
+          <p:cNvSpPr/>
+          <p:nvPr/>
+        </p:nvSpPr>
+        <p:spPr>
+          <a:xfrm>
+            <a:off x="3291840" y="2432304"/>
+            <a:ext cx="1325880" cy="310896"/>
           </a:xfrm>
           <a:prstGeom prst="rect">
             <a:avLst/>
@@ -10135,14 +10523,14 @@
       </p:sp>
       <p:sp>
         <p:nvSpPr>
-          <p:cNvPr id="58" name="Shape 56"/>
-          <p:cNvSpPr/>
-          <p:nvPr/>
-        </p:nvSpPr>
-        <p:spPr>
-          <a:xfrm>
-            <a:off x="5687568" y="3310128"/>
-            <a:ext cx="1444752" cy="475488"/>
+          <p:cNvPr id="68" name="Shape 66"/>
+          <p:cNvSpPr/>
+          <p:nvPr/>
+        </p:nvSpPr>
+        <p:spPr>
+          <a:xfrm>
+            <a:off x="4617720" y="2432304"/>
+            <a:ext cx="1325880" cy="310896"/>
           </a:xfrm>
           <a:prstGeom prst="rect">
             <a:avLst/>
@@ -10160,14 +10548,14 @@
       </p:sp>
       <p:sp>
         <p:nvSpPr>
-          <p:cNvPr id="59" name="Shape 57"/>
-          <p:cNvSpPr/>
-          <p:nvPr/>
-        </p:nvSpPr>
-        <p:spPr>
-          <a:xfrm>
-            <a:off x="7150608" y="3310128"/>
-            <a:ext cx="1572768" cy="475488"/>
+          <p:cNvPr id="69" name="Shape 67"/>
+          <p:cNvSpPr/>
+          <p:nvPr/>
+        </p:nvSpPr>
+        <p:spPr>
+          <a:xfrm>
+            <a:off x="5943600" y="2432304"/>
+            <a:ext cx="1325880" cy="310896"/>
           </a:xfrm>
           <a:prstGeom prst="rect">
             <a:avLst/>
@@ -10185,14 +10573,39 @@
       </p:sp>
       <p:sp>
         <p:nvSpPr>
-          <p:cNvPr id="60" name="Text 58"/>
-          <p:cNvSpPr/>
-          <p:nvPr/>
-        </p:nvSpPr>
-        <p:spPr>
-          <a:xfrm>
-            <a:off x="411480" y="3383280"/>
-            <a:ext cx="2450592" cy="365760"/>
+          <p:cNvPr id="70" name="Shape 68"/>
+          <p:cNvSpPr/>
+          <p:nvPr/>
+        </p:nvSpPr>
+        <p:spPr>
+          <a:xfrm>
+            <a:off x="7269480" y="2432304"/>
+            <a:ext cx="1325880" cy="310896"/>
+          </a:xfrm>
+          <a:prstGeom prst="rect">
+            <a:avLst/>
+          </a:prstGeom>
+          <a:solidFill>
+            <a:srgbClr val="1A1A35"/>
+          </a:solidFill>
+          <a:ln w="12700">
+            <a:solidFill>
+              <a:srgbClr val="251A25"/>
+            </a:solidFill>
+            <a:prstDash val="solid"/>
+          </a:ln>
+        </p:spPr>
+      </p:sp>
+      <p:sp>
+        <p:nvSpPr>
+          <p:cNvPr id="71" name="Text 69"/>
+          <p:cNvSpPr/>
+          <p:nvPr/>
+        </p:nvSpPr>
+        <p:spPr>
+          <a:xfrm>
+            <a:off x="329184" y="2432304"/>
+            <a:ext cx="1920240" cy="310896"/>
           </a:xfrm>
           <a:prstGeom prst="rect">
             <a:avLst/>
@@ -10208,7 +10621,7 @@
               <a:buNone/>
             </a:pPr>
             <a:r>
-              <a:rPr lang="en-US" sz="1150" dirty="0">
+              <a:rPr lang="en-US" sz="950" dirty="0">
                 <a:solidFill>
                   <a:srgbClr val="E0E0E0"/>
                 </a:solidFill>
@@ -10218,36 +10631,36 @@
               </a:rPr>
               <a:t>AWSバックエンド（進捗DB）</a:t>
             </a:r>
-            <a:endParaRPr lang="en-US" sz="1150" dirty="0"/>
-          </a:p>
-        </p:txBody>
-      </p:sp>
-      <p:sp>
-        <p:nvSpPr>
-          <p:cNvPr id="61" name="Text 59"/>
-          <p:cNvSpPr/>
-          <p:nvPr/>
-        </p:nvSpPr>
-        <p:spPr>
-          <a:xfrm>
-            <a:off x="2953512" y="3364992"/>
-            <a:ext cx="1225296" cy="402336"/>
-          </a:xfrm>
-          <a:prstGeom prst="rect">
-            <a:avLst/>
-          </a:prstGeom>
-          <a:noFill/>
-          <a:ln/>
-        </p:spPr>
-        <p:txBody>
-          <a:bodyPr wrap="square" lIns="0" tIns="0" rIns="0" bIns="0" rtlCol="0" anchor="ctr"/>
-          <a:lstStyle/>
-          <a:p>
-            <a:pPr algn="ctr" indent="0" marL="0">
-              <a:buNone/>
-            </a:pPr>
-            <a:r>
-              <a:rPr lang="en-US" sz="1100" b="1" dirty="0">
+            <a:endParaRPr lang="en-US" sz="950" dirty="0"/>
+          </a:p>
+        </p:txBody>
+      </p:sp>
+      <p:sp>
+        <p:nvSpPr>
+          <p:cNvPr id="72" name="Text 70"/>
+          <p:cNvSpPr/>
+          <p:nvPr/>
+        </p:nvSpPr>
+        <p:spPr>
+          <a:xfrm>
+            <a:off x="2313432" y="2432304"/>
+            <a:ext cx="950976" cy="310896"/>
+          </a:xfrm>
+          <a:prstGeom prst="rect">
+            <a:avLst/>
+          </a:prstGeom>
+          <a:noFill/>
+          <a:ln/>
+        </p:spPr>
+        <p:txBody>
+          <a:bodyPr wrap="square" lIns="0" tIns="0" rIns="0" bIns="0" rtlCol="0" anchor="ctr"/>
+          <a:lstStyle/>
+          <a:p>
+            <a:pPr algn="ctr" indent="0" marL="0">
+              <a:buNone/>
+            </a:pPr>
+            <a:r>
+              <a:rPr lang="en-US" sz="870" b="1" dirty="0">
                 <a:solidFill>
                   <a:srgbClr val="F5A623"/>
                 </a:solidFill>
@@ -10255,16 +10668,116 @@
                 <a:ea typeface="Arial" pitchFamily="34" charset="-122"/>
                 <a:cs typeface="Arial" pitchFamily="34" charset="-120"/>
               </a:rPr>
-              <a:t>約3,000〜</a:t>
-            </a:r>
-            <a:endParaRPr lang="en-US" sz="1100" dirty="0"/>
-          </a:p>
-          <a:p>
-            <a:pPr algn="ctr" indent="0" marL="0">
-              <a:buNone/>
-            </a:pPr>
-            <a:r>
-              <a:rPr lang="en-US" sz="1100" b="1" dirty="0">
+              <a:t>約3,000〜10,000円</a:t>
+            </a:r>
+            <a:endParaRPr lang="en-US" sz="870" dirty="0"/>
+          </a:p>
+        </p:txBody>
+      </p:sp>
+      <p:sp>
+        <p:nvSpPr>
+          <p:cNvPr id="73" name="Text 71"/>
+          <p:cNvSpPr/>
+          <p:nvPr/>
+        </p:nvSpPr>
+        <p:spPr>
+          <a:xfrm>
+            <a:off x="3319272" y="2432304"/>
+            <a:ext cx="1271016" cy="310896"/>
+          </a:xfrm>
+          <a:prstGeom prst="rect">
+            <a:avLst/>
+          </a:prstGeom>
+          <a:noFill/>
+          <a:ln/>
+        </p:spPr>
+        <p:txBody>
+          <a:bodyPr wrap="square" lIns="0" tIns="0" rIns="0" bIns="0" rtlCol="0" anchor="ctr"/>
+          <a:lstStyle/>
+          <a:p>
+            <a:pPr algn="ctr" indent="0" marL="0">
+              <a:buNone/>
+            </a:pPr>
+            <a:r>
+              <a:rPr lang="en-US" sz="1300" dirty="0">
+                <a:solidFill>
+                  <a:srgbClr val="333355"/>
+                </a:solidFill>
+                <a:latin typeface="Arial" pitchFamily="34" charset="0"/>
+                <a:ea typeface="Arial" pitchFamily="34" charset="-122"/>
+                <a:cs typeface="Arial" pitchFamily="34" charset="-120"/>
+              </a:rPr>
+              <a:t>—</a:t>
+            </a:r>
+            <a:endParaRPr lang="en-US" sz="1300" dirty="0"/>
+          </a:p>
+        </p:txBody>
+      </p:sp>
+      <p:sp>
+        <p:nvSpPr>
+          <p:cNvPr id="74" name="Text 72"/>
+          <p:cNvSpPr/>
+          <p:nvPr/>
+        </p:nvSpPr>
+        <p:spPr>
+          <a:xfrm>
+            <a:off x="4645152" y="2432304"/>
+            <a:ext cx="1271016" cy="310896"/>
+          </a:xfrm>
+          <a:prstGeom prst="rect">
+            <a:avLst/>
+          </a:prstGeom>
+          <a:noFill/>
+          <a:ln/>
+        </p:spPr>
+        <p:txBody>
+          <a:bodyPr wrap="square" lIns="0" tIns="0" rIns="0" bIns="0" rtlCol="0" anchor="ctr"/>
+          <a:lstStyle/>
+          <a:p>
+            <a:pPr algn="ctr" indent="0" marL="0">
+              <a:buNone/>
+            </a:pPr>
+            <a:r>
+              <a:rPr lang="en-US" sz="1300" dirty="0">
+                <a:solidFill>
+                  <a:srgbClr val="333355"/>
+                </a:solidFill>
+                <a:latin typeface="Arial" pitchFamily="34" charset="0"/>
+                <a:ea typeface="Arial" pitchFamily="34" charset="-122"/>
+                <a:cs typeface="Arial" pitchFamily="34" charset="-120"/>
+              </a:rPr>
+              <a:t>—</a:t>
+            </a:r>
+            <a:endParaRPr lang="en-US" sz="1300" dirty="0"/>
+          </a:p>
+        </p:txBody>
+      </p:sp>
+      <p:sp>
+        <p:nvSpPr>
+          <p:cNvPr id="75" name="Text 73"/>
+          <p:cNvSpPr/>
+          <p:nvPr/>
+        </p:nvSpPr>
+        <p:spPr>
+          <a:xfrm>
+            <a:off x="5971032" y="2432304"/>
+            <a:ext cx="1271016" cy="310896"/>
+          </a:xfrm>
+          <a:prstGeom prst="rect">
+            <a:avLst/>
+          </a:prstGeom>
+          <a:noFill/>
+          <a:ln/>
+        </p:spPr>
+        <p:txBody>
+          <a:bodyPr wrap="square" lIns="0" tIns="0" rIns="0" bIns="0" rtlCol="0" anchor="ctr"/>
+          <a:lstStyle/>
+          <a:p>
+            <a:pPr algn="ctr" indent="0" marL="0">
+              <a:buNone/>
+            </a:pPr>
+            <a:r>
+              <a:rPr lang="en-US" sz="1300" b="1" dirty="0">
                 <a:solidFill>
                   <a:srgbClr val="F5A623"/>
                 </a:solidFill>
@@ -10272,38 +10785,38 @@
                 <a:ea typeface="Arial" pitchFamily="34" charset="-122"/>
                 <a:cs typeface="Arial" pitchFamily="34" charset="-120"/>
               </a:rPr>
-              <a:t>10,000円</a:t>
-            </a:r>
-            <a:endParaRPr lang="en-US" sz="1100" dirty="0"/>
-          </a:p>
-        </p:txBody>
-      </p:sp>
-      <p:sp>
-        <p:nvSpPr>
-          <p:cNvPr id="62" name="Text 60"/>
-          <p:cNvSpPr/>
-          <p:nvPr/>
-        </p:nvSpPr>
-        <p:spPr>
-          <a:xfrm>
-            <a:off x="4270248" y="3401568"/>
-            <a:ext cx="1353312" cy="329184"/>
-          </a:xfrm>
-          <a:prstGeom prst="rect">
-            <a:avLst/>
-          </a:prstGeom>
-          <a:noFill/>
-          <a:ln/>
-        </p:spPr>
-        <p:txBody>
-          <a:bodyPr wrap="square" lIns="0" tIns="0" rIns="0" bIns="0" rtlCol="0" anchor="ctr"/>
-          <a:lstStyle/>
-          <a:p>
-            <a:pPr algn="ctr" indent="0" marL="0">
-              <a:buNone/>
-            </a:pPr>
-            <a:r>
-              <a:rPr lang="en-US" sz="1600" dirty="0">
+              <a:t>○</a:t>
+            </a:r>
+            <a:endParaRPr lang="en-US" sz="1300" dirty="0"/>
+          </a:p>
+        </p:txBody>
+      </p:sp>
+      <p:sp>
+        <p:nvSpPr>
+          <p:cNvPr id="76" name="Text 74"/>
+          <p:cNvSpPr/>
+          <p:nvPr/>
+        </p:nvSpPr>
+        <p:spPr>
+          <a:xfrm>
+            <a:off x="7296912" y="2432304"/>
+            <a:ext cx="1271016" cy="310896"/>
+          </a:xfrm>
+          <a:prstGeom prst="rect">
+            <a:avLst/>
+          </a:prstGeom>
+          <a:noFill/>
+          <a:ln/>
+        </p:spPr>
+        <p:txBody>
+          <a:bodyPr wrap="square" lIns="0" tIns="0" rIns="0" bIns="0" rtlCol="0" anchor="ctr"/>
+          <a:lstStyle/>
+          <a:p>
+            <a:pPr algn="ctr" indent="0" marL="0">
+              <a:buNone/>
+            </a:pPr>
+            <a:r>
+              <a:rPr lang="en-US" sz="1300" dirty="0">
                 <a:solidFill>
                   <a:srgbClr val="333355"/>
                 </a:solidFill>
@@ -10313,98 +10826,20 @@
               </a:rPr>
               <a:t>—</a:t>
             </a:r>
-            <a:endParaRPr lang="en-US" sz="1600" dirty="0"/>
-          </a:p>
-        </p:txBody>
-      </p:sp>
-      <p:sp>
-        <p:nvSpPr>
-          <p:cNvPr id="63" name="Text 61"/>
-          <p:cNvSpPr/>
-          <p:nvPr/>
-        </p:nvSpPr>
-        <p:spPr>
-          <a:xfrm>
-            <a:off x="5733288" y="3401568"/>
-            <a:ext cx="1353312" cy="329184"/>
-          </a:xfrm>
-          <a:prstGeom prst="rect">
-            <a:avLst/>
-          </a:prstGeom>
-          <a:noFill/>
-          <a:ln/>
-        </p:spPr>
-        <p:txBody>
-          <a:bodyPr wrap="square" lIns="0" tIns="0" rIns="0" bIns="0" rtlCol="0" anchor="ctr"/>
-          <a:lstStyle/>
-          <a:p>
-            <a:pPr algn="ctr" indent="0" marL="0">
-              <a:buNone/>
-            </a:pPr>
-            <a:r>
-              <a:rPr lang="en-US" sz="1600" dirty="0">
-                <a:solidFill>
-                  <a:srgbClr val="333355"/>
-                </a:solidFill>
-                <a:latin typeface="Arial" pitchFamily="34" charset="0"/>
-                <a:ea typeface="Arial" pitchFamily="34" charset="-122"/>
-                <a:cs typeface="Arial" pitchFamily="34" charset="-120"/>
-              </a:rPr>
-              <a:t>—</a:t>
-            </a:r>
-            <a:endParaRPr lang="en-US" sz="1600" dirty="0"/>
-          </a:p>
-        </p:txBody>
-      </p:sp>
-      <p:sp>
-        <p:nvSpPr>
-          <p:cNvPr id="64" name="Text 62"/>
-          <p:cNvSpPr/>
-          <p:nvPr/>
-        </p:nvSpPr>
-        <p:spPr>
-          <a:xfrm>
-            <a:off x="7196328" y="3401568"/>
-            <a:ext cx="1481328" cy="329184"/>
-          </a:xfrm>
-          <a:prstGeom prst="rect">
-            <a:avLst/>
-          </a:prstGeom>
-          <a:noFill/>
-          <a:ln/>
-        </p:spPr>
-        <p:txBody>
-          <a:bodyPr wrap="square" lIns="0" tIns="0" rIns="0" bIns="0" rtlCol="0" anchor="ctr"/>
-          <a:lstStyle/>
-          <a:p>
-            <a:pPr algn="ctr" indent="0" marL="0">
-              <a:buNone/>
-            </a:pPr>
-            <a:r>
-              <a:rPr lang="en-US" sz="1600" b="1" dirty="0">
-                <a:solidFill>
-                  <a:srgbClr val="F5A623"/>
-                </a:solidFill>
-                <a:latin typeface="Arial" pitchFamily="34" charset="0"/>
-                <a:ea typeface="Arial" pitchFamily="34" charset="-122"/>
-                <a:cs typeface="Arial" pitchFamily="34" charset="-120"/>
-              </a:rPr>
-              <a:t>○</a:t>
-            </a:r>
-            <a:endParaRPr lang="en-US" sz="1600" dirty="0"/>
-          </a:p>
-        </p:txBody>
-      </p:sp>
-      <p:sp>
-        <p:nvSpPr>
-          <p:cNvPr id="65" name="Shape 63"/>
-          <p:cNvSpPr/>
-          <p:nvPr/>
-        </p:nvSpPr>
-        <p:spPr>
-          <a:xfrm>
-            <a:off x="347472" y="3785616"/>
-            <a:ext cx="2542032" cy="475488"/>
+            <a:endParaRPr lang="en-US" sz="1300" dirty="0"/>
+          </a:p>
+        </p:txBody>
+      </p:sp>
+      <p:sp>
+        <p:nvSpPr>
+          <p:cNvPr id="77" name="Shape 75"/>
+          <p:cNvSpPr/>
+          <p:nvPr/>
+        </p:nvSpPr>
+        <p:spPr>
+          <a:xfrm>
+            <a:off x="274320" y="2743200"/>
+            <a:ext cx="2011680" cy="310896"/>
           </a:xfrm>
           <a:prstGeom prst="rect">
             <a:avLst/>
@@ -10417,14 +10852,14 @@
       </p:sp>
       <p:sp>
         <p:nvSpPr>
-          <p:cNvPr id="66" name="Shape 64"/>
-          <p:cNvSpPr/>
-          <p:nvPr/>
-        </p:nvSpPr>
-        <p:spPr>
-          <a:xfrm>
-            <a:off x="2907792" y="3785616"/>
-            <a:ext cx="1298448" cy="475488"/>
+          <p:cNvPr id="78" name="Shape 76"/>
+          <p:cNvSpPr/>
+          <p:nvPr/>
+        </p:nvSpPr>
+        <p:spPr>
+          <a:xfrm>
+            <a:off x="2286000" y="2743200"/>
+            <a:ext cx="1005840" cy="310896"/>
           </a:xfrm>
           <a:prstGeom prst="rect">
             <a:avLst/>
@@ -10437,14 +10872,14 @@
       </p:sp>
       <p:sp>
         <p:nvSpPr>
-          <p:cNvPr id="67" name="Shape 65"/>
-          <p:cNvSpPr/>
-          <p:nvPr/>
-        </p:nvSpPr>
-        <p:spPr>
-          <a:xfrm>
-            <a:off x="4224528" y="3785616"/>
-            <a:ext cx="1444752" cy="475488"/>
+          <p:cNvPr id="79" name="Shape 77"/>
+          <p:cNvSpPr/>
+          <p:nvPr/>
+        </p:nvSpPr>
+        <p:spPr>
+          <a:xfrm>
+            <a:off x="3291840" y="2743200"/>
+            <a:ext cx="1325880" cy="310896"/>
           </a:xfrm>
           <a:prstGeom prst="rect">
             <a:avLst/>
@@ -10462,14 +10897,14 @@
       </p:sp>
       <p:sp>
         <p:nvSpPr>
-          <p:cNvPr id="68" name="Shape 66"/>
-          <p:cNvSpPr/>
-          <p:nvPr/>
-        </p:nvSpPr>
-        <p:spPr>
-          <a:xfrm>
-            <a:off x="5687568" y="3785616"/>
-            <a:ext cx="1444752" cy="475488"/>
+          <p:cNvPr id="80" name="Shape 78"/>
+          <p:cNvSpPr/>
+          <p:nvPr/>
+        </p:nvSpPr>
+        <p:spPr>
+          <a:xfrm>
+            <a:off x="4617720" y="2743200"/>
+            <a:ext cx="1325880" cy="310896"/>
           </a:xfrm>
           <a:prstGeom prst="rect">
             <a:avLst/>
@@ -10487,14 +10922,14 @@
       </p:sp>
       <p:sp>
         <p:nvSpPr>
-          <p:cNvPr id="69" name="Shape 67"/>
-          <p:cNvSpPr/>
-          <p:nvPr/>
-        </p:nvSpPr>
-        <p:spPr>
-          <a:xfrm>
-            <a:off x="7150608" y="3785616"/>
-            <a:ext cx="1572768" cy="475488"/>
+          <p:cNvPr id="81" name="Shape 79"/>
+          <p:cNvSpPr/>
+          <p:nvPr/>
+        </p:nvSpPr>
+        <p:spPr>
+          <a:xfrm>
+            <a:off x="5943600" y="2743200"/>
+            <a:ext cx="1325880" cy="310896"/>
           </a:xfrm>
           <a:prstGeom prst="rect">
             <a:avLst/>
@@ -10512,474 +10947,24 @@
       </p:sp>
       <p:sp>
         <p:nvSpPr>
-          <p:cNvPr id="70" name="Text 68"/>
-          <p:cNvSpPr/>
-          <p:nvPr/>
-        </p:nvSpPr>
-        <p:spPr>
-          <a:xfrm>
-            <a:off x="411480" y="3858768"/>
-            <a:ext cx="2450592" cy="365760"/>
-          </a:xfrm>
-          <a:prstGeom prst="rect">
-            <a:avLst/>
-          </a:prstGeom>
-          <a:noFill/>
-          <a:ln/>
-        </p:spPr>
-        <p:txBody>
-          <a:bodyPr wrap="square" lIns="0" tIns="0" rIns="0" bIns="0" rtlCol="0" anchor="ctr"/>
-          <a:lstStyle/>
-          <a:p>
-            <a:pPr indent="0" marL="0">
-              <a:buNone/>
-            </a:pPr>
-            <a:r>
-              <a:rPr lang="en-US" sz="1150" dirty="0">
-                <a:solidFill>
-                  <a:srgbClr val="E0E0E0"/>
-                </a:solidFill>
-                <a:latin typeface="Arial" pitchFamily="34" charset="0"/>
-                <a:ea typeface="Arial" pitchFamily="34" charset="-122"/>
-                <a:cs typeface="Arial" pitchFamily="34" charset="-120"/>
-              </a:rPr>
-              <a:t>開発費（Claude Code）</a:t>
-            </a:r>
-            <a:endParaRPr lang="en-US" sz="1150" dirty="0"/>
-          </a:p>
-        </p:txBody>
-      </p:sp>
-      <p:sp>
-        <p:nvSpPr>
-          <p:cNvPr id="71" name="Text 69"/>
-          <p:cNvSpPr/>
-          <p:nvPr/>
-        </p:nvSpPr>
-        <p:spPr>
-          <a:xfrm>
-            <a:off x="2953512" y="3840480"/>
-            <a:ext cx="1225296" cy="402336"/>
-          </a:xfrm>
-          <a:prstGeom prst="rect">
-            <a:avLst/>
-          </a:prstGeom>
-          <a:noFill/>
-          <a:ln/>
-        </p:spPr>
-        <p:txBody>
-          <a:bodyPr wrap="square" lIns="0" tIns="0" rIns="0" bIns="0" rtlCol="0" anchor="ctr"/>
-          <a:lstStyle/>
-          <a:p>
-            <a:pPr algn="ctr" indent="0" marL="0">
-              <a:buNone/>
-            </a:pPr>
-            <a:r>
-              <a:rPr lang="en-US" sz="1100" b="1" dirty="0">
-                <a:solidFill>
-                  <a:srgbClr val="4CAF73"/>
-                </a:solidFill>
-                <a:latin typeface="Arial" pitchFamily="34" charset="0"/>
-                <a:ea typeface="Arial" pitchFamily="34" charset="-122"/>
-                <a:cs typeface="Arial" pitchFamily="34" charset="-120"/>
-              </a:rPr>
-              <a:t>¥0</a:t>
-            </a:r>
-            <a:endParaRPr lang="en-US" sz="1100" dirty="0"/>
-          </a:p>
-        </p:txBody>
-      </p:sp>
-      <p:sp>
-        <p:nvSpPr>
-          <p:cNvPr id="72" name="Text 70"/>
-          <p:cNvSpPr/>
-          <p:nvPr/>
-        </p:nvSpPr>
-        <p:spPr>
-          <a:xfrm>
-            <a:off x="4270248" y="3877056"/>
-            <a:ext cx="1353312" cy="329184"/>
-          </a:xfrm>
-          <a:prstGeom prst="rect">
-            <a:avLst/>
-          </a:prstGeom>
-          <a:noFill/>
-          <a:ln/>
-        </p:spPr>
-        <p:txBody>
-          <a:bodyPr wrap="square" lIns="0" tIns="0" rIns="0" bIns="0" rtlCol="0" anchor="ctr"/>
-          <a:lstStyle/>
-          <a:p>
-            <a:pPr algn="ctr" indent="0" marL="0">
-              <a:buNone/>
-            </a:pPr>
-            <a:r>
-              <a:rPr lang="en-US" sz="1600" b="1" dirty="0">
-                <a:solidFill>
-                  <a:srgbClr val="4A9EDB"/>
-                </a:solidFill>
-                <a:latin typeface="Arial" pitchFamily="34" charset="0"/>
-                <a:ea typeface="Arial" pitchFamily="34" charset="-122"/>
-                <a:cs typeface="Arial" pitchFamily="34" charset="-120"/>
-              </a:rPr>
-              <a:t>○</a:t>
-            </a:r>
-            <a:endParaRPr lang="en-US" sz="1600" dirty="0"/>
-          </a:p>
-        </p:txBody>
-      </p:sp>
-      <p:sp>
-        <p:nvSpPr>
-          <p:cNvPr id="73" name="Text 71"/>
-          <p:cNvSpPr/>
-          <p:nvPr/>
-        </p:nvSpPr>
-        <p:spPr>
-          <a:xfrm>
-            <a:off x="5733288" y="3877056"/>
-            <a:ext cx="1353312" cy="329184"/>
-          </a:xfrm>
-          <a:prstGeom prst="rect">
-            <a:avLst/>
-          </a:prstGeom>
-          <a:noFill/>
-          <a:ln/>
-        </p:spPr>
-        <p:txBody>
-          <a:bodyPr wrap="square" lIns="0" tIns="0" rIns="0" bIns="0" rtlCol="0" anchor="ctr"/>
-          <a:lstStyle/>
-          <a:p>
-            <a:pPr algn="ctr" indent="0" marL="0">
-              <a:buNone/>
-            </a:pPr>
-            <a:r>
-              <a:rPr lang="en-US" sz="1600" b="1" dirty="0">
-                <a:solidFill>
-                  <a:srgbClr val="4CAF73"/>
-                </a:solidFill>
-                <a:latin typeface="Arial" pitchFamily="34" charset="0"/>
-                <a:ea typeface="Arial" pitchFamily="34" charset="-122"/>
-                <a:cs typeface="Arial" pitchFamily="34" charset="-120"/>
-              </a:rPr>
-              <a:t>○</a:t>
-            </a:r>
-            <a:endParaRPr lang="en-US" sz="1600" dirty="0"/>
-          </a:p>
-        </p:txBody>
-      </p:sp>
-      <p:sp>
-        <p:nvSpPr>
-          <p:cNvPr id="74" name="Text 72"/>
-          <p:cNvSpPr/>
-          <p:nvPr/>
-        </p:nvSpPr>
-        <p:spPr>
-          <a:xfrm>
-            <a:off x="7196328" y="3877056"/>
-            <a:ext cx="1481328" cy="329184"/>
-          </a:xfrm>
-          <a:prstGeom prst="rect">
-            <a:avLst/>
-          </a:prstGeom>
-          <a:noFill/>
-          <a:ln/>
-        </p:spPr>
-        <p:txBody>
-          <a:bodyPr wrap="square" lIns="0" tIns="0" rIns="0" bIns="0" rtlCol="0" anchor="ctr"/>
-          <a:lstStyle/>
-          <a:p>
-            <a:pPr algn="ctr" indent="0" marL="0">
-              <a:buNone/>
-            </a:pPr>
-            <a:r>
-              <a:rPr lang="en-US" sz="1600" b="1" dirty="0">
-                <a:solidFill>
-                  <a:srgbClr val="F5A623"/>
-                </a:solidFill>
-                <a:latin typeface="Arial" pitchFamily="34" charset="0"/>
-                <a:ea typeface="Arial" pitchFamily="34" charset="-122"/>
-                <a:cs typeface="Arial" pitchFamily="34" charset="-120"/>
-              </a:rPr>
-              <a:t>○</a:t>
-            </a:r>
-            <a:endParaRPr lang="en-US" sz="1600" dirty="0"/>
-          </a:p>
-        </p:txBody>
-      </p:sp>
-      <p:sp>
-        <p:nvSpPr>
-          <p:cNvPr id="75" name="Shape 73"/>
-          <p:cNvSpPr/>
-          <p:nvPr/>
-        </p:nvSpPr>
-        <p:spPr>
-          <a:xfrm>
-            <a:off x="347472" y="4315968"/>
-            <a:ext cx="3840480" cy="493776"/>
-          </a:xfrm>
-          <a:prstGeom prst="rect">
-            <a:avLst/>
-          </a:prstGeom>
-          <a:solidFill>
-            <a:srgbClr val="1A1535"/>
-          </a:solidFill>
-          <a:ln/>
-        </p:spPr>
-      </p:sp>
-      <p:sp>
-        <p:nvSpPr>
-          <p:cNvPr id="76" name="Text 74"/>
-          <p:cNvSpPr/>
-          <p:nvPr/>
-        </p:nvSpPr>
-        <p:spPr>
-          <a:xfrm>
-            <a:off x="411480" y="4407408"/>
-            <a:ext cx="2450592" cy="356616"/>
-          </a:xfrm>
-          <a:prstGeom prst="rect">
-            <a:avLst/>
-          </a:prstGeom>
-          <a:noFill/>
-          <a:ln/>
-        </p:spPr>
-        <p:txBody>
-          <a:bodyPr wrap="square" lIns="0" tIns="0" rIns="0" bIns="0" rtlCol="0" anchor="ctr"/>
-          <a:lstStyle/>
-          <a:p>
-            <a:pPr indent="0" marL="0">
-              <a:buNone/>
-            </a:pPr>
-            <a:r>
-              <a:rPr lang="en-US" sz="1300" b="1" dirty="0">
-                <a:solidFill>
-                  <a:srgbClr val="FFFFFF"/>
-                </a:solidFill>
-                <a:latin typeface="Arial" pitchFamily="34" charset="0"/>
-                <a:ea typeface="Arial" pitchFamily="34" charset="-122"/>
-                <a:cs typeface="Arial" pitchFamily="34" charset="-120"/>
-              </a:rPr>
-              <a:t>合計 / 月</a:t>
-            </a:r>
-            <a:endParaRPr lang="en-US" sz="1300" dirty="0"/>
-          </a:p>
-        </p:txBody>
-      </p:sp>
-      <p:sp>
-        <p:nvSpPr>
-          <p:cNvPr id="77" name="Shape 75"/>
-          <p:cNvSpPr/>
-          <p:nvPr/>
-        </p:nvSpPr>
-        <p:spPr>
-          <a:xfrm>
-            <a:off x="4224528" y="4315968"/>
-            <a:ext cx="1444752" cy="493776"/>
-          </a:xfrm>
-          <a:prstGeom prst="rect">
-            <a:avLst/>
-          </a:prstGeom>
-          <a:solidFill>
-            <a:srgbClr val="4A9EDB"/>
-          </a:solidFill>
-          <a:ln/>
-        </p:spPr>
-      </p:sp>
-      <p:sp>
-        <p:nvSpPr>
-          <p:cNvPr id="78" name="Text 76"/>
-          <p:cNvSpPr/>
-          <p:nvPr/>
-        </p:nvSpPr>
-        <p:spPr>
-          <a:xfrm>
-            <a:off x="4270248" y="4370832"/>
-            <a:ext cx="1353312" cy="402336"/>
-          </a:xfrm>
-          <a:prstGeom prst="rect">
-            <a:avLst/>
-          </a:prstGeom>
-          <a:noFill/>
-          <a:ln/>
-        </p:spPr>
-        <p:txBody>
-          <a:bodyPr wrap="square" lIns="0" tIns="0" rIns="0" bIns="0" rtlCol="0" anchor="ctr"/>
-          <a:lstStyle/>
-          <a:p>
-            <a:pPr algn="ctr" indent="0" marL="0">
-              <a:buNone/>
-            </a:pPr>
-            <a:r>
-              <a:rPr lang="en-US" sz="1200" b="1" dirty="0">
-                <a:solidFill>
-                  <a:srgbClr val="0D0D1A"/>
-                </a:solidFill>
-                <a:latin typeface="Arial" pitchFamily="34" charset="0"/>
-                <a:ea typeface="Arial" pitchFamily="34" charset="-122"/>
-                <a:cs typeface="Arial" pitchFamily="34" charset="-120"/>
-              </a:rPr>
-              <a:t>約20,000円</a:t>
-            </a:r>
-            <a:endParaRPr lang="en-US" sz="1200" dirty="0"/>
-          </a:p>
-        </p:txBody>
-      </p:sp>
-      <p:sp>
-        <p:nvSpPr>
-          <p:cNvPr id="79" name="Shape 77"/>
-          <p:cNvSpPr/>
-          <p:nvPr/>
-        </p:nvSpPr>
-        <p:spPr>
-          <a:xfrm>
-            <a:off x="5687568" y="4315968"/>
-            <a:ext cx="1444752" cy="493776"/>
-          </a:xfrm>
-          <a:prstGeom prst="rect">
-            <a:avLst/>
-          </a:prstGeom>
-          <a:solidFill>
-            <a:srgbClr val="4CAF73"/>
-          </a:solidFill>
-          <a:ln/>
-        </p:spPr>
-      </p:sp>
-      <p:sp>
-        <p:nvSpPr>
-          <p:cNvPr id="80" name="Text 78"/>
-          <p:cNvSpPr/>
-          <p:nvPr/>
-        </p:nvSpPr>
-        <p:spPr>
-          <a:xfrm>
-            <a:off x="5733288" y="4370832"/>
-            <a:ext cx="1353312" cy="402336"/>
-          </a:xfrm>
-          <a:prstGeom prst="rect">
-            <a:avLst/>
-          </a:prstGeom>
-          <a:noFill/>
-          <a:ln/>
-        </p:spPr>
-        <p:txBody>
-          <a:bodyPr wrap="square" lIns="0" tIns="0" rIns="0" bIns="0" rtlCol="0" anchor="ctr"/>
-          <a:lstStyle/>
-          <a:p>
-            <a:pPr algn="ctr" indent="0" marL="0">
-              <a:buNone/>
-            </a:pPr>
-            <a:r>
-              <a:rPr lang="en-US" sz="1200" b="1" dirty="0">
-                <a:solidFill>
-                  <a:srgbClr val="0D0D1A"/>
-                </a:solidFill>
-                <a:latin typeface="Arial" pitchFamily="34" charset="0"/>
-                <a:ea typeface="Arial" pitchFamily="34" charset="-122"/>
-                <a:cs typeface="Arial" pitchFamily="34" charset="-120"/>
-              </a:rPr>
-              <a:t>約20,150円</a:t>
-            </a:r>
-            <a:endParaRPr lang="en-US" sz="1200" dirty="0"/>
-          </a:p>
-        </p:txBody>
-      </p:sp>
-      <p:sp>
-        <p:nvSpPr>
-          <p:cNvPr id="81" name="Shape 79"/>
-          <p:cNvSpPr/>
-          <p:nvPr/>
-        </p:nvSpPr>
-        <p:spPr>
-          <a:xfrm>
-            <a:off x="7150608" y="4315968"/>
-            <a:ext cx="1572768" cy="493776"/>
-          </a:xfrm>
-          <a:prstGeom prst="rect">
-            <a:avLst/>
-          </a:prstGeom>
-          <a:solidFill>
-            <a:srgbClr val="F5A623"/>
-          </a:solidFill>
-          <a:ln/>
-        </p:spPr>
-      </p:sp>
-      <p:sp>
-        <p:nvSpPr>
-          <p:cNvPr id="82" name="Text 80"/>
-          <p:cNvSpPr/>
-          <p:nvPr/>
-        </p:nvSpPr>
-        <p:spPr>
-          <a:xfrm>
-            <a:off x="7196328" y="4370832"/>
-            <a:ext cx="1481328" cy="402336"/>
-          </a:xfrm>
-          <a:prstGeom prst="rect">
-            <a:avLst/>
-          </a:prstGeom>
-          <a:noFill/>
-          <a:ln/>
-        </p:spPr>
-        <p:txBody>
-          <a:bodyPr wrap="square" lIns="0" tIns="0" rIns="0" bIns="0" rtlCol="0" anchor="ctr"/>
-          <a:lstStyle/>
-          <a:p>
-            <a:pPr algn="ctr" indent="0" marL="0">
-              <a:buNone/>
-            </a:pPr>
-            <a:r>
-              <a:rPr lang="en-US" sz="1200" b="1" dirty="0">
-                <a:solidFill>
-                  <a:srgbClr val="0D0D1A"/>
-                </a:solidFill>
-                <a:latin typeface="Arial" pitchFamily="34" charset="0"/>
-                <a:ea typeface="Arial" pitchFamily="34" charset="-122"/>
-                <a:cs typeface="Arial" pitchFamily="34" charset="-120"/>
-              </a:rPr>
-              <a:t>約23,000〜</a:t>
-            </a:r>
-            <a:endParaRPr lang="en-US" sz="1200" dirty="0"/>
-          </a:p>
-          <a:p>
-            <a:pPr algn="ctr" indent="0" marL="0">
-              <a:buNone/>
-            </a:pPr>
-            <a:r>
-              <a:rPr lang="en-US" sz="1200" b="1" dirty="0">
-                <a:solidFill>
-                  <a:srgbClr val="0D0D1A"/>
-                </a:solidFill>
-                <a:latin typeface="Arial" pitchFamily="34" charset="0"/>
-                <a:ea typeface="Arial" pitchFamily="34" charset="-122"/>
-                <a:cs typeface="Arial" pitchFamily="34" charset="-120"/>
-              </a:rPr>
-              <a:t>30,000円</a:t>
-            </a:r>
-            <a:endParaRPr lang="en-US" sz="1200" dirty="0"/>
-          </a:p>
-        </p:txBody>
-      </p:sp>
-      <p:sp>
-        <p:nvSpPr>
-          <p:cNvPr id="83" name="Shape 81"/>
-          <p:cNvSpPr/>
-          <p:nvPr/>
-        </p:nvSpPr>
-        <p:spPr>
-          <a:xfrm>
-            <a:off x="347472" y="4901184"/>
-            <a:ext cx="8375904" cy="402336"/>
-          </a:xfrm>
-          <a:prstGeom prst="roundRect">
-            <a:avLst>
-              <a:gd name="adj" fmla="val 15909"/>
-            </a:avLst>
-          </a:prstGeom>
-          <a:solidFill>
-            <a:srgbClr val="201520"/>
+          <p:cNvPr id="82" name="Shape 80"/>
+          <p:cNvSpPr/>
+          <p:nvPr/>
+        </p:nvSpPr>
+        <p:spPr>
+          <a:xfrm>
+            <a:off x="7269480" y="2743200"/>
+            <a:ext cx="1325880" cy="310896"/>
+          </a:xfrm>
+          <a:prstGeom prst="rect">
+            <a:avLst/>
+          </a:prstGeom>
+          <a:solidFill>
+            <a:srgbClr val="121225"/>
           </a:solidFill>
           <a:ln w="12700">
             <a:solidFill>
-              <a:srgbClr val="F5A623"/>
+              <a:srgbClr val="251A25"/>
             </a:solidFill>
             <a:prstDash val="solid"/>
           </a:ln>
@@ -10987,14 +10972,388 @@
       </p:sp>
       <p:sp>
         <p:nvSpPr>
+          <p:cNvPr id="83" name="Text 81"/>
+          <p:cNvSpPr/>
+          <p:nvPr/>
+        </p:nvSpPr>
+        <p:spPr>
+          <a:xfrm>
+            <a:off x="329184" y="2743200"/>
+            <a:ext cx="1920240" cy="310896"/>
+          </a:xfrm>
+          <a:prstGeom prst="rect">
+            <a:avLst/>
+          </a:prstGeom>
+          <a:noFill/>
+          <a:ln/>
+        </p:spPr>
+        <p:txBody>
+          <a:bodyPr wrap="square" lIns="0" tIns="0" rIns="0" bIns="0" rtlCol="0" anchor="ctr"/>
+          <a:lstStyle/>
+          <a:p>
+            <a:pPr indent="0" marL="0">
+              <a:buNone/>
+            </a:pPr>
+            <a:r>
+              <a:rPr lang="en-US" sz="950" dirty="0">
+                <a:solidFill>
+                  <a:srgbClr val="E0E0E0"/>
+                </a:solidFill>
+                <a:latin typeface="Arial" pitchFamily="34" charset="0"/>
+                <a:ea typeface="Arial" pitchFamily="34" charset="-122"/>
+                <a:cs typeface="Arial" pitchFamily="34" charset="-120"/>
+              </a:rPr>
+              <a:t>Stripe決済（決済リンク直契約）</a:t>
+            </a:r>
+            <a:endParaRPr lang="en-US" sz="950" dirty="0"/>
+          </a:p>
+        </p:txBody>
+      </p:sp>
+      <p:sp>
+        <p:nvSpPr>
           <p:cNvPr id="84" name="Text 82"/>
           <p:cNvSpPr/>
           <p:nvPr/>
         </p:nvSpPr>
         <p:spPr>
           <a:xfrm>
-            <a:off x="457200" y="4965192"/>
-            <a:ext cx="8229600" cy="292608"/>
+            <a:off x="2313432" y="2743200"/>
+            <a:ext cx="950976" cy="310896"/>
+          </a:xfrm>
+          <a:prstGeom prst="rect">
+            <a:avLst/>
+          </a:prstGeom>
+          <a:noFill/>
+          <a:ln/>
+        </p:spPr>
+        <p:txBody>
+          <a:bodyPr wrap="square" lIns="0" tIns="0" rIns="0" bIns="0" rtlCol="0" anchor="ctr"/>
+          <a:lstStyle/>
+          <a:p>
+            <a:pPr algn="ctr" indent="0" marL="0">
+              <a:buNone/>
+            </a:pPr>
+            <a:r>
+              <a:rPr lang="en-US" sz="870" b="1" dirty="0">
+                <a:solidFill>
+                  <a:srgbClr val="E0E0E0"/>
+                </a:solidFill>
+                <a:latin typeface="Arial" pitchFamily="34" charset="0"/>
+                <a:ea typeface="Arial" pitchFamily="34" charset="-122"/>
+                <a:cs typeface="Arial" pitchFamily="34" charset="-120"/>
+              </a:rPr>
+              <a:t>決済手数料のみ</a:t>
+            </a:r>
+            <a:endParaRPr lang="en-US" sz="870" dirty="0"/>
+          </a:p>
+        </p:txBody>
+      </p:sp>
+      <p:sp>
+        <p:nvSpPr>
+          <p:cNvPr id="85" name="Text 83"/>
+          <p:cNvSpPr/>
+          <p:nvPr/>
+        </p:nvSpPr>
+        <p:spPr>
+          <a:xfrm>
+            <a:off x="3319272" y="2743200"/>
+            <a:ext cx="1271016" cy="310896"/>
+          </a:xfrm>
+          <a:prstGeom prst="rect">
+            <a:avLst/>
+          </a:prstGeom>
+          <a:noFill/>
+          <a:ln/>
+        </p:spPr>
+        <p:txBody>
+          <a:bodyPr wrap="square" lIns="0" tIns="0" rIns="0" bIns="0" rtlCol="0" anchor="ctr"/>
+          <a:lstStyle/>
+          <a:p>
+            <a:pPr algn="ctr" indent="0" marL="0">
+              <a:buNone/>
+            </a:pPr>
+            <a:r>
+              <a:rPr lang="en-US" sz="1300" dirty="0">
+                <a:solidFill>
+                  <a:srgbClr val="333355"/>
+                </a:solidFill>
+                <a:latin typeface="Arial" pitchFamily="34" charset="0"/>
+                <a:ea typeface="Arial" pitchFamily="34" charset="-122"/>
+                <a:cs typeface="Arial" pitchFamily="34" charset="-120"/>
+              </a:rPr>
+              <a:t>—</a:t>
+            </a:r>
+            <a:endParaRPr lang="en-US" sz="1300" dirty="0"/>
+          </a:p>
+        </p:txBody>
+      </p:sp>
+      <p:sp>
+        <p:nvSpPr>
+          <p:cNvPr id="86" name="Text 84"/>
+          <p:cNvSpPr/>
+          <p:nvPr/>
+        </p:nvSpPr>
+        <p:spPr>
+          <a:xfrm>
+            <a:off x="4645152" y="2743200"/>
+            <a:ext cx="1271016" cy="310896"/>
+          </a:xfrm>
+          <a:prstGeom prst="rect">
+            <a:avLst/>
+          </a:prstGeom>
+          <a:noFill/>
+          <a:ln/>
+        </p:spPr>
+        <p:txBody>
+          <a:bodyPr wrap="square" lIns="0" tIns="0" rIns="0" bIns="0" rtlCol="0" anchor="ctr"/>
+          <a:lstStyle/>
+          <a:p>
+            <a:pPr algn="ctr" indent="0" marL="0">
+              <a:buNone/>
+            </a:pPr>
+            <a:r>
+              <a:rPr lang="en-US" sz="1300" dirty="0">
+                <a:solidFill>
+                  <a:srgbClr val="333355"/>
+                </a:solidFill>
+                <a:latin typeface="Arial" pitchFamily="34" charset="0"/>
+                <a:ea typeface="Arial" pitchFamily="34" charset="-122"/>
+                <a:cs typeface="Arial" pitchFamily="34" charset="-120"/>
+              </a:rPr>
+              <a:t>—</a:t>
+            </a:r>
+            <a:endParaRPr lang="en-US" sz="1300" dirty="0"/>
+          </a:p>
+        </p:txBody>
+      </p:sp>
+      <p:sp>
+        <p:nvSpPr>
+          <p:cNvPr id="87" name="Text 85"/>
+          <p:cNvSpPr/>
+          <p:nvPr/>
+        </p:nvSpPr>
+        <p:spPr>
+          <a:xfrm>
+            <a:off x="5971032" y="2743200"/>
+            <a:ext cx="1271016" cy="310896"/>
+          </a:xfrm>
+          <a:prstGeom prst="rect">
+            <a:avLst/>
+          </a:prstGeom>
+          <a:noFill/>
+          <a:ln/>
+        </p:spPr>
+        <p:txBody>
+          <a:bodyPr wrap="square" lIns="0" tIns="0" rIns="0" bIns="0" rtlCol="0" anchor="ctr"/>
+          <a:lstStyle/>
+          <a:p>
+            <a:pPr algn="ctr" indent="0" marL="0">
+              <a:buNone/>
+            </a:pPr>
+            <a:r>
+              <a:rPr lang="en-US" sz="1300" dirty="0">
+                <a:solidFill>
+                  <a:srgbClr val="333355"/>
+                </a:solidFill>
+                <a:latin typeface="Arial" pitchFamily="34" charset="0"/>
+                <a:ea typeface="Arial" pitchFamily="34" charset="-122"/>
+                <a:cs typeface="Arial" pitchFamily="34" charset="-120"/>
+              </a:rPr>
+              <a:t>—</a:t>
+            </a:r>
+            <a:endParaRPr lang="en-US" sz="1300" dirty="0"/>
+          </a:p>
+        </p:txBody>
+      </p:sp>
+      <p:sp>
+        <p:nvSpPr>
+          <p:cNvPr id="88" name="Text 86"/>
+          <p:cNvSpPr/>
+          <p:nvPr/>
+        </p:nvSpPr>
+        <p:spPr>
+          <a:xfrm>
+            <a:off x="7296912" y="2743200"/>
+            <a:ext cx="1271016" cy="310896"/>
+          </a:xfrm>
+          <a:prstGeom prst="rect">
+            <a:avLst/>
+          </a:prstGeom>
+          <a:noFill/>
+          <a:ln/>
+        </p:spPr>
+        <p:txBody>
+          <a:bodyPr wrap="square" lIns="0" tIns="0" rIns="0" bIns="0" rtlCol="0" anchor="ctr"/>
+          <a:lstStyle/>
+          <a:p>
+            <a:pPr algn="ctr" indent="0" marL="0">
+              <a:buNone/>
+            </a:pPr>
+            <a:r>
+              <a:rPr lang="en-US" sz="1300" b="1" dirty="0">
+                <a:solidFill>
+                  <a:srgbClr val="E94560"/>
+                </a:solidFill>
+                <a:latin typeface="Arial" pitchFamily="34" charset="0"/>
+                <a:ea typeface="Arial" pitchFamily="34" charset="-122"/>
+                <a:cs typeface="Arial" pitchFamily="34" charset="-120"/>
+              </a:rPr>
+              <a:t>○</a:t>
+            </a:r>
+            <a:endParaRPr lang="en-US" sz="1300" dirty="0"/>
+          </a:p>
+        </p:txBody>
+      </p:sp>
+      <p:sp>
+        <p:nvSpPr>
+          <p:cNvPr id="89" name="Shape 87"/>
+          <p:cNvSpPr/>
+          <p:nvPr/>
+        </p:nvSpPr>
+        <p:spPr>
+          <a:xfrm>
+            <a:off x="274320" y="3054096"/>
+            <a:ext cx="2011680" cy="310896"/>
+          </a:xfrm>
+          <a:prstGeom prst="rect">
+            <a:avLst/>
+          </a:prstGeom>
+          <a:solidFill>
+            <a:srgbClr val="1A1A35"/>
+          </a:solidFill>
+          <a:ln/>
+        </p:spPr>
+      </p:sp>
+      <p:sp>
+        <p:nvSpPr>
+          <p:cNvPr id="90" name="Shape 88"/>
+          <p:cNvSpPr/>
+          <p:nvPr/>
+        </p:nvSpPr>
+        <p:spPr>
+          <a:xfrm>
+            <a:off x="2286000" y="3054096"/>
+            <a:ext cx="1005840" cy="310896"/>
+          </a:xfrm>
+          <a:prstGeom prst="rect">
+            <a:avLst/>
+          </a:prstGeom>
+          <a:solidFill>
+            <a:srgbClr val="1A1A35"/>
+          </a:solidFill>
+          <a:ln/>
+        </p:spPr>
+      </p:sp>
+      <p:sp>
+        <p:nvSpPr>
+          <p:cNvPr id="91" name="Shape 89"/>
+          <p:cNvSpPr/>
+          <p:nvPr/>
+        </p:nvSpPr>
+        <p:spPr>
+          <a:xfrm>
+            <a:off x="3291840" y="3054096"/>
+            <a:ext cx="1325880" cy="310896"/>
+          </a:xfrm>
+          <a:prstGeom prst="rect">
+            <a:avLst/>
+          </a:prstGeom>
+          <a:solidFill>
+            <a:srgbClr val="1A1A35"/>
+          </a:solidFill>
+          <a:ln w="12700">
+            <a:solidFill>
+              <a:srgbClr val="1A2535"/>
+            </a:solidFill>
+            <a:prstDash val="solid"/>
+          </a:ln>
+        </p:spPr>
+      </p:sp>
+      <p:sp>
+        <p:nvSpPr>
+          <p:cNvPr id="92" name="Shape 90"/>
+          <p:cNvSpPr/>
+          <p:nvPr/>
+        </p:nvSpPr>
+        <p:spPr>
+          <a:xfrm>
+            <a:off x="4617720" y="3054096"/>
+            <a:ext cx="1325880" cy="310896"/>
+          </a:xfrm>
+          <a:prstGeom prst="rect">
+            <a:avLst/>
+          </a:prstGeom>
+          <a:solidFill>
+            <a:srgbClr val="1A1A35"/>
+          </a:solidFill>
+          <a:ln w="12700">
+            <a:solidFill>
+              <a:srgbClr val="1A2520"/>
+            </a:solidFill>
+            <a:prstDash val="solid"/>
+          </a:ln>
+        </p:spPr>
+      </p:sp>
+      <p:sp>
+        <p:nvSpPr>
+          <p:cNvPr id="93" name="Shape 91"/>
+          <p:cNvSpPr/>
+          <p:nvPr/>
+        </p:nvSpPr>
+        <p:spPr>
+          <a:xfrm>
+            <a:off x="5943600" y="3054096"/>
+            <a:ext cx="1325880" cy="310896"/>
+          </a:xfrm>
+          <a:prstGeom prst="rect">
+            <a:avLst/>
+          </a:prstGeom>
+          <a:solidFill>
+            <a:srgbClr val="1A1A35"/>
+          </a:solidFill>
+          <a:ln w="12700">
+            <a:solidFill>
+              <a:srgbClr val="251A1A"/>
+            </a:solidFill>
+            <a:prstDash val="solid"/>
+          </a:ln>
+        </p:spPr>
+      </p:sp>
+      <p:sp>
+        <p:nvSpPr>
+          <p:cNvPr id="94" name="Shape 92"/>
+          <p:cNvSpPr/>
+          <p:nvPr/>
+        </p:nvSpPr>
+        <p:spPr>
+          <a:xfrm>
+            <a:off x="7269480" y="3054096"/>
+            <a:ext cx="1325880" cy="310896"/>
+          </a:xfrm>
+          <a:prstGeom prst="rect">
+            <a:avLst/>
+          </a:prstGeom>
+          <a:solidFill>
+            <a:srgbClr val="1A1A35"/>
+          </a:solidFill>
+          <a:ln w="12700">
+            <a:solidFill>
+              <a:srgbClr val="251A25"/>
+            </a:solidFill>
+            <a:prstDash val="solid"/>
+          </a:ln>
+        </p:spPr>
+      </p:sp>
+      <p:sp>
+        <p:nvSpPr>
+          <p:cNvPr id="95" name="Text 93"/>
+          <p:cNvSpPr/>
+          <p:nvPr/>
+        </p:nvSpPr>
+        <p:spPr>
+          <a:xfrm>
+            <a:off x="329184" y="3054096"/>
+            <a:ext cx="1920240" cy="310896"/>
           </a:xfrm>
           <a:prstGeom prst="rect">
             <a:avLst/>
@@ -11010,7 +11369,911 @@
               <a:buNone/>
             </a:pPr>
             <a:r>
-              <a:rPr lang="en-US" sz="1050" dirty="0">
+              <a:rPr lang="en-US" sz="950" dirty="0">
+                <a:solidFill>
+                  <a:srgbClr val="E0E0E0"/>
+                </a:solidFill>
+                <a:latin typeface="Arial" pitchFamily="34" charset="0"/>
+                <a:ea typeface="Arial" pitchFamily="34" charset="-122"/>
+                <a:cs typeface="Arial" pitchFamily="34" charset="-120"/>
+              </a:rPr>
+              <a:t>Supabase Auth（会員認証）</a:t>
+            </a:r>
+            <a:endParaRPr lang="en-US" sz="950" dirty="0"/>
+          </a:p>
+        </p:txBody>
+      </p:sp>
+      <p:sp>
+        <p:nvSpPr>
+          <p:cNvPr id="96" name="Text 94"/>
+          <p:cNvSpPr/>
+          <p:nvPr/>
+        </p:nvSpPr>
+        <p:spPr>
+          <a:xfrm>
+            <a:off x="2313432" y="3054096"/>
+            <a:ext cx="950976" cy="310896"/>
+          </a:xfrm>
+          <a:prstGeom prst="rect">
+            <a:avLst/>
+          </a:prstGeom>
+          <a:noFill/>
+          <a:ln/>
+        </p:spPr>
+        <p:txBody>
+          <a:bodyPr wrap="square" lIns="0" tIns="0" rIns="0" bIns="0" rtlCol="0" anchor="ctr"/>
+          <a:lstStyle/>
+          <a:p>
+            <a:pPr algn="ctr" indent="0" marL="0">
+              <a:buNone/>
+            </a:pPr>
+            <a:r>
+              <a:rPr lang="en-US" sz="870" b="1" dirty="0">
+                <a:solidFill>
+                  <a:srgbClr val="4CAF73"/>
+                </a:solidFill>
+                <a:latin typeface="Arial" pitchFamily="34" charset="0"/>
+                <a:ea typeface="Arial" pitchFamily="34" charset="-122"/>
+                <a:cs typeface="Arial" pitchFamily="34" charset="-120"/>
+              </a:rPr>
+              <a:t>¥0〜</a:t>
+            </a:r>
+            <a:endParaRPr lang="en-US" sz="870" dirty="0"/>
+          </a:p>
+        </p:txBody>
+      </p:sp>
+      <p:sp>
+        <p:nvSpPr>
+          <p:cNvPr id="97" name="Text 95"/>
+          <p:cNvSpPr/>
+          <p:nvPr/>
+        </p:nvSpPr>
+        <p:spPr>
+          <a:xfrm>
+            <a:off x="3319272" y="3054096"/>
+            <a:ext cx="1271016" cy="310896"/>
+          </a:xfrm>
+          <a:prstGeom prst="rect">
+            <a:avLst/>
+          </a:prstGeom>
+          <a:noFill/>
+          <a:ln/>
+        </p:spPr>
+        <p:txBody>
+          <a:bodyPr wrap="square" lIns="0" tIns="0" rIns="0" bIns="0" rtlCol="0" anchor="ctr"/>
+          <a:lstStyle/>
+          <a:p>
+            <a:pPr algn="ctr" indent="0" marL="0">
+              <a:buNone/>
+            </a:pPr>
+            <a:r>
+              <a:rPr lang="en-US" sz="1300" dirty="0">
+                <a:solidFill>
+                  <a:srgbClr val="333355"/>
+                </a:solidFill>
+                <a:latin typeface="Arial" pitchFamily="34" charset="0"/>
+                <a:ea typeface="Arial" pitchFamily="34" charset="-122"/>
+                <a:cs typeface="Arial" pitchFamily="34" charset="-120"/>
+              </a:rPr>
+              <a:t>—</a:t>
+            </a:r>
+            <a:endParaRPr lang="en-US" sz="1300" dirty="0"/>
+          </a:p>
+        </p:txBody>
+      </p:sp>
+      <p:sp>
+        <p:nvSpPr>
+          <p:cNvPr id="98" name="Text 96"/>
+          <p:cNvSpPr/>
+          <p:nvPr/>
+        </p:nvSpPr>
+        <p:spPr>
+          <a:xfrm>
+            <a:off x="4645152" y="3054096"/>
+            <a:ext cx="1271016" cy="310896"/>
+          </a:xfrm>
+          <a:prstGeom prst="rect">
+            <a:avLst/>
+          </a:prstGeom>
+          <a:noFill/>
+          <a:ln/>
+        </p:spPr>
+        <p:txBody>
+          <a:bodyPr wrap="square" lIns="0" tIns="0" rIns="0" bIns="0" rtlCol="0" anchor="ctr"/>
+          <a:lstStyle/>
+          <a:p>
+            <a:pPr algn="ctr" indent="0" marL="0">
+              <a:buNone/>
+            </a:pPr>
+            <a:r>
+              <a:rPr lang="en-US" sz="1300" dirty="0">
+                <a:solidFill>
+                  <a:srgbClr val="333355"/>
+                </a:solidFill>
+                <a:latin typeface="Arial" pitchFamily="34" charset="0"/>
+                <a:ea typeface="Arial" pitchFamily="34" charset="-122"/>
+                <a:cs typeface="Arial" pitchFamily="34" charset="-120"/>
+              </a:rPr>
+              <a:t>—</a:t>
+            </a:r>
+            <a:endParaRPr lang="en-US" sz="1300" dirty="0"/>
+          </a:p>
+        </p:txBody>
+      </p:sp>
+      <p:sp>
+        <p:nvSpPr>
+          <p:cNvPr id="99" name="Text 97"/>
+          <p:cNvSpPr/>
+          <p:nvPr/>
+        </p:nvSpPr>
+        <p:spPr>
+          <a:xfrm>
+            <a:off x="5971032" y="3054096"/>
+            <a:ext cx="1271016" cy="310896"/>
+          </a:xfrm>
+          <a:prstGeom prst="rect">
+            <a:avLst/>
+          </a:prstGeom>
+          <a:noFill/>
+          <a:ln/>
+        </p:spPr>
+        <p:txBody>
+          <a:bodyPr wrap="square" lIns="0" tIns="0" rIns="0" bIns="0" rtlCol="0" anchor="ctr"/>
+          <a:lstStyle/>
+          <a:p>
+            <a:pPr algn="ctr" indent="0" marL="0">
+              <a:buNone/>
+            </a:pPr>
+            <a:r>
+              <a:rPr lang="en-US" sz="1300" dirty="0">
+                <a:solidFill>
+                  <a:srgbClr val="333355"/>
+                </a:solidFill>
+                <a:latin typeface="Arial" pitchFamily="34" charset="0"/>
+                <a:ea typeface="Arial" pitchFamily="34" charset="-122"/>
+                <a:cs typeface="Arial" pitchFamily="34" charset="-120"/>
+              </a:rPr>
+              <a:t>—</a:t>
+            </a:r>
+            <a:endParaRPr lang="en-US" sz="1300" dirty="0"/>
+          </a:p>
+        </p:txBody>
+      </p:sp>
+      <p:sp>
+        <p:nvSpPr>
+          <p:cNvPr id="100" name="Text 98"/>
+          <p:cNvSpPr/>
+          <p:nvPr/>
+        </p:nvSpPr>
+        <p:spPr>
+          <a:xfrm>
+            <a:off x="7296912" y="3054096"/>
+            <a:ext cx="1271016" cy="310896"/>
+          </a:xfrm>
+          <a:prstGeom prst="rect">
+            <a:avLst/>
+          </a:prstGeom>
+          <a:noFill/>
+          <a:ln/>
+        </p:spPr>
+        <p:txBody>
+          <a:bodyPr wrap="square" lIns="0" tIns="0" rIns="0" bIns="0" rtlCol="0" anchor="ctr"/>
+          <a:lstStyle/>
+          <a:p>
+            <a:pPr algn="ctr" indent="0" marL="0">
+              <a:buNone/>
+            </a:pPr>
+            <a:r>
+              <a:rPr lang="en-US" sz="1300" b="1" dirty="0">
+                <a:solidFill>
+                  <a:srgbClr val="E94560"/>
+                </a:solidFill>
+                <a:latin typeface="Arial" pitchFamily="34" charset="0"/>
+                <a:ea typeface="Arial" pitchFamily="34" charset="-122"/>
+                <a:cs typeface="Arial" pitchFamily="34" charset="-120"/>
+              </a:rPr>
+              <a:t>○</a:t>
+            </a:r>
+            <a:endParaRPr lang="en-US" sz="1300" dirty="0"/>
+          </a:p>
+        </p:txBody>
+      </p:sp>
+      <p:sp>
+        <p:nvSpPr>
+          <p:cNvPr id="101" name="Shape 99"/>
+          <p:cNvSpPr/>
+          <p:nvPr/>
+        </p:nvSpPr>
+        <p:spPr>
+          <a:xfrm>
+            <a:off x="274320" y="3364992"/>
+            <a:ext cx="2011680" cy="310896"/>
+          </a:xfrm>
+          <a:prstGeom prst="rect">
+            <a:avLst/>
+          </a:prstGeom>
+          <a:solidFill>
+            <a:srgbClr val="121225"/>
+          </a:solidFill>
+          <a:ln/>
+        </p:spPr>
+      </p:sp>
+      <p:sp>
+        <p:nvSpPr>
+          <p:cNvPr id="102" name="Shape 100"/>
+          <p:cNvSpPr/>
+          <p:nvPr/>
+        </p:nvSpPr>
+        <p:spPr>
+          <a:xfrm>
+            <a:off x="2286000" y="3364992"/>
+            <a:ext cx="1005840" cy="310896"/>
+          </a:xfrm>
+          <a:prstGeom prst="rect">
+            <a:avLst/>
+          </a:prstGeom>
+          <a:solidFill>
+            <a:srgbClr val="121225"/>
+          </a:solidFill>
+          <a:ln/>
+        </p:spPr>
+      </p:sp>
+      <p:sp>
+        <p:nvSpPr>
+          <p:cNvPr id="103" name="Shape 101"/>
+          <p:cNvSpPr/>
+          <p:nvPr/>
+        </p:nvSpPr>
+        <p:spPr>
+          <a:xfrm>
+            <a:off x="3291840" y="3364992"/>
+            <a:ext cx="1325880" cy="310896"/>
+          </a:xfrm>
+          <a:prstGeom prst="rect">
+            <a:avLst/>
+          </a:prstGeom>
+          <a:solidFill>
+            <a:srgbClr val="121225"/>
+          </a:solidFill>
+          <a:ln w="12700">
+            <a:solidFill>
+              <a:srgbClr val="1A2535"/>
+            </a:solidFill>
+            <a:prstDash val="solid"/>
+          </a:ln>
+        </p:spPr>
+      </p:sp>
+      <p:sp>
+        <p:nvSpPr>
+          <p:cNvPr id="104" name="Shape 102"/>
+          <p:cNvSpPr/>
+          <p:nvPr/>
+        </p:nvSpPr>
+        <p:spPr>
+          <a:xfrm>
+            <a:off x="4617720" y="3364992"/>
+            <a:ext cx="1325880" cy="310896"/>
+          </a:xfrm>
+          <a:prstGeom prst="rect">
+            <a:avLst/>
+          </a:prstGeom>
+          <a:solidFill>
+            <a:srgbClr val="121225"/>
+          </a:solidFill>
+          <a:ln w="12700">
+            <a:solidFill>
+              <a:srgbClr val="1A2520"/>
+            </a:solidFill>
+            <a:prstDash val="solid"/>
+          </a:ln>
+        </p:spPr>
+      </p:sp>
+      <p:sp>
+        <p:nvSpPr>
+          <p:cNvPr id="105" name="Shape 103"/>
+          <p:cNvSpPr/>
+          <p:nvPr/>
+        </p:nvSpPr>
+        <p:spPr>
+          <a:xfrm>
+            <a:off x="5943600" y="3364992"/>
+            <a:ext cx="1325880" cy="310896"/>
+          </a:xfrm>
+          <a:prstGeom prst="rect">
+            <a:avLst/>
+          </a:prstGeom>
+          <a:solidFill>
+            <a:srgbClr val="121225"/>
+          </a:solidFill>
+          <a:ln w="12700">
+            <a:solidFill>
+              <a:srgbClr val="251A1A"/>
+            </a:solidFill>
+            <a:prstDash val="solid"/>
+          </a:ln>
+        </p:spPr>
+      </p:sp>
+      <p:sp>
+        <p:nvSpPr>
+          <p:cNvPr id="106" name="Shape 104"/>
+          <p:cNvSpPr/>
+          <p:nvPr/>
+        </p:nvSpPr>
+        <p:spPr>
+          <a:xfrm>
+            <a:off x="7269480" y="3364992"/>
+            <a:ext cx="1325880" cy="310896"/>
+          </a:xfrm>
+          <a:prstGeom prst="rect">
+            <a:avLst/>
+          </a:prstGeom>
+          <a:solidFill>
+            <a:srgbClr val="121225"/>
+          </a:solidFill>
+          <a:ln w="12700">
+            <a:solidFill>
+              <a:srgbClr val="251A25"/>
+            </a:solidFill>
+            <a:prstDash val="solid"/>
+          </a:ln>
+        </p:spPr>
+      </p:sp>
+      <p:sp>
+        <p:nvSpPr>
+          <p:cNvPr id="107" name="Text 105"/>
+          <p:cNvSpPr/>
+          <p:nvPr/>
+        </p:nvSpPr>
+        <p:spPr>
+          <a:xfrm>
+            <a:off x="329184" y="3364992"/>
+            <a:ext cx="1920240" cy="310896"/>
+          </a:xfrm>
+          <a:prstGeom prst="rect">
+            <a:avLst/>
+          </a:prstGeom>
+          <a:noFill/>
+          <a:ln/>
+        </p:spPr>
+        <p:txBody>
+          <a:bodyPr wrap="square" lIns="0" tIns="0" rIns="0" bIns="0" rtlCol="0" anchor="ctr"/>
+          <a:lstStyle/>
+          <a:p>
+            <a:pPr indent="0" marL="0">
+              <a:buNone/>
+            </a:pPr>
+            <a:r>
+              <a:rPr lang="en-US" sz="950" dirty="0">
+                <a:solidFill>
+                  <a:srgbClr val="E0E0E0"/>
+                </a:solidFill>
+                <a:latin typeface="Arial" pitchFamily="34" charset="0"/>
+                <a:ea typeface="Arial" pitchFamily="34" charset="-122"/>
+                <a:cs typeface="Arial" pitchFamily="34" charset="-120"/>
+              </a:rPr>
+              <a:t>Vimeo限定公開（動画配信）</a:t>
+            </a:r>
+            <a:endParaRPr lang="en-US" sz="950" dirty="0"/>
+          </a:p>
+        </p:txBody>
+      </p:sp>
+      <p:sp>
+        <p:nvSpPr>
+          <p:cNvPr id="108" name="Text 106"/>
+          <p:cNvSpPr/>
+          <p:nvPr/>
+        </p:nvSpPr>
+        <p:spPr>
+          <a:xfrm>
+            <a:off x="2313432" y="3364992"/>
+            <a:ext cx="950976" cy="310896"/>
+          </a:xfrm>
+          <a:prstGeom prst="rect">
+            <a:avLst/>
+          </a:prstGeom>
+          <a:noFill/>
+          <a:ln/>
+        </p:spPr>
+        <p:txBody>
+          <a:bodyPr wrap="square" lIns="0" tIns="0" rIns="0" bIns="0" rtlCol="0" anchor="ctr"/>
+          <a:lstStyle/>
+          <a:p>
+            <a:pPr algn="ctr" indent="0" marL="0">
+              <a:buNone/>
+            </a:pPr>
+            <a:r>
+              <a:rPr lang="en-US" sz="870" b="1" dirty="0">
+                <a:solidFill>
+                  <a:srgbClr val="E0E0E0"/>
+                </a:solidFill>
+                <a:latin typeface="Arial" pitchFamily="34" charset="0"/>
+                <a:ea typeface="Arial" pitchFamily="34" charset="-122"/>
+                <a:cs typeface="Arial" pitchFamily="34" charset="-120"/>
+              </a:rPr>
+              <a:t>¥0〜1,500円</a:t>
+            </a:r>
+            <a:endParaRPr lang="en-US" sz="870" dirty="0"/>
+          </a:p>
+        </p:txBody>
+      </p:sp>
+      <p:sp>
+        <p:nvSpPr>
+          <p:cNvPr id="109" name="Text 107"/>
+          <p:cNvSpPr/>
+          <p:nvPr/>
+        </p:nvSpPr>
+        <p:spPr>
+          <a:xfrm>
+            <a:off x="3319272" y="3364992"/>
+            <a:ext cx="1271016" cy="310896"/>
+          </a:xfrm>
+          <a:prstGeom prst="rect">
+            <a:avLst/>
+          </a:prstGeom>
+          <a:noFill/>
+          <a:ln/>
+        </p:spPr>
+        <p:txBody>
+          <a:bodyPr wrap="square" lIns="0" tIns="0" rIns="0" bIns="0" rtlCol="0" anchor="ctr"/>
+          <a:lstStyle/>
+          <a:p>
+            <a:pPr algn="ctr" indent="0" marL="0">
+              <a:buNone/>
+            </a:pPr>
+            <a:r>
+              <a:rPr lang="en-US" sz="1300" dirty="0">
+                <a:solidFill>
+                  <a:srgbClr val="333355"/>
+                </a:solidFill>
+                <a:latin typeface="Arial" pitchFamily="34" charset="0"/>
+                <a:ea typeface="Arial" pitchFamily="34" charset="-122"/>
+                <a:cs typeface="Arial" pitchFamily="34" charset="-120"/>
+              </a:rPr>
+              <a:t>—</a:t>
+            </a:r>
+            <a:endParaRPr lang="en-US" sz="1300" dirty="0"/>
+          </a:p>
+        </p:txBody>
+      </p:sp>
+      <p:sp>
+        <p:nvSpPr>
+          <p:cNvPr id="110" name="Text 108"/>
+          <p:cNvSpPr/>
+          <p:nvPr/>
+        </p:nvSpPr>
+        <p:spPr>
+          <a:xfrm>
+            <a:off x="4645152" y="3364992"/>
+            <a:ext cx="1271016" cy="310896"/>
+          </a:xfrm>
+          <a:prstGeom prst="rect">
+            <a:avLst/>
+          </a:prstGeom>
+          <a:noFill/>
+          <a:ln/>
+        </p:spPr>
+        <p:txBody>
+          <a:bodyPr wrap="square" lIns="0" tIns="0" rIns="0" bIns="0" rtlCol="0" anchor="ctr"/>
+          <a:lstStyle/>
+          <a:p>
+            <a:pPr algn="ctr" indent="0" marL="0">
+              <a:buNone/>
+            </a:pPr>
+            <a:r>
+              <a:rPr lang="en-US" sz="1300" dirty="0">
+                <a:solidFill>
+                  <a:srgbClr val="333355"/>
+                </a:solidFill>
+                <a:latin typeface="Arial" pitchFamily="34" charset="0"/>
+                <a:ea typeface="Arial" pitchFamily="34" charset="-122"/>
+                <a:cs typeface="Arial" pitchFamily="34" charset="-120"/>
+              </a:rPr>
+              <a:t>—</a:t>
+            </a:r>
+            <a:endParaRPr lang="en-US" sz="1300" dirty="0"/>
+          </a:p>
+        </p:txBody>
+      </p:sp>
+      <p:sp>
+        <p:nvSpPr>
+          <p:cNvPr id="111" name="Text 109"/>
+          <p:cNvSpPr/>
+          <p:nvPr/>
+        </p:nvSpPr>
+        <p:spPr>
+          <a:xfrm>
+            <a:off x="5971032" y="3364992"/>
+            <a:ext cx="1271016" cy="310896"/>
+          </a:xfrm>
+          <a:prstGeom prst="rect">
+            <a:avLst/>
+          </a:prstGeom>
+          <a:noFill/>
+          <a:ln/>
+        </p:spPr>
+        <p:txBody>
+          <a:bodyPr wrap="square" lIns="0" tIns="0" rIns="0" bIns="0" rtlCol="0" anchor="ctr"/>
+          <a:lstStyle/>
+          <a:p>
+            <a:pPr algn="ctr" indent="0" marL="0">
+              <a:buNone/>
+            </a:pPr>
+            <a:r>
+              <a:rPr lang="en-US" sz="1300" dirty="0">
+                <a:solidFill>
+                  <a:srgbClr val="333355"/>
+                </a:solidFill>
+                <a:latin typeface="Arial" pitchFamily="34" charset="0"/>
+                <a:ea typeface="Arial" pitchFamily="34" charset="-122"/>
+                <a:cs typeface="Arial" pitchFamily="34" charset="-120"/>
+              </a:rPr>
+              <a:t>—</a:t>
+            </a:r>
+            <a:endParaRPr lang="en-US" sz="1300" dirty="0"/>
+          </a:p>
+        </p:txBody>
+      </p:sp>
+      <p:sp>
+        <p:nvSpPr>
+          <p:cNvPr id="112" name="Text 110"/>
+          <p:cNvSpPr/>
+          <p:nvPr/>
+        </p:nvSpPr>
+        <p:spPr>
+          <a:xfrm>
+            <a:off x="7296912" y="3364992"/>
+            <a:ext cx="1271016" cy="310896"/>
+          </a:xfrm>
+          <a:prstGeom prst="rect">
+            <a:avLst/>
+          </a:prstGeom>
+          <a:noFill/>
+          <a:ln/>
+        </p:spPr>
+        <p:txBody>
+          <a:bodyPr wrap="square" lIns="0" tIns="0" rIns="0" bIns="0" rtlCol="0" anchor="ctr"/>
+          <a:lstStyle/>
+          <a:p>
+            <a:pPr algn="ctr" indent="0" marL="0">
+              <a:buNone/>
+            </a:pPr>
+            <a:r>
+              <a:rPr lang="en-US" sz="1300" b="1" dirty="0">
+                <a:solidFill>
+                  <a:srgbClr val="E94560"/>
+                </a:solidFill>
+                <a:latin typeface="Arial" pitchFamily="34" charset="0"/>
+                <a:ea typeface="Arial" pitchFamily="34" charset="-122"/>
+                <a:cs typeface="Arial" pitchFamily="34" charset="-120"/>
+              </a:rPr>
+              <a:t>○</a:t>
+            </a:r>
+            <a:endParaRPr lang="en-US" sz="1300" dirty="0"/>
+          </a:p>
+        </p:txBody>
+      </p:sp>
+      <p:sp>
+        <p:nvSpPr>
+          <p:cNvPr id="113" name="Shape 111"/>
+          <p:cNvSpPr/>
+          <p:nvPr/>
+        </p:nvSpPr>
+        <p:spPr>
+          <a:xfrm>
+            <a:off x="274320" y="3675888"/>
+            <a:ext cx="2011680" cy="310896"/>
+          </a:xfrm>
+          <a:prstGeom prst="rect">
+            <a:avLst/>
+          </a:prstGeom>
+          <a:solidFill>
+            <a:srgbClr val="1A1A35"/>
+          </a:solidFill>
+          <a:ln/>
+        </p:spPr>
+      </p:sp>
+      <p:sp>
+        <p:nvSpPr>
+          <p:cNvPr id="114" name="Shape 112"/>
+          <p:cNvSpPr/>
+          <p:nvPr/>
+        </p:nvSpPr>
+        <p:spPr>
+          <a:xfrm>
+            <a:off x="2286000" y="3675888"/>
+            <a:ext cx="1005840" cy="310896"/>
+          </a:xfrm>
+          <a:prstGeom prst="rect">
+            <a:avLst/>
+          </a:prstGeom>
+          <a:solidFill>
+            <a:srgbClr val="1A1A35"/>
+          </a:solidFill>
+          <a:ln/>
+        </p:spPr>
+      </p:sp>
+      <p:sp>
+        <p:nvSpPr>
+          <p:cNvPr id="115" name="Shape 113"/>
+          <p:cNvSpPr/>
+          <p:nvPr/>
+        </p:nvSpPr>
+        <p:spPr>
+          <a:xfrm>
+            <a:off x="3291840" y="3675888"/>
+            <a:ext cx="1325880" cy="310896"/>
+          </a:xfrm>
+          <a:prstGeom prst="rect">
+            <a:avLst/>
+          </a:prstGeom>
+          <a:solidFill>
+            <a:srgbClr val="1A1A35"/>
+          </a:solidFill>
+          <a:ln w="12700">
+            <a:solidFill>
+              <a:srgbClr val="1A2535"/>
+            </a:solidFill>
+            <a:prstDash val="solid"/>
+          </a:ln>
+        </p:spPr>
+      </p:sp>
+      <p:sp>
+        <p:nvSpPr>
+          <p:cNvPr id="116" name="Shape 114"/>
+          <p:cNvSpPr/>
+          <p:nvPr/>
+        </p:nvSpPr>
+        <p:spPr>
+          <a:xfrm>
+            <a:off x="4617720" y="3675888"/>
+            <a:ext cx="1325880" cy="310896"/>
+          </a:xfrm>
+          <a:prstGeom prst="rect">
+            <a:avLst/>
+          </a:prstGeom>
+          <a:solidFill>
+            <a:srgbClr val="1A1A35"/>
+          </a:solidFill>
+          <a:ln w="12700">
+            <a:solidFill>
+              <a:srgbClr val="1A2520"/>
+            </a:solidFill>
+            <a:prstDash val="solid"/>
+          </a:ln>
+        </p:spPr>
+      </p:sp>
+      <p:sp>
+        <p:nvSpPr>
+          <p:cNvPr id="117" name="Shape 115"/>
+          <p:cNvSpPr/>
+          <p:nvPr/>
+        </p:nvSpPr>
+        <p:spPr>
+          <a:xfrm>
+            <a:off x="5943600" y="3675888"/>
+            <a:ext cx="1325880" cy="310896"/>
+          </a:xfrm>
+          <a:prstGeom prst="rect">
+            <a:avLst/>
+          </a:prstGeom>
+          <a:solidFill>
+            <a:srgbClr val="1A1A35"/>
+          </a:solidFill>
+          <a:ln w="12700">
+            <a:solidFill>
+              <a:srgbClr val="251A1A"/>
+            </a:solidFill>
+            <a:prstDash val="solid"/>
+          </a:ln>
+        </p:spPr>
+      </p:sp>
+      <p:sp>
+        <p:nvSpPr>
+          <p:cNvPr id="118" name="Shape 116"/>
+          <p:cNvSpPr/>
+          <p:nvPr/>
+        </p:nvSpPr>
+        <p:spPr>
+          <a:xfrm>
+            <a:off x="7269480" y="3675888"/>
+            <a:ext cx="1325880" cy="310896"/>
+          </a:xfrm>
+          <a:prstGeom prst="rect">
+            <a:avLst/>
+          </a:prstGeom>
+          <a:solidFill>
+            <a:srgbClr val="1A1A35"/>
+          </a:solidFill>
+          <a:ln w="12700">
+            <a:solidFill>
+              <a:srgbClr val="251A25"/>
+            </a:solidFill>
+            <a:prstDash val="solid"/>
+          </a:ln>
+        </p:spPr>
+      </p:sp>
+      <p:sp>
+        <p:nvSpPr>
+          <p:cNvPr id="119" name="Text 117"/>
+          <p:cNvSpPr/>
+          <p:nvPr/>
+        </p:nvSpPr>
+        <p:spPr>
+          <a:xfrm>
+            <a:off x="329184" y="3675888"/>
+            <a:ext cx="1920240" cy="310896"/>
+          </a:xfrm>
+          <a:prstGeom prst="rect">
+            <a:avLst/>
+          </a:prstGeom>
+          <a:noFill/>
+          <a:ln/>
+        </p:spPr>
+        <p:txBody>
+          <a:bodyPr wrap="square" lIns="0" tIns="0" rIns="0" bIns="0" rtlCol="0" anchor="ctr"/>
+          <a:lstStyle/>
+          <a:p>
+            <a:pPr indent="0" marL="0">
+              <a:buNone/>
+            </a:pPr>
+            <a:r>
+              <a:rPr lang="en-US" sz="950" dirty="0">
+                <a:solidFill>
+                  <a:srgbClr val="E0E0E0"/>
+                </a:solidFill>
+                <a:latin typeface="Arial" pitchFamily="34" charset="0"/>
+                <a:ea typeface="Arial" pitchFamily="34" charset="-122"/>
+                <a:cs typeface="Arial" pitchFamily="34" charset="-120"/>
+              </a:rPr>
+              <a:t>開発費（Claude Code）</a:t>
+            </a:r>
+            <a:endParaRPr lang="en-US" sz="950" dirty="0"/>
+          </a:p>
+        </p:txBody>
+      </p:sp>
+      <p:sp>
+        <p:nvSpPr>
+          <p:cNvPr id="120" name="Text 118"/>
+          <p:cNvSpPr/>
+          <p:nvPr/>
+        </p:nvSpPr>
+        <p:spPr>
+          <a:xfrm>
+            <a:off x="2313432" y="3675888"/>
+            <a:ext cx="950976" cy="310896"/>
+          </a:xfrm>
+          <a:prstGeom prst="rect">
+            <a:avLst/>
+          </a:prstGeom>
+          <a:noFill/>
+          <a:ln/>
+        </p:spPr>
+        <p:txBody>
+          <a:bodyPr wrap="square" lIns="0" tIns="0" rIns="0" bIns="0" rtlCol="0" anchor="ctr"/>
+          <a:lstStyle/>
+          <a:p>
+            <a:pPr algn="ctr" indent="0" marL="0">
+              <a:buNone/>
+            </a:pPr>
+            <a:r>
+              <a:rPr lang="en-US" sz="870" b="1" dirty="0">
+                <a:solidFill>
+                  <a:srgbClr val="4CAF73"/>
+                </a:solidFill>
+                <a:latin typeface="Arial" pitchFamily="34" charset="0"/>
+                <a:ea typeface="Arial" pitchFamily="34" charset="-122"/>
+                <a:cs typeface="Arial" pitchFamily="34" charset="-120"/>
+              </a:rPr>
+              <a:t>¥0 ※P4は工数増</a:t>
+            </a:r>
+            <a:endParaRPr lang="en-US" sz="870" dirty="0"/>
+          </a:p>
+        </p:txBody>
+      </p:sp>
+      <p:sp>
+        <p:nvSpPr>
+          <p:cNvPr id="121" name="Text 119"/>
+          <p:cNvSpPr/>
+          <p:nvPr/>
+        </p:nvSpPr>
+        <p:spPr>
+          <a:xfrm>
+            <a:off x="3319272" y="3675888"/>
+            <a:ext cx="1271016" cy="310896"/>
+          </a:xfrm>
+          <a:prstGeom prst="rect">
+            <a:avLst/>
+          </a:prstGeom>
+          <a:noFill/>
+          <a:ln/>
+        </p:spPr>
+        <p:txBody>
+          <a:bodyPr wrap="square" lIns="0" tIns="0" rIns="0" bIns="0" rtlCol="0" anchor="ctr"/>
+          <a:lstStyle/>
+          <a:p>
+            <a:pPr algn="ctr" indent="0" marL="0">
+              <a:buNone/>
+            </a:pPr>
+            <a:r>
+              <a:rPr lang="en-US" sz="1300" b="1" dirty="0">
+                <a:solidFill>
+                  <a:srgbClr val="4A9EDB"/>
+                </a:solidFill>
+                <a:latin typeface="Arial" pitchFamily="34" charset="0"/>
+                <a:ea typeface="Arial" pitchFamily="34" charset="-122"/>
+                <a:cs typeface="Arial" pitchFamily="34" charset="-120"/>
+              </a:rPr>
+              <a:t>○</a:t>
+            </a:r>
+            <a:endParaRPr lang="en-US" sz="1300" dirty="0"/>
+          </a:p>
+        </p:txBody>
+      </p:sp>
+      <p:sp>
+        <p:nvSpPr>
+          <p:cNvPr id="122" name="Text 120"/>
+          <p:cNvSpPr/>
+          <p:nvPr/>
+        </p:nvSpPr>
+        <p:spPr>
+          <a:xfrm>
+            <a:off x="4645152" y="3675888"/>
+            <a:ext cx="1271016" cy="310896"/>
+          </a:xfrm>
+          <a:prstGeom prst="rect">
+            <a:avLst/>
+          </a:prstGeom>
+          <a:noFill/>
+          <a:ln/>
+        </p:spPr>
+        <p:txBody>
+          <a:bodyPr wrap="square" lIns="0" tIns="0" rIns="0" bIns="0" rtlCol="0" anchor="ctr"/>
+          <a:lstStyle/>
+          <a:p>
+            <a:pPr algn="ctr" indent="0" marL="0">
+              <a:buNone/>
+            </a:pPr>
+            <a:r>
+              <a:rPr lang="en-US" sz="1300" b="1" dirty="0">
+                <a:solidFill>
+                  <a:srgbClr val="4CAF73"/>
+                </a:solidFill>
+                <a:latin typeface="Arial" pitchFamily="34" charset="0"/>
+                <a:ea typeface="Arial" pitchFamily="34" charset="-122"/>
+                <a:cs typeface="Arial" pitchFamily="34" charset="-120"/>
+              </a:rPr>
+              <a:t>○</a:t>
+            </a:r>
+            <a:endParaRPr lang="en-US" sz="1300" dirty="0"/>
+          </a:p>
+        </p:txBody>
+      </p:sp>
+      <p:sp>
+        <p:nvSpPr>
+          <p:cNvPr id="123" name="Text 121"/>
+          <p:cNvSpPr/>
+          <p:nvPr/>
+        </p:nvSpPr>
+        <p:spPr>
+          <a:xfrm>
+            <a:off x="5971032" y="3675888"/>
+            <a:ext cx="1271016" cy="310896"/>
+          </a:xfrm>
+          <a:prstGeom prst="rect">
+            <a:avLst/>
+          </a:prstGeom>
+          <a:noFill/>
+          <a:ln/>
+        </p:spPr>
+        <p:txBody>
+          <a:bodyPr wrap="square" lIns="0" tIns="0" rIns="0" bIns="0" rtlCol="0" anchor="ctr"/>
+          <a:lstStyle/>
+          <a:p>
+            <a:pPr algn="ctr" indent="0" marL="0">
+              <a:buNone/>
+            </a:pPr>
+            <a:r>
+              <a:rPr lang="en-US" sz="1300" b="1" dirty="0">
                 <a:solidFill>
                   <a:srgbClr val="F5A623"/>
                 </a:solidFill>
@@ -11018,9 +12281,443 @@
                 <a:ea typeface="Arial" pitchFamily="34" charset="-122"/>
                 <a:cs typeface="Arial" pitchFamily="34" charset="-120"/>
               </a:rPr>
-              <a:t>★ P3(AWS)のメリット: スマホ変更後も進捗消えない・複数デバイス対応。デメリット: バックエンド保守コスト発生・月+3,000〜10,000円</a:t>
-            </a:r>
-            <a:endParaRPr lang="en-US" sz="1050" dirty="0"/>
+              <a:t>○</a:t>
+            </a:r>
+            <a:endParaRPr lang="en-US" sz="1300" dirty="0"/>
+          </a:p>
+        </p:txBody>
+      </p:sp>
+      <p:sp>
+        <p:nvSpPr>
+          <p:cNvPr id="124" name="Text 122"/>
+          <p:cNvSpPr/>
+          <p:nvPr/>
+        </p:nvSpPr>
+        <p:spPr>
+          <a:xfrm>
+            <a:off x="7296912" y="3675888"/>
+            <a:ext cx="1271016" cy="310896"/>
+          </a:xfrm>
+          <a:prstGeom prst="rect">
+            <a:avLst/>
+          </a:prstGeom>
+          <a:noFill/>
+          <a:ln/>
+        </p:spPr>
+        <p:txBody>
+          <a:bodyPr wrap="square" lIns="0" tIns="0" rIns="0" bIns="0" rtlCol="0" anchor="ctr"/>
+          <a:lstStyle/>
+          <a:p>
+            <a:pPr algn="ctr" indent="0" marL="0">
+              <a:buNone/>
+            </a:pPr>
+            <a:r>
+              <a:rPr lang="en-US" sz="1300" b="1" dirty="0">
+                <a:solidFill>
+                  <a:srgbClr val="E94560"/>
+                </a:solidFill>
+                <a:latin typeface="Arial" pitchFamily="34" charset="0"/>
+                <a:ea typeface="Arial" pitchFamily="34" charset="-122"/>
+                <a:cs typeface="Arial" pitchFamily="34" charset="-120"/>
+              </a:rPr>
+              <a:t>○</a:t>
+            </a:r>
+            <a:endParaRPr lang="en-US" sz="1300" dirty="0"/>
+          </a:p>
+        </p:txBody>
+      </p:sp>
+      <p:sp>
+        <p:nvSpPr>
+          <p:cNvPr id="125" name="Shape 123"/>
+          <p:cNvSpPr/>
+          <p:nvPr/>
+        </p:nvSpPr>
+        <p:spPr>
+          <a:xfrm>
+            <a:off x="274320" y="4032504"/>
+            <a:ext cx="3017520" cy="365760"/>
+          </a:xfrm>
+          <a:prstGeom prst="rect">
+            <a:avLst/>
+          </a:prstGeom>
+          <a:solidFill>
+            <a:srgbClr val="1A1535"/>
+          </a:solidFill>
+          <a:ln/>
+        </p:spPr>
+      </p:sp>
+      <p:sp>
+        <p:nvSpPr>
+          <p:cNvPr id="126" name="Text 124"/>
+          <p:cNvSpPr/>
+          <p:nvPr/>
+        </p:nvSpPr>
+        <p:spPr>
+          <a:xfrm>
+            <a:off x="329184" y="4032504"/>
+            <a:ext cx="1920240" cy="365760"/>
+          </a:xfrm>
+          <a:prstGeom prst="rect">
+            <a:avLst/>
+          </a:prstGeom>
+          <a:noFill/>
+          <a:ln/>
+        </p:spPr>
+        <p:txBody>
+          <a:bodyPr wrap="square" lIns="0" tIns="0" rIns="0" bIns="0" rtlCol="0" anchor="ctr"/>
+          <a:lstStyle/>
+          <a:p>
+            <a:pPr indent="0" marL="0">
+              <a:buNone/>
+            </a:pPr>
+            <a:r>
+              <a:rPr lang="en-US" sz="1150" b="1" dirty="0">
+                <a:solidFill>
+                  <a:srgbClr val="FFFFFF"/>
+                </a:solidFill>
+                <a:latin typeface="Arial" pitchFamily="34" charset="0"/>
+                <a:ea typeface="Arial" pitchFamily="34" charset="-122"/>
+                <a:cs typeface="Arial" pitchFamily="34" charset="-120"/>
+              </a:rPr>
+              <a:t>合計 / 月</a:t>
+            </a:r>
+            <a:endParaRPr lang="en-US" sz="1150" dirty="0"/>
+          </a:p>
+        </p:txBody>
+      </p:sp>
+      <p:sp>
+        <p:nvSpPr>
+          <p:cNvPr id="127" name="Shape 125"/>
+          <p:cNvSpPr/>
+          <p:nvPr/>
+        </p:nvSpPr>
+        <p:spPr>
+          <a:xfrm>
+            <a:off x="3291840" y="4032504"/>
+            <a:ext cx="1325880" cy="365760"/>
+          </a:xfrm>
+          <a:prstGeom prst="rect">
+            <a:avLst/>
+          </a:prstGeom>
+          <a:solidFill>
+            <a:srgbClr val="4A9EDB"/>
+          </a:solidFill>
+          <a:ln/>
+        </p:spPr>
+      </p:sp>
+      <p:sp>
+        <p:nvSpPr>
+          <p:cNvPr id="128" name="Text 126"/>
+          <p:cNvSpPr/>
+          <p:nvPr/>
+        </p:nvSpPr>
+        <p:spPr>
+          <a:xfrm>
+            <a:off x="3319272" y="4032504"/>
+            <a:ext cx="1271016" cy="365760"/>
+          </a:xfrm>
+          <a:prstGeom prst="rect">
+            <a:avLst/>
+          </a:prstGeom>
+          <a:noFill/>
+          <a:ln/>
+        </p:spPr>
+        <p:txBody>
+          <a:bodyPr wrap="square" lIns="0" tIns="0" rIns="0" bIns="0" rtlCol="0" anchor="ctr"/>
+          <a:lstStyle/>
+          <a:p>
+            <a:pPr algn="ctr" indent="0" marL="0">
+              <a:buNone/>
+            </a:pPr>
+            <a:r>
+              <a:rPr lang="en-US" sz="950" b="1" dirty="0">
+                <a:solidFill>
+                  <a:srgbClr val="0D0D1A"/>
+                </a:solidFill>
+                <a:latin typeface="Arial" pitchFamily="34" charset="0"/>
+                <a:ea typeface="Arial" pitchFamily="34" charset="-122"/>
+                <a:cs typeface="Arial" pitchFamily="34" charset="-120"/>
+              </a:rPr>
+              <a:t>約20,000円</a:t>
+            </a:r>
+            <a:endParaRPr lang="en-US" sz="950" dirty="0"/>
+          </a:p>
+        </p:txBody>
+      </p:sp>
+      <p:sp>
+        <p:nvSpPr>
+          <p:cNvPr id="129" name="Shape 127"/>
+          <p:cNvSpPr/>
+          <p:nvPr/>
+        </p:nvSpPr>
+        <p:spPr>
+          <a:xfrm>
+            <a:off x="4617720" y="4032504"/>
+            <a:ext cx="1325880" cy="365760"/>
+          </a:xfrm>
+          <a:prstGeom prst="rect">
+            <a:avLst/>
+          </a:prstGeom>
+          <a:solidFill>
+            <a:srgbClr val="4CAF73"/>
+          </a:solidFill>
+          <a:ln/>
+        </p:spPr>
+      </p:sp>
+      <p:sp>
+        <p:nvSpPr>
+          <p:cNvPr id="130" name="Text 128"/>
+          <p:cNvSpPr/>
+          <p:nvPr/>
+        </p:nvSpPr>
+        <p:spPr>
+          <a:xfrm>
+            <a:off x="4645152" y="4032504"/>
+            <a:ext cx="1271016" cy="365760"/>
+          </a:xfrm>
+          <a:prstGeom prst="rect">
+            <a:avLst/>
+          </a:prstGeom>
+          <a:noFill/>
+          <a:ln/>
+        </p:spPr>
+        <p:txBody>
+          <a:bodyPr wrap="square" lIns="0" tIns="0" rIns="0" bIns="0" rtlCol="0" anchor="ctr"/>
+          <a:lstStyle/>
+          <a:p>
+            <a:pPr algn="ctr" indent="0" marL="0">
+              <a:buNone/>
+            </a:pPr>
+            <a:r>
+              <a:rPr lang="en-US" sz="950" b="1" dirty="0">
+                <a:solidFill>
+                  <a:srgbClr val="0D0D1A"/>
+                </a:solidFill>
+                <a:latin typeface="Arial" pitchFamily="34" charset="0"/>
+                <a:ea typeface="Arial" pitchFamily="34" charset="-122"/>
+                <a:cs typeface="Arial" pitchFamily="34" charset="-120"/>
+              </a:rPr>
+              <a:t>約20,150円</a:t>
+            </a:r>
+            <a:endParaRPr lang="en-US" sz="950" dirty="0"/>
+          </a:p>
+        </p:txBody>
+      </p:sp>
+      <p:sp>
+        <p:nvSpPr>
+          <p:cNvPr id="131" name="Shape 129"/>
+          <p:cNvSpPr/>
+          <p:nvPr/>
+        </p:nvSpPr>
+        <p:spPr>
+          <a:xfrm>
+            <a:off x="5943600" y="4032504"/>
+            <a:ext cx="1325880" cy="365760"/>
+          </a:xfrm>
+          <a:prstGeom prst="rect">
+            <a:avLst/>
+          </a:prstGeom>
+          <a:solidFill>
+            <a:srgbClr val="F5A623"/>
+          </a:solidFill>
+          <a:ln/>
+        </p:spPr>
+      </p:sp>
+      <p:sp>
+        <p:nvSpPr>
+          <p:cNvPr id="132" name="Text 130"/>
+          <p:cNvSpPr/>
+          <p:nvPr/>
+        </p:nvSpPr>
+        <p:spPr>
+          <a:xfrm>
+            <a:off x="5971032" y="4032504"/>
+            <a:ext cx="1271016" cy="365760"/>
+          </a:xfrm>
+          <a:prstGeom prst="rect">
+            <a:avLst/>
+          </a:prstGeom>
+          <a:noFill/>
+          <a:ln/>
+        </p:spPr>
+        <p:txBody>
+          <a:bodyPr wrap="square" lIns="0" tIns="0" rIns="0" bIns="0" rtlCol="0" anchor="ctr"/>
+          <a:lstStyle/>
+          <a:p>
+            <a:pPr algn="ctr" indent="0" marL="0">
+              <a:buNone/>
+            </a:pPr>
+            <a:r>
+              <a:rPr lang="en-US" sz="950" b="1" dirty="0">
+                <a:solidFill>
+                  <a:srgbClr val="0D0D1A"/>
+                </a:solidFill>
+                <a:latin typeface="Arial" pitchFamily="34" charset="0"/>
+                <a:ea typeface="Arial" pitchFamily="34" charset="-122"/>
+                <a:cs typeface="Arial" pitchFamily="34" charset="-120"/>
+              </a:rPr>
+              <a:t>約23,000〜</a:t>
+            </a:r>
+            <a:endParaRPr lang="en-US" sz="950" dirty="0"/>
+          </a:p>
+          <a:p>
+            <a:pPr algn="ctr" indent="0" marL="0">
+              <a:buNone/>
+            </a:pPr>
+            <a:r>
+              <a:rPr lang="en-US" sz="950" b="1" dirty="0">
+                <a:solidFill>
+                  <a:srgbClr val="0D0D1A"/>
+                </a:solidFill>
+                <a:latin typeface="Arial" pitchFamily="34" charset="0"/>
+                <a:ea typeface="Arial" pitchFamily="34" charset="-122"/>
+                <a:cs typeface="Arial" pitchFamily="34" charset="-120"/>
+              </a:rPr>
+              <a:t>30,000円</a:t>
+            </a:r>
+            <a:endParaRPr lang="en-US" sz="950" dirty="0"/>
+          </a:p>
+        </p:txBody>
+      </p:sp>
+      <p:sp>
+        <p:nvSpPr>
+          <p:cNvPr id="133" name="Shape 131"/>
+          <p:cNvSpPr/>
+          <p:nvPr/>
+        </p:nvSpPr>
+        <p:spPr>
+          <a:xfrm>
+            <a:off x="7269480" y="4032504"/>
+            <a:ext cx="1325880" cy="365760"/>
+          </a:xfrm>
+          <a:prstGeom prst="rect">
+            <a:avLst/>
+          </a:prstGeom>
+          <a:solidFill>
+            <a:srgbClr val="E94560"/>
+          </a:solidFill>
+          <a:ln/>
+        </p:spPr>
+      </p:sp>
+      <p:sp>
+        <p:nvSpPr>
+          <p:cNvPr id="134" name="Text 132"/>
+          <p:cNvSpPr/>
+          <p:nvPr/>
+        </p:nvSpPr>
+        <p:spPr>
+          <a:xfrm>
+            <a:off x="7296912" y="4032504"/>
+            <a:ext cx="1271016" cy="365760"/>
+          </a:xfrm>
+          <a:prstGeom prst="rect">
+            <a:avLst/>
+          </a:prstGeom>
+          <a:noFill/>
+          <a:ln/>
+        </p:spPr>
+        <p:txBody>
+          <a:bodyPr wrap="square" lIns="0" tIns="0" rIns="0" bIns="0" rtlCol="0" anchor="ctr"/>
+          <a:lstStyle/>
+          <a:p>
+            <a:pPr algn="ctr" indent="0" marL="0">
+              <a:buNone/>
+            </a:pPr>
+            <a:r>
+              <a:rPr lang="en-US" sz="950" b="1" dirty="0">
+                <a:solidFill>
+                  <a:srgbClr val="0D0D1A"/>
+                </a:solidFill>
+                <a:latin typeface="Arial" pitchFamily="34" charset="0"/>
+                <a:ea typeface="Arial" pitchFamily="34" charset="-122"/>
+                <a:cs typeface="Arial" pitchFamily="34" charset="-120"/>
+              </a:rPr>
+              <a:t>手数料</a:t>
+            </a:r>
+            <a:endParaRPr lang="en-US" sz="950" dirty="0"/>
+          </a:p>
+          <a:p>
+            <a:pPr algn="ctr" indent="0" marL="0">
+              <a:buNone/>
+            </a:pPr>
+            <a:r>
+              <a:rPr lang="en-US" sz="950" b="1" dirty="0">
+                <a:solidFill>
+                  <a:srgbClr val="0D0D1A"/>
+                </a:solidFill>
+                <a:latin typeface="Arial" pitchFamily="34" charset="0"/>
+                <a:ea typeface="Arial" pitchFamily="34" charset="-122"/>
+                <a:cs typeface="Arial" pitchFamily="34" charset="-120"/>
+              </a:rPr>
+              <a:t>＋数百円</a:t>
+            </a:r>
+            <a:endParaRPr lang="en-US" sz="950" dirty="0"/>
+          </a:p>
+        </p:txBody>
+      </p:sp>
+      <p:sp>
+        <p:nvSpPr>
+          <p:cNvPr id="135" name="Shape 133"/>
+          <p:cNvSpPr/>
+          <p:nvPr/>
+        </p:nvSpPr>
+        <p:spPr>
+          <a:xfrm>
+            <a:off x="274320" y="4471416"/>
+            <a:ext cx="8595360" cy="310896"/>
+          </a:xfrm>
+          <a:prstGeom prst="roundRect">
+            <a:avLst>
+              <a:gd name="adj" fmla="val 17647"/>
+            </a:avLst>
+          </a:prstGeom>
+          <a:solidFill>
+            <a:srgbClr val="251A25"/>
+          </a:solidFill>
+          <a:ln w="12700">
+            <a:solidFill>
+              <a:srgbClr val="E94560"/>
+            </a:solidFill>
+            <a:prstDash val="solid"/>
+          </a:ln>
+        </p:spPr>
+      </p:sp>
+      <p:sp>
+        <p:nvSpPr>
+          <p:cNvPr id="136" name="Text 134"/>
+          <p:cNvSpPr/>
+          <p:nvPr/>
+        </p:nvSpPr>
+        <p:spPr>
+          <a:xfrm>
+            <a:off x="384048" y="4471416"/>
+            <a:ext cx="8375904" cy="310896"/>
+          </a:xfrm>
+          <a:prstGeom prst="rect">
+            <a:avLst/>
+          </a:prstGeom>
+          <a:noFill/>
+          <a:ln/>
+        </p:spPr>
+        <p:txBody>
+          <a:bodyPr wrap="square" lIns="0" tIns="0" rIns="0" bIns="0" rtlCol="0" anchor="ctr"/>
+          <a:lstStyle/>
+          <a:p>
+            <a:pPr indent="0" marL="0">
+              <a:buNone/>
+            </a:pPr>
+            <a:r>
+              <a:rPr lang="en-US" sz="950" dirty="0">
+                <a:solidFill>
+                  <a:srgbClr val="E94560"/>
+                </a:solidFill>
+                <a:latin typeface="Arial" pitchFamily="34" charset="0"/>
+                <a:ea typeface="Arial" pitchFamily="34" charset="-122"/>
+                <a:cs typeface="Arial" pitchFamily="34" charset="-120"/>
+              </a:rPr>
+              <a:t>★ P4(UTAGEなし)：月額固定費はほぼ¥0だが、決済・認証・動画保護の連携を新規に作り込む分、初期開発工数が増える</a:t>
+            </a:r>
+            <a:endParaRPr lang="en-US" sz="950" dirty="0"/>
           </a:p>
         </p:txBody>
       </p:sp>

--- a/LOVEQUEST_MASTERS_提案書.pptx
+++ b/LOVEQUEST_MASTERS_提案書.pptx
@@ -8527,7 +8527,7 @@
         <p:spPr>
           <a:xfrm>
             <a:off x="274320" y="804672"/>
-            <a:ext cx="2011680" cy="384048"/>
+            <a:ext cx="2011680" cy="420624"/>
           </a:xfrm>
           <a:prstGeom prst="rect">
             <a:avLst/>
@@ -8547,7 +8547,7 @@
         <p:spPr>
           <a:xfrm>
             <a:off x="2286000" y="804672"/>
-            <a:ext cx="1005840" cy="384048"/>
+            <a:ext cx="1005840" cy="420624"/>
           </a:xfrm>
           <a:prstGeom prst="rect">
             <a:avLst/>
@@ -8567,7 +8567,7 @@
         <p:spPr>
           <a:xfrm>
             <a:off x="3291840" y="804672"/>
-            <a:ext cx="1325880" cy="384048"/>
+            <a:ext cx="1325880" cy="420624"/>
           </a:xfrm>
           <a:prstGeom prst="rect">
             <a:avLst/>
@@ -8592,7 +8592,7 @@
         <p:spPr>
           <a:xfrm>
             <a:off x="4617720" y="804672"/>
-            <a:ext cx="1325880" cy="384048"/>
+            <a:ext cx="1325880" cy="420624"/>
           </a:xfrm>
           <a:prstGeom prst="rect">
             <a:avLst/>
@@ -8617,7 +8617,7 @@
         <p:spPr>
           <a:xfrm>
             <a:off x="5943600" y="804672"/>
-            <a:ext cx="1325880" cy="384048"/>
+            <a:ext cx="1325880" cy="420624"/>
           </a:xfrm>
           <a:prstGeom prst="rect">
             <a:avLst/>
@@ -8642,7 +8642,7 @@
         <p:spPr>
           <a:xfrm>
             <a:off x="7269480" y="804672"/>
-            <a:ext cx="1325880" cy="384048"/>
+            <a:ext cx="1325880" cy="420624"/>
           </a:xfrm>
           <a:prstGeom prst="rect">
             <a:avLst/>
@@ -8666,24 +8666,24 @@
         </p:nvSpPr>
         <p:spPr>
           <a:xfrm>
-            <a:off x="310896" y="822960"/>
-            <a:ext cx="1938528" cy="347472"/>
-          </a:xfrm>
-          <a:prstGeom prst="rect">
-            <a:avLst/>
-          </a:prstGeom>
-          <a:noFill/>
-          <a:ln/>
-        </p:spPr>
-        <p:txBody>
-          <a:bodyPr wrap="square" lIns="0" tIns="0" rIns="0" bIns="0" rtlCol="0" anchor="ctr"/>
-          <a:lstStyle/>
-          <a:p>
-            <a:pPr algn="ctr" indent="0" marL="0">
-              <a:buNone/>
-            </a:pPr>
-            <a:r>
-              <a:rPr lang="en-US" sz="950" b="1" dirty="0">
+            <a:off x="301752" y="822960"/>
+            <a:ext cx="1956816" cy="384048"/>
+          </a:xfrm>
+          <a:prstGeom prst="rect">
+            <a:avLst/>
+          </a:prstGeom>
+          <a:noFill/>
+          <a:ln/>
+        </p:spPr>
+        <p:txBody>
+          <a:bodyPr wrap="square" lIns="0" tIns="0" rIns="0" bIns="0" rtlCol="0" anchor="ctr"/>
+          <a:lstStyle/>
+          <a:p>
+            <a:pPr algn="ctr" indent="0" marL="0">
+              <a:buNone/>
+            </a:pPr>
+            <a:r>
+              <a:rPr lang="en-US" sz="900" b="1" dirty="0">
                 <a:solidFill>
                   <a:srgbClr val="FFFFFF"/>
                 </a:solidFill>
@@ -8693,7 +8693,7 @@
               </a:rPr>
               <a:t>項目</a:t>
             </a:r>
-            <a:endParaRPr lang="en-US" sz="950" dirty="0"/>
+            <a:endParaRPr lang="en-US" sz="900" dirty="0"/>
           </a:p>
         </p:txBody>
       </p:sp>
@@ -8705,24 +8705,24 @@
         </p:nvSpPr>
         <p:spPr>
           <a:xfrm>
-            <a:off x="2322576" y="822960"/>
-            <a:ext cx="932688" cy="347472"/>
-          </a:xfrm>
-          <a:prstGeom prst="rect">
-            <a:avLst/>
-          </a:prstGeom>
-          <a:noFill/>
-          <a:ln/>
-        </p:spPr>
-        <p:txBody>
-          <a:bodyPr wrap="square" lIns="0" tIns="0" rIns="0" bIns="0" rtlCol="0" anchor="ctr"/>
-          <a:lstStyle/>
-          <a:p>
-            <a:pPr algn="ctr" indent="0" marL="0">
-              <a:buNone/>
-            </a:pPr>
-            <a:r>
-              <a:rPr lang="en-US" sz="950" b="1" dirty="0">
+            <a:off x="2313432" y="822960"/>
+            <a:ext cx="950976" cy="384048"/>
+          </a:xfrm>
+          <a:prstGeom prst="rect">
+            <a:avLst/>
+          </a:prstGeom>
+          <a:noFill/>
+          <a:ln/>
+        </p:spPr>
+        <p:txBody>
+          <a:bodyPr wrap="square" lIns="0" tIns="0" rIns="0" bIns="0" rtlCol="0" anchor="ctr"/>
+          <a:lstStyle/>
+          <a:p>
+            <a:pPr algn="ctr" indent="0" marL="0">
+              <a:buNone/>
+            </a:pPr>
+            <a:r>
+              <a:rPr lang="en-US" sz="900" b="1" dirty="0">
                 <a:solidFill>
                   <a:srgbClr val="FFFFFF"/>
                 </a:solidFill>
@@ -8732,7 +8732,7 @@
               </a:rPr>
               <a:t>費用/月</a:t>
             </a:r>
-            <a:endParaRPr lang="en-US" sz="950" dirty="0"/>
+            <a:endParaRPr lang="en-US" sz="900" dirty="0"/>
           </a:p>
         </p:txBody>
       </p:sp>
@@ -8744,24 +8744,24 @@
         </p:nvSpPr>
         <p:spPr>
           <a:xfrm>
-            <a:off x="3328416" y="822960"/>
-            <a:ext cx="1252728" cy="347472"/>
-          </a:xfrm>
-          <a:prstGeom prst="rect">
-            <a:avLst/>
-          </a:prstGeom>
-          <a:noFill/>
-          <a:ln/>
-        </p:spPr>
-        <p:txBody>
-          <a:bodyPr wrap="square" lIns="0" tIns="0" rIns="0" bIns="0" rtlCol="0" anchor="ctr"/>
-          <a:lstStyle/>
-          <a:p>
-            <a:pPr algn="ctr" indent="0" marL="0">
-              <a:buNone/>
-            </a:pPr>
-            <a:r>
-              <a:rPr lang="en-US" sz="950" b="1" dirty="0">
+            <a:off x="3319272" y="822960"/>
+            <a:ext cx="1271016" cy="384048"/>
+          </a:xfrm>
+          <a:prstGeom prst="rect">
+            <a:avLst/>
+          </a:prstGeom>
+          <a:noFill/>
+          <a:ln/>
+        </p:spPr>
+        <p:txBody>
+          <a:bodyPr wrap="square" lIns="0" tIns="0" rIns="0" bIns="0" rtlCol="0" anchor="ctr"/>
+          <a:lstStyle/>
+          <a:p>
+            <a:pPr algn="ctr" indent="0" marL="0">
+              <a:buNone/>
+            </a:pPr>
+            <a:r>
+              <a:rPr lang="en-US" sz="900" b="1" dirty="0">
                 <a:solidFill>
                   <a:srgbClr val="4A9EDB"/>
                 </a:solidFill>
@@ -8769,16 +8769,16 @@
                 <a:ea typeface="Arial" pitchFamily="34" charset="-122"/>
                 <a:cs typeface="Arial" pitchFamily="34" charset="-120"/>
               </a:rPr>
-              <a:t>P1</a:t>
-            </a:r>
-            <a:endParaRPr lang="en-US" sz="950" dirty="0"/>
-          </a:p>
-          <a:p>
-            <a:pPr algn="ctr" indent="0" marL="0">
-              <a:buNone/>
-            </a:pPr>
-            <a:r>
-              <a:rPr lang="en-US" sz="950" b="1" dirty="0">
+              <a:t>パターン1</a:t>
+            </a:r>
+            <a:endParaRPr lang="en-US" sz="900" dirty="0"/>
+          </a:p>
+          <a:p>
+            <a:pPr algn="ctr" indent="0" marL="0">
+              <a:buNone/>
+            </a:pPr>
+            <a:r>
+              <a:rPr lang="en-US" sz="900" b="1" dirty="0">
                 <a:solidFill>
                   <a:srgbClr val="4A9EDB"/>
                 </a:solidFill>
@@ -8788,7 +8788,7 @@
               </a:rPr>
               <a:t>超ミニマム</a:t>
             </a:r>
-            <a:endParaRPr lang="en-US" sz="950" dirty="0"/>
+            <a:endParaRPr lang="en-US" sz="900" dirty="0"/>
           </a:p>
         </p:txBody>
       </p:sp>
@@ -8800,24 +8800,24 @@
         </p:nvSpPr>
         <p:spPr>
           <a:xfrm>
-            <a:off x="4654296" y="822960"/>
-            <a:ext cx="1252728" cy="347472"/>
-          </a:xfrm>
-          <a:prstGeom prst="rect">
-            <a:avLst/>
-          </a:prstGeom>
-          <a:noFill/>
-          <a:ln/>
-        </p:spPr>
-        <p:txBody>
-          <a:bodyPr wrap="square" lIns="0" tIns="0" rIns="0" bIns="0" rtlCol="0" anchor="ctr"/>
-          <a:lstStyle/>
-          <a:p>
-            <a:pPr algn="ctr" indent="0" marL="0">
-              <a:buNone/>
-            </a:pPr>
-            <a:r>
-              <a:rPr lang="en-US" sz="950" b="1" dirty="0">
+            <a:off x="4645152" y="822960"/>
+            <a:ext cx="1271016" cy="384048"/>
+          </a:xfrm>
+          <a:prstGeom prst="rect">
+            <a:avLst/>
+          </a:prstGeom>
+          <a:noFill/>
+          <a:ln/>
+        </p:spPr>
+        <p:txBody>
+          <a:bodyPr wrap="square" lIns="0" tIns="0" rIns="0" bIns="0" rtlCol="0" anchor="ctr"/>
+          <a:lstStyle/>
+          <a:p>
+            <a:pPr algn="ctr" indent="0" marL="0">
+              <a:buNone/>
+            </a:pPr>
+            <a:r>
+              <a:rPr lang="en-US" sz="900" b="1" dirty="0">
                 <a:solidFill>
                   <a:srgbClr val="4CAF73"/>
                 </a:solidFill>
@@ -8825,16 +8825,16 @@
                 <a:ea typeface="Arial" pitchFamily="34" charset="-122"/>
                 <a:cs typeface="Arial" pitchFamily="34" charset="-120"/>
               </a:rPr>
-              <a:t>P2 標準</a:t>
-            </a:r>
-            <a:endParaRPr lang="en-US" sz="950" dirty="0"/>
-          </a:p>
-          <a:p>
-            <a:pPr algn="ctr" indent="0" marL="0">
-              <a:buNone/>
-            </a:pPr>
-            <a:r>
-              <a:rPr lang="en-US" sz="950" b="1" dirty="0">
+              <a:t>パターン2 標準</a:t>
+            </a:r>
+            <a:endParaRPr lang="en-US" sz="900" dirty="0"/>
+          </a:p>
+          <a:p>
+            <a:pPr algn="ctr" indent="0" marL="0">
+              <a:buNone/>
+            </a:pPr>
+            <a:r>
+              <a:rPr lang="en-US" sz="900" b="1" dirty="0">
                 <a:solidFill>
                   <a:srgbClr val="4CAF73"/>
                 </a:solidFill>
@@ -8844,7 +8844,7 @@
               </a:rPr>
               <a:t>★推奨</a:t>
             </a:r>
-            <a:endParaRPr lang="en-US" sz="950" dirty="0"/>
+            <a:endParaRPr lang="en-US" sz="900" dirty="0"/>
           </a:p>
         </p:txBody>
       </p:sp>
@@ -8856,24 +8856,24 @@
         </p:nvSpPr>
         <p:spPr>
           <a:xfrm>
-            <a:off x="5980176" y="822960"/>
-            <a:ext cx="1252728" cy="347472"/>
-          </a:xfrm>
-          <a:prstGeom prst="rect">
-            <a:avLst/>
-          </a:prstGeom>
-          <a:noFill/>
-          <a:ln/>
-        </p:spPr>
-        <p:txBody>
-          <a:bodyPr wrap="square" lIns="0" tIns="0" rIns="0" bIns="0" rtlCol="0" anchor="ctr"/>
-          <a:lstStyle/>
-          <a:p>
-            <a:pPr algn="ctr" indent="0" marL="0">
-              <a:buNone/>
-            </a:pPr>
-            <a:r>
-              <a:rPr lang="en-US" sz="950" b="1" dirty="0">
+            <a:off x="5971032" y="822960"/>
+            <a:ext cx="1271016" cy="384048"/>
+          </a:xfrm>
+          <a:prstGeom prst="rect">
+            <a:avLst/>
+          </a:prstGeom>
+          <a:noFill/>
+          <a:ln/>
+        </p:spPr>
+        <p:txBody>
+          <a:bodyPr wrap="square" lIns="0" tIns="0" rIns="0" bIns="0" rtlCol="0" anchor="ctr"/>
+          <a:lstStyle/>
+          <a:p>
+            <a:pPr algn="ctr" indent="0" marL="0">
+              <a:buNone/>
+            </a:pPr>
+            <a:r>
+              <a:rPr lang="en-US" sz="900" b="1" dirty="0">
                 <a:solidFill>
                   <a:srgbClr val="F5A623"/>
                 </a:solidFill>
@@ -8881,16 +8881,16 @@
                 <a:ea typeface="Arial" pitchFamily="34" charset="-122"/>
                 <a:cs typeface="Arial" pitchFamily="34" charset="-120"/>
               </a:rPr>
-              <a:t>P3</a:t>
-            </a:r>
-            <a:endParaRPr lang="en-US" sz="950" dirty="0"/>
-          </a:p>
-          <a:p>
-            <a:pPr algn="ctr" indent="0" marL="0">
-              <a:buNone/>
-            </a:pPr>
-            <a:r>
-              <a:rPr lang="en-US" sz="950" b="1" dirty="0">
+              <a:t>パターン3</a:t>
+            </a:r>
+            <a:endParaRPr lang="en-US" sz="900" dirty="0"/>
+          </a:p>
+          <a:p>
+            <a:pPr algn="ctr" indent="0" marL="0">
+              <a:buNone/>
+            </a:pPr>
+            <a:r>
+              <a:rPr lang="en-US" sz="900" b="1" dirty="0">
                 <a:solidFill>
                   <a:srgbClr val="F5A623"/>
                 </a:solidFill>
@@ -8900,7 +8900,7 @@
               </a:rPr>
               <a:t>AWS本格</a:t>
             </a:r>
-            <a:endParaRPr lang="en-US" sz="950" dirty="0"/>
+            <a:endParaRPr lang="en-US" sz="900" dirty="0"/>
           </a:p>
         </p:txBody>
       </p:sp>
@@ -8912,24 +8912,24 @@
         </p:nvSpPr>
         <p:spPr>
           <a:xfrm>
-            <a:off x="7306056" y="822960"/>
-            <a:ext cx="1252728" cy="347472"/>
-          </a:xfrm>
-          <a:prstGeom prst="rect">
-            <a:avLst/>
-          </a:prstGeom>
-          <a:noFill/>
-          <a:ln/>
-        </p:spPr>
-        <p:txBody>
-          <a:bodyPr wrap="square" lIns="0" tIns="0" rIns="0" bIns="0" rtlCol="0" anchor="ctr"/>
-          <a:lstStyle/>
-          <a:p>
-            <a:pPr algn="ctr" indent="0" marL="0">
-              <a:buNone/>
-            </a:pPr>
-            <a:r>
-              <a:rPr lang="en-US" sz="950" b="1" dirty="0">
+            <a:off x="7296912" y="822960"/>
+            <a:ext cx="1271016" cy="384048"/>
+          </a:xfrm>
+          <a:prstGeom prst="rect">
+            <a:avLst/>
+          </a:prstGeom>
+          <a:noFill/>
+          <a:ln/>
+        </p:spPr>
+        <p:txBody>
+          <a:bodyPr wrap="square" lIns="0" tIns="0" rIns="0" bIns="0" rtlCol="0" anchor="ctr"/>
+          <a:lstStyle/>
+          <a:p>
+            <a:pPr algn="ctr" indent="0" marL="0">
+              <a:buNone/>
+            </a:pPr>
+            <a:r>
+              <a:rPr lang="en-US" sz="900" b="1" dirty="0">
                 <a:solidFill>
                   <a:srgbClr val="E94560"/>
                 </a:solidFill>
@@ -8937,16 +8937,16 @@
                 <a:ea typeface="Arial" pitchFamily="34" charset="-122"/>
                 <a:cs typeface="Arial" pitchFamily="34" charset="-120"/>
               </a:rPr>
-              <a:t>P4 UTAGE</a:t>
-            </a:r>
-            <a:endParaRPr lang="en-US" sz="950" dirty="0"/>
-          </a:p>
-          <a:p>
-            <a:pPr algn="ctr" indent="0" marL="0">
-              <a:buNone/>
-            </a:pPr>
-            <a:r>
-              <a:rPr lang="en-US" sz="950" b="1" dirty="0">
+              <a:t>パターン4</a:t>
+            </a:r>
+            <a:endParaRPr lang="en-US" sz="900" dirty="0"/>
+          </a:p>
+          <a:p>
+            <a:pPr algn="ctr" indent="0" marL="0">
+              <a:buNone/>
+            </a:pPr>
+            <a:r>
+              <a:rPr lang="en-US" sz="900" b="1" dirty="0">
                 <a:solidFill>
                   <a:srgbClr val="E94560"/>
                 </a:solidFill>
@@ -8954,9 +8954,9 @@
                 <a:ea typeface="Arial" pitchFamily="34" charset="-122"/>
                 <a:cs typeface="Arial" pitchFamily="34" charset="-120"/>
               </a:rPr>
-              <a:t>なし</a:t>
-            </a:r>
-            <a:endParaRPr lang="en-US" sz="950" dirty="0"/>
+              <a:t>UTAGEなし</a:t>
+            </a:r>
+            <a:endParaRPr lang="en-US" sz="900" dirty="0"/>
           </a:p>
         </p:txBody>
       </p:sp>
@@ -8968,8 +8968,8 @@
         </p:nvSpPr>
         <p:spPr>
           <a:xfrm>
-            <a:off x="274320" y="1188720"/>
-            <a:ext cx="2011680" cy="310896"/>
+            <a:off x="274320" y="1225296"/>
+            <a:ext cx="2011680" cy="292608"/>
           </a:xfrm>
           <a:prstGeom prst="rect">
             <a:avLst/>
@@ -8988,8 +8988,8 @@
         </p:nvSpPr>
         <p:spPr>
           <a:xfrm>
-            <a:off x="2286000" y="1188720"/>
-            <a:ext cx="1005840" cy="310896"/>
+            <a:off x="2286000" y="1225296"/>
+            <a:ext cx="1005840" cy="292608"/>
           </a:xfrm>
           <a:prstGeom prst="rect">
             <a:avLst/>
@@ -9008,8 +9008,8 @@
         </p:nvSpPr>
         <p:spPr>
           <a:xfrm>
-            <a:off x="3291840" y="1188720"/>
-            <a:ext cx="1325880" cy="310896"/>
+            <a:off x="3291840" y="1225296"/>
+            <a:ext cx="1325880" cy="292608"/>
           </a:xfrm>
           <a:prstGeom prst="rect">
             <a:avLst/>
@@ -9033,8 +9033,8 @@
         </p:nvSpPr>
         <p:spPr>
           <a:xfrm>
-            <a:off x="4617720" y="1188720"/>
-            <a:ext cx="1325880" cy="310896"/>
+            <a:off x="4617720" y="1225296"/>
+            <a:ext cx="1325880" cy="292608"/>
           </a:xfrm>
           <a:prstGeom prst="rect">
             <a:avLst/>
@@ -9058,8 +9058,8 @@
         </p:nvSpPr>
         <p:spPr>
           <a:xfrm>
-            <a:off x="5943600" y="1188720"/>
-            <a:ext cx="1325880" cy="310896"/>
+            <a:off x="5943600" y="1225296"/>
+            <a:ext cx="1325880" cy="292608"/>
           </a:xfrm>
           <a:prstGeom prst="rect">
             <a:avLst/>
@@ -9083,8 +9083,8 @@
         </p:nvSpPr>
         <p:spPr>
           <a:xfrm>
-            <a:off x="7269480" y="1188720"/>
-            <a:ext cx="1325880" cy="310896"/>
+            <a:off x="7269480" y="1225296"/>
+            <a:ext cx="1325880" cy="292608"/>
           </a:xfrm>
           <a:prstGeom prst="rect">
             <a:avLst/>
@@ -9108,8 +9108,8 @@
         </p:nvSpPr>
         <p:spPr>
           <a:xfrm>
-            <a:off x="329184" y="1188720"/>
-            <a:ext cx="1920240" cy="310896"/>
+            <a:off x="329184" y="1225296"/>
+            <a:ext cx="1920240" cy="292608"/>
           </a:xfrm>
           <a:prstGeom prst="rect">
             <a:avLst/>
@@ -9147,8 +9147,8 @@
         </p:nvSpPr>
         <p:spPr>
           <a:xfrm>
-            <a:off x="2313432" y="1188720"/>
-            <a:ext cx="950976" cy="310896"/>
+            <a:off x="2313432" y="1225296"/>
+            <a:ext cx="950976" cy="292608"/>
           </a:xfrm>
           <a:prstGeom prst="rect">
             <a:avLst/>
@@ -9186,8 +9186,8 @@
         </p:nvSpPr>
         <p:spPr>
           <a:xfrm>
-            <a:off x="3319272" y="1188720"/>
-            <a:ext cx="1271016" cy="310896"/>
+            <a:off x="3319272" y="1225296"/>
+            <a:ext cx="1271016" cy="292608"/>
           </a:xfrm>
           <a:prstGeom prst="rect">
             <a:avLst/>
@@ -9225,8 +9225,8 @@
         </p:nvSpPr>
         <p:spPr>
           <a:xfrm>
-            <a:off x="4645152" y="1188720"/>
-            <a:ext cx="1271016" cy="310896"/>
+            <a:off x="4645152" y="1225296"/>
+            <a:ext cx="1271016" cy="292608"/>
           </a:xfrm>
           <a:prstGeom prst="rect">
             <a:avLst/>
@@ -9264,8 +9264,8 @@
         </p:nvSpPr>
         <p:spPr>
           <a:xfrm>
-            <a:off x="5971032" y="1188720"/>
-            <a:ext cx="1271016" cy="310896"/>
+            <a:off x="5971032" y="1225296"/>
+            <a:ext cx="1271016" cy="292608"/>
           </a:xfrm>
           <a:prstGeom prst="rect">
             <a:avLst/>
@@ -9303,8 +9303,8 @@
         </p:nvSpPr>
         <p:spPr>
           <a:xfrm>
-            <a:off x="7296912" y="1188720"/>
-            <a:ext cx="1271016" cy="310896"/>
+            <a:off x="7296912" y="1225296"/>
+            <a:ext cx="1271016" cy="292608"/>
           </a:xfrm>
           <a:prstGeom prst="rect">
             <a:avLst/>
@@ -9342,8 +9342,8 @@
         </p:nvSpPr>
         <p:spPr>
           <a:xfrm>
-            <a:off x="274320" y="1499616"/>
-            <a:ext cx="2011680" cy="310896"/>
+            <a:off x="274320" y="1517904"/>
+            <a:ext cx="2011680" cy="292608"/>
           </a:xfrm>
           <a:prstGeom prst="rect">
             <a:avLst/>
@@ -9362,8 +9362,8 @@
         </p:nvSpPr>
         <p:spPr>
           <a:xfrm>
-            <a:off x="2286000" y="1499616"/>
-            <a:ext cx="1005840" cy="310896"/>
+            <a:off x="2286000" y="1517904"/>
+            <a:ext cx="1005840" cy="292608"/>
           </a:xfrm>
           <a:prstGeom prst="rect">
             <a:avLst/>
@@ -9382,8 +9382,8 @@
         </p:nvSpPr>
         <p:spPr>
           <a:xfrm>
-            <a:off x="3291840" y="1499616"/>
-            <a:ext cx="1325880" cy="310896"/>
+            <a:off x="3291840" y="1517904"/>
+            <a:ext cx="1325880" cy="292608"/>
           </a:xfrm>
           <a:prstGeom prst="rect">
             <a:avLst/>
@@ -9407,8 +9407,8 @@
         </p:nvSpPr>
         <p:spPr>
           <a:xfrm>
-            <a:off x="4617720" y="1499616"/>
-            <a:ext cx="1325880" cy="310896"/>
+            <a:off x="4617720" y="1517904"/>
+            <a:ext cx="1325880" cy="292608"/>
           </a:xfrm>
           <a:prstGeom prst="rect">
             <a:avLst/>
@@ -9432,8 +9432,8 @@
         </p:nvSpPr>
         <p:spPr>
           <a:xfrm>
-            <a:off x="5943600" y="1499616"/>
-            <a:ext cx="1325880" cy="310896"/>
+            <a:off x="5943600" y="1517904"/>
+            <a:ext cx="1325880" cy="292608"/>
           </a:xfrm>
           <a:prstGeom prst="rect">
             <a:avLst/>
@@ -9457,8 +9457,8 @@
         </p:nvSpPr>
         <p:spPr>
           <a:xfrm>
-            <a:off x="7269480" y="1499616"/>
-            <a:ext cx="1325880" cy="310896"/>
+            <a:off x="7269480" y="1517904"/>
+            <a:ext cx="1325880" cy="292608"/>
           </a:xfrm>
           <a:prstGeom prst="rect">
             <a:avLst/>
@@ -9482,8 +9482,8 @@
         </p:nvSpPr>
         <p:spPr>
           <a:xfrm>
-            <a:off x="329184" y="1499616"/>
-            <a:ext cx="1920240" cy="310896"/>
+            <a:off x="329184" y="1517904"/>
+            <a:ext cx="1920240" cy="292608"/>
           </a:xfrm>
           <a:prstGeom prst="rect">
             <a:avLst/>
@@ -9521,8 +9521,8 @@
         </p:nvSpPr>
         <p:spPr>
           <a:xfrm>
-            <a:off x="2313432" y="1499616"/>
-            <a:ext cx="950976" cy="310896"/>
+            <a:off x="2313432" y="1517904"/>
+            <a:ext cx="950976" cy="292608"/>
           </a:xfrm>
           <a:prstGeom prst="rect">
             <a:avLst/>
@@ -9560,8 +9560,8 @@
         </p:nvSpPr>
         <p:spPr>
           <a:xfrm>
-            <a:off x="3319272" y="1499616"/>
-            <a:ext cx="1271016" cy="310896"/>
+            <a:off x="3319272" y="1517904"/>
+            <a:ext cx="1271016" cy="292608"/>
           </a:xfrm>
           <a:prstGeom prst="rect">
             <a:avLst/>
@@ -9599,8 +9599,8 @@
         </p:nvSpPr>
         <p:spPr>
           <a:xfrm>
-            <a:off x="4645152" y="1499616"/>
-            <a:ext cx="1271016" cy="310896"/>
+            <a:off x="4645152" y="1517904"/>
+            <a:ext cx="1271016" cy="292608"/>
           </a:xfrm>
           <a:prstGeom prst="rect">
             <a:avLst/>
@@ -9638,8 +9638,8 @@
         </p:nvSpPr>
         <p:spPr>
           <a:xfrm>
-            <a:off x="5971032" y="1499616"/>
-            <a:ext cx="1271016" cy="310896"/>
+            <a:off x="5971032" y="1517904"/>
+            <a:ext cx="1271016" cy="292608"/>
           </a:xfrm>
           <a:prstGeom prst="rect">
             <a:avLst/>
@@ -9677,8 +9677,8 @@
         </p:nvSpPr>
         <p:spPr>
           <a:xfrm>
-            <a:off x="7296912" y="1499616"/>
-            <a:ext cx="1271016" cy="310896"/>
+            <a:off x="7296912" y="1517904"/>
+            <a:ext cx="1271016" cy="292608"/>
           </a:xfrm>
           <a:prstGeom prst="rect">
             <a:avLst/>
@@ -9717,7 +9717,7 @@
         <p:spPr>
           <a:xfrm>
             <a:off x="274320" y="1810512"/>
-            <a:ext cx="2011680" cy="310896"/>
+            <a:ext cx="2011680" cy="292608"/>
           </a:xfrm>
           <a:prstGeom prst="rect">
             <a:avLst/>
@@ -9737,7 +9737,7 @@
         <p:spPr>
           <a:xfrm>
             <a:off x="2286000" y="1810512"/>
-            <a:ext cx="1005840" cy="310896"/>
+            <a:ext cx="1005840" cy="292608"/>
           </a:xfrm>
           <a:prstGeom prst="rect">
             <a:avLst/>
@@ -9757,7 +9757,7 @@
         <p:spPr>
           <a:xfrm>
             <a:off x="3291840" y="1810512"/>
-            <a:ext cx="1325880" cy="310896"/>
+            <a:ext cx="1325880" cy="292608"/>
           </a:xfrm>
           <a:prstGeom prst="rect">
             <a:avLst/>
@@ -9782,7 +9782,7 @@
         <p:spPr>
           <a:xfrm>
             <a:off x="4617720" y="1810512"/>
-            <a:ext cx="1325880" cy="310896"/>
+            <a:ext cx="1325880" cy="292608"/>
           </a:xfrm>
           <a:prstGeom prst="rect">
             <a:avLst/>
@@ -9807,7 +9807,7 @@
         <p:spPr>
           <a:xfrm>
             <a:off x="5943600" y="1810512"/>
-            <a:ext cx="1325880" cy="310896"/>
+            <a:ext cx="1325880" cy="292608"/>
           </a:xfrm>
           <a:prstGeom prst="rect">
             <a:avLst/>
@@ -9832,7 +9832,7 @@
         <p:spPr>
           <a:xfrm>
             <a:off x="7269480" y="1810512"/>
-            <a:ext cx="1325880" cy="310896"/>
+            <a:ext cx="1325880" cy="292608"/>
           </a:xfrm>
           <a:prstGeom prst="rect">
             <a:avLst/>
@@ -9857,7 +9857,7 @@
         <p:spPr>
           <a:xfrm>
             <a:off x="329184" y="1810512"/>
-            <a:ext cx="1920240" cy="310896"/>
+            <a:ext cx="1920240" cy="292608"/>
           </a:xfrm>
           <a:prstGeom prst="rect">
             <a:avLst/>
@@ -9896,7 +9896,7 @@
         <p:spPr>
           <a:xfrm>
             <a:off x="2313432" y="1810512"/>
-            <a:ext cx="950976" cy="310896"/>
+            <a:ext cx="950976" cy="292608"/>
           </a:xfrm>
           <a:prstGeom prst="rect">
             <a:avLst/>
@@ -9935,7 +9935,7 @@
         <p:spPr>
           <a:xfrm>
             <a:off x="3319272" y="1810512"/>
-            <a:ext cx="1271016" cy="310896"/>
+            <a:ext cx="1271016" cy="292608"/>
           </a:xfrm>
           <a:prstGeom prst="rect">
             <a:avLst/>
@@ -9974,7 +9974,7 @@
         <p:spPr>
           <a:xfrm>
             <a:off x="4645152" y="1810512"/>
-            <a:ext cx="1271016" cy="310896"/>
+            <a:ext cx="1271016" cy="292608"/>
           </a:xfrm>
           <a:prstGeom prst="rect">
             <a:avLst/>
@@ -10013,7 +10013,7 @@
         <p:spPr>
           <a:xfrm>
             <a:off x="5971032" y="1810512"/>
-            <a:ext cx="1271016" cy="310896"/>
+            <a:ext cx="1271016" cy="292608"/>
           </a:xfrm>
           <a:prstGeom prst="rect">
             <a:avLst/>
@@ -10052,7 +10052,7 @@
         <p:spPr>
           <a:xfrm>
             <a:off x="7296912" y="1810512"/>
-            <a:ext cx="1271016" cy="310896"/>
+            <a:ext cx="1271016" cy="292608"/>
           </a:xfrm>
           <a:prstGeom prst="rect">
             <a:avLst/>
@@ -10090,8 +10090,8 @@
         </p:nvSpPr>
         <p:spPr>
           <a:xfrm>
-            <a:off x="274320" y="2121408"/>
-            <a:ext cx="2011680" cy="310896"/>
+            <a:off x="274320" y="2103120"/>
+            <a:ext cx="2011680" cy="292608"/>
           </a:xfrm>
           <a:prstGeom prst="rect">
             <a:avLst/>
@@ -10110,8 +10110,8 @@
         </p:nvSpPr>
         <p:spPr>
           <a:xfrm>
-            <a:off x="2286000" y="2121408"/>
-            <a:ext cx="1005840" cy="310896"/>
+            <a:off x="2286000" y="2103120"/>
+            <a:ext cx="1005840" cy="292608"/>
           </a:xfrm>
           <a:prstGeom prst="rect">
             <a:avLst/>
@@ -10130,8 +10130,8 @@
         </p:nvSpPr>
         <p:spPr>
           <a:xfrm>
-            <a:off x="3291840" y="2121408"/>
-            <a:ext cx="1325880" cy="310896"/>
+            <a:off x="3291840" y="2103120"/>
+            <a:ext cx="1325880" cy="292608"/>
           </a:xfrm>
           <a:prstGeom prst="rect">
             <a:avLst/>
@@ -10155,8 +10155,8 @@
         </p:nvSpPr>
         <p:spPr>
           <a:xfrm>
-            <a:off x="4617720" y="2121408"/>
-            <a:ext cx="1325880" cy="310896"/>
+            <a:off x="4617720" y="2103120"/>
+            <a:ext cx="1325880" cy="292608"/>
           </a:xfrm>
           <a:prstGeom prst="rect">
             <a:avLst/>
@@ -10180,8 +10180,8 @@
         </p:nvSpPr>
         <p:spPr>
           <a:xfrm>
-            <a:off x="5943600" y="2121408"/>
-            <a:ext cx="1325880" cy="310896"/>
+            <a:off x="5943600" y="2103120"/>
+            <a:ext cx="1325880" cy="292608"/>
           </a:xfrm>
           <a:prstGeom prst="rect">
             <a:avLst/>
@@ -10205,8 +10205,8 @@
         </p:nvSpPr>
         <p:spPr>
           <a:xfrm>
-            <a:off x="7269480" y="2121408"/>
-            <a:ext cx="1325880" cy="310896"/>
+            <a:off x="7269480" y="2103120"/>
+            <a:ext cx="1325880" cy="292608"/>
           </a:xfrm>
           <a:prstGeom prst="rect">
             <a:avLst/>
@@ -10230,8 +10230,8 @@
         </p:nvSpPr>
         <p:spPr>
           <a:xfrm>
-            <a:off x="329184" y="2121408"/>
-            <a:ext cx="1920240" cy="310896"/>
+            <a:off x="329184" y="2103120"/>
+            <a:ext cx="1920240" cy="292608"/>
           </a:xfrm>
           <a:prstGeom prst="rect">
             <a:avLst/>
@@ -10269,8 +10269,8 @@
         </p:nvSpPr>
         <p:spPr>
           <a:xfrm>
-            <a:off x="2313432" y="2121408"/>
-            <a:ext cx="950976" cy="310896"/>
+            <a:off x="2313432" y="2103120"/>
+            <a:ext cx="950976" cy="292608"/>
           </a:xfrm>
           <a:prstGeom prst="rect">
             <a:avLst/>
@@ -10308,8 +10308,8 @@
         </p:nvSpPr>
         <p:spPr>
           <a:xfrm>
-            <a:off x="3319272" y="2121408"/>
-            <a:ext cx="1271016" cy="310896"/>
+            <a:off x="3319272" y="2103120"/>
+            <a:ext cx="1271016" cy="292608"/>
           </a:xfrm>
           <a:prstGeom prst="rect">
             <a:avLst/>
@@ -10347,8 +10347,8 @@
         </p:nvSpPr>
         <p:spPr>
           <a:xfrm>
-            <a:off x="4645152" y="2121408"/>
-            <a:ext cx="1271016" cy="310896"/>
+            <a:off x="4645152" y="2103120"/>
+            <a:ext cx="1271016" cy="292608"/>
           </a:xfrm>
           <a:prstGeom prst="rect">
             <a:avLst/>
@@ -10386,8 +10386,8 @@
         </p:nvSpPr>
         <p:spPr>
           <a:xfrm>
-            <a:off x="5971032" y="2121408"/>
-            <a:ext cx="1271016" cy="310896"/>
+            <a:off x="5971032" y="2103120"/>
+            <a:ext cx="1271016" cy="292608"/>
           </a:xfrm>
           <a:prstGeom prst="rect">
             <a:avLst/>
@@ -10425,8 +10425,8 @@
         </p:nvSpPr>
         <p:spPr>
           <a:xfrm>
-            <a:off x="7296912" y="2121408"/>
-            <a:ext cx="1271016" cy="310896"/>
+            <a:off x="7296912" y="2103120"/>
+            <a:ext cx="1271016" cy="292608"/>
           </a:xfrm>
           <a:prstGeom prst="rect">
             <a:avLst/>
@@ -10464,8 +10464,8 @@
         </p:nvSpPr>
         <p:spPr>
           <a:xfrm>
-            <a:off x="274320" y="2432304"/>
-            <a:ext cx="2011680" cy="310896"/>
+            <a:off x="274320" y="2395728"/>
+            <a:ext cx="2011680" cy="292608"/>
           </a:xfrm>
           <a:prstGeom prst="rect">
             <a:avLst/>
@@ -10484,8 +10484,8 @@
         </p:nvSpPr>
         <p:spPr>
           <a:xfrm>
-            <a:off x="2286000" y="2432304"/>
-            <a:ext cx="1005840" cy="310896"/>
+            <a:off x="2286000" y="2395728"/>
+            <a:ext cx="1005840" cy="292608"/>
           </a:xfrm>
           <a:prstGeom prst="rect">
             <a:avLst/>
@@ -10504,8 +10504,8 @@
         </p:nvSpPr>
         <p:spPr>
           <a:xfrm>
-            <a:off x="3291840" y="2432304"/>
-            <a:ext cx="1325880" cy="310896"/>
+            <a:off x="3291840" y="2395728"/>
+            <a:ext cx="1325880" cy="292608"/>
           </a:xfrm>
           <a:prstGeom prst="rect">
             <a:avLst/>
@@ -10529,8 +10529,8 @@
         </p:nvSpPr>
         <p:spPr>
           <a:xfrm>
-            <a:off x="4617720" y="2432304"/>
-            <a:ext cx="1325880" cy="310896"/>
+            <a:off x="4617720" y="2395728"/>
+            <a:ext cx="1325880" cy="292608"/>
           </a:xfrm>
           <a:prstGeom prst="rect">
             <a:avLst/>
@@ -10554,8 +10554,8 @@
         </p:nvSpPr>
         <p:spPr>
           <a:xfrm>
-            <a:off x="5943600" y="2432304"/>
-            <a:ext cx="1325880" cy="310896"/>
+            <a:off x="5943600" y="2395728"/>
+            <a:ext cx="1325880" cy="292608"/>
           </a:xfrm>
           <a:prstGeom prst="rect">
             <a:avLst/>
@@ -10579,8 +10579,8 @@
         </p:nvSpPr>
         <p:spPr>
           <a:xfrm>
-            <a:off x="7269480" y="2432304"/>
-            <a:ext cx="1325880" cy="310896"/>
+            <a:off x="7269480" y="2395728"/>
+            <a:ext cx="1325880" cy="292608"/>
           </a:xfrm>
           <a:prstGeom prst="rect">
             <a:avLst/>
@@ -10604,8 +10604,8 @@
         </p:nvSpPr>
         <p:spPr>
           <a:xfrm>
-            <a:off x="329184" y="2432304"/>
-            <a:ext cx="1920240" cy="310896"/>
+            <a:off x="329184" y="2395728"/>
+            <a:ext cx="1920240" cy="292608"/>
           </a:xfrm>
           <a:prstGeom prst="rect">
             <a:avLst/>
@@ -10643,8 +10643,8 @@
         </p:nvSpPr>
         <p:spPr>
           <a:xfrm>
-            <a:off x="2313432" y="2432304"/>
-            <a:ext cx="950976" cy="310896"/>
+            <a:off x="2313432" y="2395728"/>
+            <a:ext cx="950976" cy="292608"/>
           </a:xfrm>
           <a:prstGeom prst="rect">
             <a:avLst/>
@@ -10682,8 +10682,8 @@
         </p:nvSpPr>
         <p:spPr>
           <a:xfrm>
-            <a:off x="3319272" y="2432304"/>
-            <a:ext cx="1271016" cy="310896"/>
+            <a:off x="3319272" y="2395728"/>
+            <a:ext cx="1271016" cy="292608"/>
           </a:xfrm>
           <a:prstGeom prst="rect">
             <a:avLst/>
@@ -10721,8 +10721,8 @@
         </p:nvSpPr>
         <p:spPr>
           <a:xfrm>
-            <a:off x="4645152" y="2432304"/>
-            <a:ext cx="1271016" cy="310896"/>
+            <a:off x="4645152" y="2395728"/>
+            <a:ext cx="1271016" cy="292608"/>
           </a:xfrm>
           <a:prstGeom prst="rect">
             <a:avLst/>
@@ -10760,8 +10760,8 @@
         </p:nvSpPr>
         <p:spPr>
           <a:xfrm>
-            <a:off x="5971032" y="2432304"/>
-            <a:ext cx="1271016" cy="310896"/>
+            <a:off x="5971032" y="2395728"/>
+            <a:ext cx="1271016" cy="292608"/>
           </a:xfrm>
           <a:prstGeom prst="rect">
             <a:avLst/>
@@ -10799,8 +10799,8 @@
         </p:nvSpPr>
         <p:spPr>
           <a:xfrm>
-            <a:off x="7296912" y="2432304"/>
-            <a:ext cx="1271016" cy="310896"/>
+            <a:off x="7296912" y="2395728"/>
+            <a:ext cx="1271016" cy="292608"/>
           </a:xfrm>
           <a:prstGeom prst="rect">
             <a:avLst/>
@@ -10838,8 +10838,8 @@
         </p:nvSpPr>
         <p:spPr>
           <a:xfrm>
-            <a:off x="274320" y="2743200"/>
-            <a:ext cx="2011680" cy="310896"/>
+            <a:off x="274320" y="2688336"/>
+            <a:ext cx="2011680" cy="292608"/>
           </a:xfrm>
           <a:prstGeom prst="rect">
             <a:avLst/>
@@ -10858,8 +10858,8 @@
         </p:nvSpPr>
         <p:spPr>
           <a:xfrm>
-            <a:off x="2286000" y="2743200"/>
-            <a:ext cx="1005840" cy="310896"/>
+            <a:off x="2286000" y="2688336"/>
+            <a:ext cx="1005840" cy="292608"/>
           </a:xfrm>
           <a:prstGeom prst="rect">
             <a:avLst/>
@@ -10878,8 +10878,8 @@
         </p:nvSpPr>
         <p:spPr>
           <a:xfrm>
-            <a:off x="3291840" y="2743200"/>
-            <a:ext cx="1325880" cy="310896"/>
+            <a:off x="3291840" y="2688336"/>
+            <a:ext cx="1325880" cy="292608"/>
           </a:xfrm>
           <a:prstGeom prst="rect">
             <a:avLst/>
@@ -10903,8 +10903,8 @@
         </p:nvSpPr>
         <p:spPr>
           <a:xfrm>
-            <a:off x="4617720" y="2743200"/>
-            <a:ext cx="1325880" cy="310896"/>
+            <a:off x="4617720" y="2688336"/>
+            <a:ext cx="1325880" cy="292608"/>
           </a:xfrm>
           <a:prstGeom prst="rect">
             <a:avLst/>
@@ -10928,8 +10928,8 @@
         </p:nvSpPr>
         <p:spPr>
           <a:xfrm>
-            <a:off x="5943600" y="2743200"/>
-            <a:ext cx="1325880" cy="310896"/>
+            <a:off x="5943600" y="2688336"/>
+            <a:ext cx="1325880" cy="292608"/>
           </a:xfrm>
           <a:prstGeom prst="rect">
             <a:avLst/>
@@ -10953,8 +10953,8 @@
         </p:nvSpPr>
         <p:spPr>
           <a:xfrm>
-            <a:off x="7269480" y="2743200"/>
-            <a:ext cx="1325880" cy="310896"/>
+            <a:off x="7269480" y="2688336"/>
+            <a:ext cx="1325880" cy="292608"/>
           </a:xfrm>
           <a:prstGeom prst="rect">
             <a:avLst/>
@@ -10978,8 +10978,8 @@
         </p:nvSpPr>
         <p:spPr>
           <a:xfrm>
-            <a:off x="329184" y="2743200"/>
-            <a:ext cx="1920240" cy="310896"/>
+            <a:off x="329184" y="2688336"/>
+            <a:ext cx="1920240" cy="292608"/>
           </a:xfrm>
           <a:prstGeom prst="rect">
             <a:avLst/>
@@ -11017,8 +11017,8 @@
         </p:nvSpPr>
         <p:spPr>
           <a:xfrm>
-            <a:off x="2313432" y="2743200"/>
-            <a:ext cx="950976" cy="310896"/>
+            <a:off x="2313432" y="2688336"/>
+            <a:ext cx="950976" cy="292608"/>
           </a:xfrm>
           <a:prstGeom prst="rect">
             <a:avLst/>
@@ -11056,8 +11056,8 @@
         </p:nvSpPr>
         <p:spPr>
           <a:xfrm>
-            <a:off x="3319272" y="2743200"/>
-            <a:ext cx="1271016" cy="310896"/>
+            <a:off x="3319272" y="2688336"/>
+            <a:ext cx="1271016" cy="292608"/>
           </a:xfrm>
           <a:prstGeom prst="rect">
             <a:avLst/>
@@ -11095,8 +11095,8 @@
         </p:nvSpPr>
         <p:spPr>
           <a:xfrm>
-            <a:off x="4645152" y="2743200"/>
-            <a:ext cx="1271016" cy="310896"/>
+            <a:off x="4645152" y="2688336"/>
+            <a:ext cx="1271016" cy="292608"/>
           </a:xfrm>
           <a:prstGeom prst="rect">
             <a:avLst/>
@@ -11134,8 +11134,8 @@
         </p:nvSpPr>
         <p:spPr>
           <a:xfrm>
-            <a:off x="5971032" y="2743200"/>
-            <a:ext cx="1271016" cy="310896"/>
+            <a:off x="5971032" y="2688336"/>
+            <a:ext cx="1271016" cy="292608"/>
           </a:xfrm>
           <a:prstGeom prst="rect">
             <a:avLst/>
@@ -11173,8 +11173,8 @@
         </p:nvSpPr>
         <p:spPr>
           <a:xfrm>
-            <a:off x="7296912" y="2743200"/>
-            <a:ext cx="1271016" cy="310896"/>
+            <a:off x="7296912" y="2688336"/>
+            <a:ext cx="1271016" cy="292608"/>
           </a:xfrm>
           <a:prstGeom prst="rect">
             <a:avLst/>
@@ -11212,8 +11212,8 @@
         </p:nvSpPr>
         <p:spPr>
           <a:xfrm>
-            <a:off x="274320" y="3054096"/>
-            <a:ext cx="2011680" cy="310896"/>
+            <a:off x="274320" y="2980944"/>
+            <a:ext cx="2011680" cy="292608"/>
           </a:xfrm>
           <a:prstGeom prst="rect">
             <a:avLst/>
@@ -11232,8 +11232,8 @@
         </p:nvSpPr>
         <p:spPr>
           <a:xfrm>
-            <a:off x="2286000" y="3054096"/>
-            <a:ext cx="1005840" cy="310896"/>
+            <a:off x="2286000" y="2980944"/>
+            <a:ext cx="1005840" cy="292608"/>
           </a:xfrm>
           <a:prstGeom prst="rect">
             <a:avLst/>
@@ -11252,8 +11252,8 @@
         </p:nvSpPr>
         <p:spPr>
           <a:xfrm>
-            <a:off x="3291840" y="3054096"/>
-            <a:ext cx="1325880" cy="310896"/>
+            <a:off x="3291840" y="2980944"/>
+            <a:ext cx="1325880" cy="292608"/>
           </a:xfrm>
           <a:prstGeom prst="rect">
             <a:avLst/>
@@ -11277,8 +11277,8 @@
         </p:nvSpPr>
         <p:spPr>
           <a:xfrm>
-            <a:off x="4617720" y="3054096"/>
-            <a:ext cx="1325880" cy="310896"/>
+            <a:off x="4617720" y="2980944"/>
+            <a:ext cx="1325880" cy="292608"/>
           </a:xfrm>
           <a:prstGeom prst="rect">
             <a:avLst/>
@@ -11302,8 +11302,8 @@
         </p:nvSpPr>
         <p:spPr>
           <a:xfrm>
-            <a:off x="5943600" y="3054096"/>
-            <a:ext cx="1325880" cy="310896"/>
+            <a:off x="5943600" y="2980944"/>
+            <a:ext cx="1325880" cy="292608"/>
           </a:xfrm>
           <a:prstGeom prst="rect">
             <a:avLst/>
@@ -11327,8 +11327,8 @@
         </p:nvSpPr>
         <p:spPr>
           <a:xfrm>
-            <a:off x="7269480" y="3054096"/>
-            <a:ext cx="1325880" cy="310896"/>
+            <a:off x="7269480" y="2980944"/>
+            <a:ext cx="1325880" cy="292608"/>
           </a:xfrm>
           <a:prstGeom prst="rect">
             <a:avLst/>
@@ -11352,8 +11352,8 @@
         </p:nvSpPr>
         <p:spPr>
           <a:xfrm>
-            <a:off x="329184" y="3054096"/>
-            <a:ext cx="1920240" cy="310896"/>
+            <a:off x="329184" y="2980944"/>
+            <a:ext cx="1920240" cy="292608"/>
           </a:xfrm>
           <a:prstGeom prst="rect">
             <a:avLst/>
@@ -11377,7 +11377,7 @@
                 <a:ea typeface="Arial" pitchFamily="34" charset="-122"/>
                 <a:cs typeface="Arial" pitchFamily="34" charset="-120"/>
               </a:rPr>
-              <a:t>Supabase Auth（会員認証）</a:t>
+              <a:t>Supabase Auth+DB（認証+進捗保存）</a:t>
             </a:r>
             <a:endParaRPr lang="en-US" sz="950" dirty="0"/>
           </a:p>
@@ -11391,8 +11391,8 @@
         </p:nvSpPr>
         <p:spPr>
           <a:xfrm>
-            <a:off x="2313432" y="3054096"/>
-            <a:ext cx="950976" cy="310896"/>
+            <a:off x="2313432" y="2980944"/>
+            <a:ext cx="950976" cy="292608"/>
           </a:xfrm>
           <a:prstGeom prst="rect">
             <a:avLst/>
@@ -11430,8 +11430,8 @@
         </p:nvSpPr>
         <p:spPr>
           <a:xfrm>
-            <a:off x="3319272" y="3054096"/>
-            <a:ext cx="1271016" cy="310896"/>
+            <a:off x="3319272" y="2980944"/>
+            <a:ext cx="1271016" cy="292608"/>
           </a:xfrm>
           <a:prstGeom prst="rect">
             <a:avLst/>
@@ -11469,8 +11469,8 @@
         </p:nvSpPr>
         <p:spPr>
           <a:xfrm>
-            <a:off x="4645152" y="3054096"/>
-            <a:ext cx="1271016" cy="310896"/>
+            <a:off x="4645152" y="2980944"/>
+            <a:ext cx="1271016" cy="292608"/>
           </a:xfrm>
           <a:prstGeom prst="rect">
             <a:avLst/>
@@ -11508,8 +11508,8 @@
         </p:nvSpPr>
         <p:spPr>
           <a:xfrm>
-            <a:off x="5971032" y="3054096"/>
-            <a:ext cx="1271016" cy="310896"/>
+            <a:off x="5971032" y="2980944"/>
+            <a:ext cx="1271016" cy="292608"/>
           </a:xfrm>
           <a:prstGeom prst="rect">
             <a:avLst/>
@@ -11547,8 +11547,8 @@
         </p:nvSpPr>
         <p:spPr>
           <a:xfrm>
-            <a:off x="7296912" y="3054096"/>
-            <a:ext cx="1271016" cy="310896"/>
+            <a:off x="7296912" y="2980944"/>
+            <a:ext cx="1271016" cy="292608"/>
           </a:xfrm>
           <a:prstGeom prst="rect">
             <a:avLst/>
@@ -11586,8 +11586,8 @@
         </p:nvSpPr>
         <p:spPr>
           <a:xfrm>
-            <a:off x="274320" y="3364992"/>
-            <a:ext cx="2011680" cy="310896"/>
+            <a:off x="274320" y="3273552"/>
+            <a:ext cx="2011680" cy="292608"/>
           </a:xfrm>
           <a:prstGeom prst="rect">
             <a:avLst/>
@@ -11606,8 +11606,8 @@
         </p:nvSpPr>
         <p:spPr>
           <a:xfrm>
-            <a:off x="2286000" y="3364992"/>
-            <a:ext cx="1005840" cy="310896"/>
+            <a:off x="2286000" y="3273552"/>
+            <a:ext cx="1005840" cy="292608"/>
           </a:xfrm>
           <a:prstGeom prst="rect">
             <a:avLst/>
@@ -11626,8 +11626,8 @@
         </p:nvSpPr>
         <p:spPr>
           <a:xfrm>
-            <a:off x="3291840" y="3364992"/>
-            <a:ext cx="1325880" cy="310896"/>
+            <a:off x="3291840" y="3273552"/>
+            <a:ext cx="1325880" cy="292608"/>
           </a:xfrm>
           <a:prstGeom prst="rect">
             <a:avLst/>
@@ -11651,8 +11651,8 @@
         </p:nvSpPr>
         <p:spPr>
           <a:xfrm>
-            <a:off x="4617720" y="3364992"/>
-            <a:ext cx="1325880" cy="310896"/>
+            <a:off x="4617720" y="3273552"/>
+            <a:ext cx="1325880" cy="292608"/>
           </a:xfrm>
           <a:prstGeom prst="rect">
             <a:avLst/>
@@ -11676,8 +11676,8 @@
         </p:nvSpPr>
         <p:spPr>
           <a:xfrm>
-            <a:off x="5943600" y="3364992"/>
-            <a:ext cx="1325880" cy="310896"/>
+            <a:off x="5943600" y="3273552"/>
+            <a:ext cx="1325880" cy="292608"/>
           </a:xfrm>
           <a:prstGeom prst="rect">
             <a:avLst/>
@@ -11701,8 +11701,8 @@
         </p:nvSpPr>
         <p:spPr>
           <a:xfrm>
-            <a:off x="7269480" y="3364992"/>
-            <a:ext cx="1325880" cy="310896"/>
+            <a:off x="7269480" y="3273552"/>
+            <a:ext cx="1325880" cy="292608"/>
           </a:xfrm>
           <a:prstGeom prst="rect">
             <a:avLst/>
@@ -11726,8 +11726,8 @@
         </p:nvSpPr>
         <p:spPr>
           <a:xfrm>
-            <a:off x="329184" y="3364992"/>
-            <a:ext cx="1920240" cy="310896"/>
+            <a:off x="329184" y="3273552"/>
+            <a:ext cx="1920240" cy="292608"/>
           </a:xfrm>
           <a:prstGeom prst="rect">
             <a:avLst/>
@@ -11765,8 +11765,8 @@
         </p:nvSpPr>
         <p:spPr>
           <a:xfrm>
-            <a:off x="2313432" y="3364992"/>
-            <a:ext cx="950976" cy="310896"/>
+            <a:off x="2313432" y="3273552"/>
+            <a:ext cx="950976" cy="292608"/>
           </a:xfrm>
           <a:prstGeom prst="rect">
             <a:avLst/>
@@ -11804,8 +11804,8 @@
         </p:nvSpPr>
         <p:spPr>
           <a:xfrm>
-            <a:off x="3319272" y="3364992"/>
-            <a:ext cx="1271016" cy="310896"/>
+            <a:off x="3319272" y="3273552"/>
+            <a:ext cx="1271016" cy="292608"/>
           </a:xfrm>
           <a:prstGeom prst="rect">
             <a:avLst/>
@@ -11843,8 +11843,8 @@
         </p:nvSpPr>
         <p:spPr>
           <a:xfrm>
-            <a:off x="4645152" y="3364992"/>
-            <a:ext cx="1271016" cy="310896"/>
+            <a:off x="4645152" y="3273552"/>
+            <a:ext cx="1271016" cy="292608"/>
           </a:xfrm>
           <a:prstGeom prst="rect">
             <a:avLst/>
@@ -11882,8 +11882,8 @@
         </p:nvSpPr>
         <p:spPr>
           <a:xfrm>
-            <a:off x="5971032" y="3364992"/>
-            <a:ext cx="1271016" cy="310896"/>
+            <a:off x="5971032" y="3273552"/>
+            <a:ext cx="1271016" cy="292608"/>
           </a:xfrm>
           <a:prstGeom prst="rect">
             <a:avLst/>
@@ -11921,8 +11921,8 @@
         </p:nvSpPr>
         <p:spPr>
           <a:xfrm>
-            <a:off x="7296912" y="3364992"/>
-            <a:ext cx="1271016" cy="310896"/>
+            <a:off x="7296912" y="3273552"/>
+            <a:ext cx="1271016" cy="292608"/>
           </a:xfrm>
           <a:prstGeom prst="rect">
             <a:avLst/>
@@ -11960,8 +11960,8 @@
         </p:nvSpPr>
         <p:spPr>
           <a:xfrm>
-            <a:off x="274320" y="3675888"/>
-            <a:ext cx="2011680" cy="310896"/>
+            <a:off x="274320" y="3566160"/>
+            <a:ext cx="2011680" cy="292608"/>
           </a:xfrm>
           <a:prstGeom prst="rect">
             <a:avLst/>
@@ -11980,8 +11980,8 @@
         </p:nvSpPr>
         <p:spPr>
           <a:xfrm>
-            <a:off x="2286000" y="3675888"/>
-            <a:ext cx="1005840" cy="310896"/>
+            <a:off x="2286000" y="3566160"/>
+            <a:ext cx="1005840" cy="292608"/>
           </a:xfrm>
           <a:prstGeom prst="rect">
             <a:avLst/>
@@ -12000,8 +12000,8 @@
         </p:nvSpPr>
         <p:spPr>
           <a:xfrm>
-            <a:off x="3291840" y="3675888"/>
-            <a:ext cx="1325880" cy="310896"/>
+            <a:off x="3291840" y="3566160"/>
+            <a:ext cx="1325880" cy="292608"/>
           </a:xfrm>
           <a:prstGeom prst="rect">
             <a:avLst/>
@@ -12025,8 +12025,8 @@
         </p:nvSpPr>
         <p:spPr>
           <a:xfrm>
-            <a:off x="4617720" y="3675888"/>
-            <a:ext cx="1325880" cy="310896"/>
+            <a:off x="4617720" y="3566160"/>
+            <a:ext cx="1325880" cy="292608"/>
           </a:xfrm>
           <a:prstGeom prst="rect">
             <a:avLst/>
@@ -12050,8 +12050,8 @@
         </p:nvSpPr>
         <p:spPr>
           <a:xfrm>
-            <a:off x="5943600" y="3675888"/>
-            <a:ext cx="1325880" cy="310896"/>
+            <a:off x="5943600" y="3566160"/>
+            <a:ext cx="1325880" cy="292608"/>
           </a:xfrm>
           <a:prstGeom prst="rect">
             <a:avLst/>
@@ -12075,8 +12075,8 @@
         </p:nvSpPr>
         <p:spPr>
           <a:xfrm>
-            <a:off x="7269480" y="3675888"/>
-            <a:ext cx="1325880" cy="310896"/>
+            <a:off x="7269480" y="3566160"/>
+            <a:ext cx="1325880" cy="292608"/>
           </a:xfrm>
           <a:prstGeom prst="rect">
             <a:avLst/>
@@ -12100,8 +12100,8 @@
         </p:nvSpPr>
         <p:spPr>
           <a:xfrm>
-            <a:off x="329184" y="3675888"/>
-            <a:ext cx="1920240" cy="310896"/>
+            <a:off x="329184" y="3566160"/>
+            <a:ext cx="1920240" cy="292608"/>
           </a:xfrm>
           <a:prstGeom prst="rect">
             <a:avLst/>
@@ -12125,6 +12125,380 @@
                 <a:ea typeface="Arial" pitchFamily="34" charset="-122"/>
                 <a:cs typeface="Arial" pitchFamily="34" charset="-120"/>
               </a:rPr>
+              <a:t>マルチデバイス対応（進捗同期）</a:t>
+            </a:r>
+            <a:endParaRPr lang="en-US" sz="950" dirty="0"/>
+          </a:p>
+        </p:txBody>
+      </p:sp>
+      <p:sp>
+        <p:nvSpPr>
+          <p:cNvPr id="120" name="Text 118"/>
+          <p:cNvSpPr/>
+          <p:nvPr/>
+        </p:nvSpPr>
+        <p:spPr>
+          <a:xfrm>
+            <a:off x="2313432" y="3566160"/>
+            <a:ext cx="950976" cy="292608"/>
+          </a:xfrm>
+          <a:prstGeom prst="rect">
+            <a:avLst/>
+          </a:prstGeom>
+          <a:noFill/>
+          <a:ln/>
+        </p:spPr>
+        <p:txBody>
+          <a:bodyPr wrap="square" lIns="0" tIns="0" rIns="0" bIns="0" rtlCol="0" anchor="ctr"/>
+          <a:lstStyle/>
+          <a:p>
+            <a:pPr algn="ctr" indent="0" marL="0">
+              <a:buNone/>
+            </a:pPr>
+            <a:r>
+              <a:rPr lang="en-US" sz="870" b="1" dirty="0">
+                <a:solidFill>
+                  <a:srgbClr val="8888AA"/>
+                </a:solidFill>
+                <a:latin typeface="Arial" pitchFamily="34" charset="0"/>
+                <a:ea typeface="Arial" pitchFamily="34" charset="-122"/>
+                <a:cs typeface="Arial" pitchFamily="34" charset="-120"/>
+              </a:rPr>
+              <a:t>—</a:t>
+            </a:r>
+            <a:endParaRPr lang="en-US" sz="870" dirty="0"/>
+          </a:p>
+        </p:txBody>
+      </p:sp>
+      <p:sp>
+        <p:nvSpPr>
+          <p:cNvPr id="121" name="Text 119"/>
+          <p:cNvSpPr/>
+          <p:nvPr/>
+        </p:nvSpPr>
+        <p:spPr>
+          <a:xfrm>
+            <a:off x="3319272" y="3566160"/>
+            <a:ext cx="1271016" cy="292608"/>
+          </a:xfrm>
+          <a:prstGeom prst="rect">
+            <a:avLst/>
+          </a:prstGeom>
+          <a:noFill/>
+          <a:ln/>
+        </p:spPr>
+        <p:txBody>
+          <a:bodyPr wrap="square" lIns="0" tIns="0" rIns="0" bIns="0" rtlCol="0" anchor="ctr"/>
+          <a:lstStyle/>
+          <a:p>
+            <a:pPr algn="ctr" indent="0" marL="0">
+              <a:buNone/>
+            </a:pPr>
+            <a:r>
+              <a:rPr lang="en-US" sz="1300" dirty="0">
+                <a:solidFill>
+                  <a:srgbClr val="333355"/>
+                </a:solidFill>
+                <a:latin typeface="Arial" pitchFamily="34" charset="0"/>
+                <a:ea typeface="Arial" pitchFamily="34" charset="-122"/>
+                <a:cs typeface="Arial" pitchFamily="34" charset="-120"/>
+              </a:rPr>
+              <a:t>—</a:t>
+            </a:r>
+            <a:endParaRPr lang="en-US" sz="1300" dirty="0"/>
+          </a:p>
+        </p:txBody>
+      </p:sp>
+      <p:sp>
+        <p:nvSpPr>
+          <p:cNvPr id="122" name="Text 120"/>
+          <p:cNvSpPr/>
+          <p:nvPr/>
+        </p:nvSpPr>
+        <p:spPr>
+          <a:xfrm>
+            <a:off x="4645152" y="3566160"/>
+            <a:ext cx="1271016" cy="292608"/>
+          </a:xfrm>
+          <a:prstGeom prst="rect">
+            <a:avLst/>
+          </a:prstGeom>
+          <a:noFill/>
+          <a:ln/>
+        </p:spPr>
+        <p:txBody>
+          <a:bodyPr wrap="square" lIns="0" tIns="0" rIns="0" bIns="0" rtlCol="0" anchor="ctr"/>
+          <a:lstStyle/>
+          <a:p>
+            <a:pPr algn="ctr" indent="0" marL="0">
+              <a:buNone/>
+            </a:pPr>
+            <a:r>
+              <a:rPr lang="en-US" sz="1300" dirty="0">
+                <a:solidFill>
+                  <a:srgbClr val="333355"/>
+                </a:solidFill>
+                <a:latin typeface="Arial" pitchFamily="34" charset="0"/>
+                <a:ea typeface="Arial" pitchFamily="34" charset="-122"/>
+                <a:cs typeface="Arial" pitchFamily="34" charset="-120"/>
+              </a:rPr>
+              <a:t>—</a:t>
+            </a:r>
+            <a:endParaRPr lang="en-US" sz="1300" dirty="0"/>
+          </a:p>
+        </p:txBody>
+      </p:sp>
+      <p:sp>
+        <p:nvSpPr>
+          <p:cNvPr id="123" name="Text 121"/>
+          <p:cNvSpPr/>
+          <p:nvPr/>
+        </p:nvSpPr>
+        <p:spPr>
+          <a:xfrm>
+            <a:off x="5971032" y="3566160"/>
+            <a:ext cx="1271016" cy="292608"/>
+          </a:xfrm>
+          <a:prstGeom prst="rect">
+            <a:avLst/>
+          </a:prstGeom>
+          <a:noFill/>
+          <a:ln/>
+        </p:spPr>
+        <p:txBody>
+          <a:bodyPr wrap="square" lIns="0" tIns="0" rIns="0" bIns="0" rtlCol="0" anchor="ctr"/>
+          <a:lstStyle/>
+          <a:p>
+            <a:pPr algn="ctr" indent="0" marL="0">
+              <a:buNone/>
+            </a:pPr>
+            <a:r>
+              <a:rPr lang="en-US" sz="1300" b="1" dirty="0">
+                <a:solidFill>
+                  <a:srgbClr val="F5A623"/>
+                </a:solidFill>
+                <a:latin typeface="Arial" pitchFamily="34" charset="0"/>
+                <a:ea typeface="Arial" pitchFamily="34" charset="-122"/>
+                <a:cs typeface="Arial" pitchFamily="34" charset="-120"/>
+              </a:rPr>
+              <a:t>○</a:t>
+            </a:r>
+            <a:endParaRPr lang="en-US" sz="1300" dirty="0"/>
+          </a:p>
+        </p:txBody>
+      </p:sp>
+      <p:sp>
+        <p:nvSpPr>
+          <p:cNvPr id="124" name="Text 122"/>
+          <p:cNvSpPr/>
+          <p:nvPr/>
+        </p:nvSpPr>
+        <p:spPr>
+          <a:xfrm>
+            <a:off x="7296912" y="3566160"/>
+            <a:ext cx="1271016" cy="292608"/>
+          </a:xfrm>
+          <a:prstGeom prst="rect">
+            <a:avLst/>
+          </a:prstGeom>
+          <a:noFill/>
+          <a:ln/>
+        </p:spPr>
+        <p:txBody>
+          <a:bodyPr wrap="square" lIns="0" tIns="0" rIns="0" bIns="0" rtlCol="0" anchor="ctr"/>
+          <a:lstStyle/>
+          <a:p>
+            <a:pPr algn="ctr" indent="0" marL="0">
+              <a:buNone/>
+            </a:pPr>
+            <a:r>
+              <a:rPr lang="en-US" sz="1300" b="1" dirty="0">
+                <a:solidFill>
+                  <a:srgbClr val="E94560"/>
+                </a:solidFill>
+                <a:latin typeface="Arial" pitchFamily="34" charset="0"/>
+                <a:ea typeface="Arial" pitchFamily="34" charset="-122"/>
+                <a:cs typeface="Arial" pitchFamily="34" charset="-120"/>
+              </a:rPr>
+              <a:t>○</a:t>
+            </a:r>
+            <a:endParaRPr lang="en-US" sz="1300" dirty="0"/>
+          </a:p>
+        </p:txBody>
+      </p:sp>
+      <p:sp>
+        <p:nvSpPr>
+          <p:cNvPr id="125" name="Shape 123"/>
+          <p:cNvSpPr/>
+          <p:nvPr/>
+        </p:nvSpPr>
+        <p:spPr>
+          <a:xfrm>
+            <a:off x="274320" y="3858768"/>
+            <a:ext cx="2011680" cy="292608"/>
+          </a:xfrm>
+          <a:prstGeom prst="rect">
+            <a:avLst/>
+          </a:prstGeom>
+          <a:solidFill>
+            <a:srgbClr val="121225"/>
+          </a:solidFill>
+          <a:ln/>
+        </p:spPr>
+      </p:sp>
+      <p:sp>
+        <p:nvSpPr>
+          <p:cNvPr id="126" name="Shape 124"/>
+          <p:cNvSpPr/>
+          <p:nvPr/>
+        </p:nvSpPr>
+        <p:spPr>
+          <a:xfrm>
+            <a:off x="2286000" y="3858768"/>
+            <a:ext cx="1005840" cy="292608"/>
+          </a:xfrm>
+          <a:prstGeom prst="rect">
+            <a:avLst/>
+          </a:prstGeom>
+          <a:solidFill>
+            <a:srgbClr val="121225"/>
+          </a:solidFill>
+          <a:ln/>
+        </p:spPr>
+      </p:sp>
+      <p:sp>
+        <p:nvSpPr>
+          <p:cNvPr id="127" name="Shape 125"/>
+          <p:cNvSpPr/>
+          <p:nvPr/>
+        </p:nvSpPr>
+        <p:spPr>
+          <a:xfrm>
+            <a:off x="3291840" y="3858768"/>
+            <a:ext cx="1325880" cy="292608"/>
+          </a:xfrm>
+          <a:prstGeom prst="rect">
+            <a:avLst/>
+          </a:prstGeom>
+          <a:solidFill>
+            <a:srgbClr val="121225"/>
+          </a:solidFill>
+          <a:ln w="12700">
+            <a:solidFill>
+              <a:srgbClr val="1A2535"/>
+            </a:solidFill>
+            <a:prstDash val="solid"/>
+          </a:ln>
+        </p:spPr>
+      </p:sp>
+      <p:sp>
+        <p:nvSpPr>
+          <p:cNvPr id="128" name="Shape 126"/>
+          <p:cNvSpPr/>
+          <p:nvPr/>
+        </p:nvSpPr>
+        <p:spPr>
+          <a:xfrm>
+            <a:off x="4617720" y="3858768"/>
+            <a:ext cx="1325880" cy="292608"/>
+          </a:xfrm>
+          <a:prstGeom prst="rect">
+            <a:avLst/>
+          </a:prstGeom>
+          <a:solidFill>
+            <a:srgbClr val="121225"/>
+          </a:solidFill>
+          <a:ln w="12700">
+            <a:solidFill>
+              <a:srgbClr val="1A2520"/>
+            </a:solidFill>
+            <a:prstDash val="solid"/>
+          </a:ln>
+        </p:spPr>
+      </p:sp>
+      <p:sp>
+        <p:nvSpPr>
+          <p:cNvPr id="129" name="Shape 127"/>
+          <p:cNvSpPr/>
+          <p:nvPr/>
+        </p:nvSpPr>
+        <p:spPr>
+          <a:xfrm>
+            <a:off x="5943600" y="3858768"/>
+            <a:ext cx="1325880" cy="292608"/>
+          </a:xfrm>
+          <a:prstGeom prst="rect">
+            <a:avLst/>
+          </a:prstGeom>
+          <a:solidFill>
+            <a:srgbClr val="121225"/>
+          </a:solidFill>
+          <a:ln w="12700">
+            <a:solidFill>
+              <a:srgbClr val="251A1A"/>
+            </a:solidFill>
+            <a:prstDash val="solid"/>
+          </a:ln>
+        </p:spPr>
+      </p:sp>
+      <p:sp>
+        <p:nvSpPr>
+          <p:cNvPr id="130" name="Shape 128"/>
+          <p:cNvSpPr/>
+          <p:nvPr/>
+        </p:nvSpPr>
+        <p:spPr>
+          <a:xfrm>
+            <a:off x="7269480" y="3858768"/>
+            <a:ext cx="1325880" cy="292608"/>
+          </a:xfrm>
+          <a:prstGeom prst="rect">
+            <a:avLst/>
+          </a:prstGeom>
+          <a:solidFill>
+            <a:srgbClr val="121225"/>
+          </a:solidFill>
+          <a:ln w="12700">
+            <a:solidFill>
+              <a:srgbClr val="251A25"/>
+            </a:solidFill>
+            <a:prstDash val="solid"/>
+          </a:ln>
+        </p:spPr>
+      </p:sp>
+      <p:sp>
+        <p:nvSpPr>
+          <p:cNvPr id="131" name="Text 129"/>
+          <p:cNvSpPr/>
+          <p:nvPr/>
+        </p:nvSpPr>
+        <p:spPr>
+          <a:xfrm>
+            <a:off x="329184" y="3858768"/>
+            <a:ext cx="1920240" cy="292608"/>
+          </a:xfrm>
+          <a:prstGeom prst="rect">
+            <a:avLst/>
+          </a:prstGeom>
+          <a:noFill/>
+          <a:ln/>
+        </p:spPr>
+        <p:txBody>
+          <a:bodyPr wrap="square" lIns="0" tIns="0" rIns="0" bIns="0" rtlCol="0" anchor="ctr"/>
+          <a:lstStyle/>
+          <a:p>
+            <a:pPr indent="0" marL="0">
+              <a:buNone/>
+            </a:pPr>
+            <a:r>
+              <a:rPr lang="en-US" sz="950" dirty="0">
+                <a:solidFill>
+                  <a:srgbClr val="E0E0E0"/>
+                </a:solidFill>
+                <a:latin typeface="Arial" pitchFamily="34" charset="0"/>
+                <a:ea typeface="Arial" pitchFamily="34" charset="-122"/>
+                <a:cs typeface="Arial" pitchFamily="34" charset="-120"/>
+              </a:rPr>
               <a:t>開発費（Claude Code）</a:t>
             </a:r>
             <a:endParaRPr lang="en-US" sz="950" dirty="0"/>
@@ -12133,14 +12507,14 @@
       </p:sp>
       <p:sp>
         <p:nvSpPr>
-          <p:cNvPr id="120" name="Text 118"/>
-          <p:cNvSpPr/>
-          <p:nvPr/>
-        </p:nvSpPr>
-        <p:spPr>
-          <a:xfrm>
-            <a:off x="2313432" y="3675888"/>
-            <a:ext cx="950976" cy="310896"/>
+          <p:cNvPr id="132" name="Text 130"/>
+          <p:cNvSpPr/>
+          <p:nvPr/>
+        </p:nvSpPr>
+        <p:spPr>
+          <a:xfrm>
+            <a:off x="2313432" y="3858768"/>
+            <a:ext cx="950976" cy="292608"/>
           </a:xfrm>
           <a:prstGeom prst="rect">
             <a:avLst/>
@@ -12172,14 +12546,14 @@
       </p:sp>
       <p:sp>
         <p:nvSpPr>
-          <p:cNvPr id="121" name="Text 119"/>
-          <p:cNvSpPr/>
-          <p:nvPr/>
-        </p:nvSpPr>
-        <p:spPr>
-          <a:xfrm>
-            <a:off x="3319272" y="3675888"/>
-            <a:ext cx="1271016" cy="310896"/>
+          <p:cNvPr id="133" name="Text 131"/>
+          <p:cNvSpPr/>
+          <p:nvPr/>
+        </p:nvSpPr>
+        <p:spPr>
+          <a:xfrm>
+            <a:off x="3319272" y="3858768"/>
+            <a:ext cx="1271016" cy="292608"/>
           </a:xfrm>
           <a:prstGeom prst="rect">
             <a:avLst/>
@@ -12211,14 +12585,14 @@
       </p:sp>
       <p:sp>
         <p:nvSpPr>
-          <p:cNvPr id="122" name="Text 120"/>
-          <p:cNvSpPr/>
-          <p:nvPr/>
-        </p:nvSpPr>
-        <p:spPr>
-          <a:xfrm>
-            <a:off x="4645152" y="3675888"/>
-            <a:ext cx="1271016" cy="310896"/>
+          <p:cNvPr id="134" name="Text 132"/>
+          <p:cNvSpPr/>
+          <p:nvPr/>
+        </p:nvSpPr>
+        <p:spPr>
+          <a:xfrm>
+            <a:off x="4645152" y="3858768"/>
+            <a:ext cx="1271016" cy="292608"/>
           </a:xfrm>
           <a:prstGeom prst="rect">
             <a:avLst/>
@@ -12250,14 +12624,14 @@
       </p:sp>
       <p:sp>
         <p:nvSpPr>
-          <p:cNvPr id="123" name="Text 121"/>
-          <p:cNvSpPr/>
-          <p:nvPr/>
-        </p:nvSpPr>
-        <p:spPr>
-          <a:xfrm>
-            <a:off x="5971032" y="3675888"/>
-            <a:ext cx="1271016" cy="310896"/>
+          <p:cNvPr id="135" name="Text 133"/>
+          <p:cNvSpPr/>
+          <p:nvPr/>
+        </p:nvSpPr>
+        <p:spPr>
+          <a:xfrm>
+            <a:off x="5971032" y="3858768"/>
+            <a:ext cx="1271016" cy="292608"/>
           </a:xfrm>
           <a:prstGeom prst="rect">
             <a:avLst/>
@@ -12289,14 +12663,14 @@
       </p:sp>
       <p:sp>
         <p:nvSpPr>
-          <p:cNvPr id="124" name="Text 122"/>
-          <p:cNvSpPr/>
-          <p:nvPr/>
-        </p:nvSpPr>
-        <p:spPr>
-          <a:xfrm>
-            <a:off x="7296912" y="3675888"/>
-            <a:ext cx="1271016" cy="310896"/>
+          <p:cNvPr id="136" name="Text 134"/>
+          <p:cNvSpPr/>
+          <p:nvPr/>
+        </p:nvSpPr>
+        <p:spPr>
+          <a:xfrm>
+            <a:off x="7296912" y="3858768"/>
+            <a:ext cx="1271016" cy="292608"/>
           </a:xfrm>
           <a:prstGeom prst="rect">
             <a:avLst/>
@@ -12328,13 +12702,13 @@
       </p:sp>
       <p:sp>
         <p:nvSpPr>
-          <p:cNvPr id="125" name="Shape 123"/>
-          <p:cNvSpPr/>
-          <p:nvPr/>
-        </p:nvSpPr>
-        <p:spPr>
-          <a:xfrm>
-            <a:off x="274320" y="4032504"/>
+          <p:cNvPr id="137" name="Shape 135"/>
+          <p:cNvSpPr/>
+          <p:nvPr/>
+        </p:nvSpPr>
+        <p:spPr>
+          <a:xfrm>
+            <a:off x="274320" y="4197096"/>
             <a:ext cx="3017520" cy="365760"/>
           </a:xfrm>
           <a:prstGeom prst="rect">
@@ -12348,13 +12722,13 @@
       </p:sp>
       <p:sp>
         <p:nvSpPr>
-          <p:cNvPr id="126" name="Text 124"/>
-          <p:cNvSpPr/>
-          <p:nvPr/>
-        </p:nvSpPr>
-        <p:spPr>
-          <a:xfrm>
-            <a:off x="329184" y="4032504"/>
+          <p:cNvPr id="138" name="Text 136"/>
+          <p:cNvSpPr/>
+          <p:nvPr/>
+        </p:nvSpPr>
+        <p:spPr>
+          <a:xfrm>
+            <a:off x="329184" y="4197096"/>
             <a:ext cx="1920240" cy="365760"/>
           </a:xfrm>
           <a:prstGeom prst="rect">
@@ -12387,13 +12761,13 @@
       </p:sp>
       <p:sp>
         <p:nvSpPr>
-          <p:cNvPr id="127" name="Shape 125"/>
-          <p:cNvSpPr/>
-          <p:nvPr/>
-        </p:nvSpPr>
-        <p:spPr>
-          <a:xfrm>
-            <a:off x="3291840" y="4032504"/>
+          <p:cNvPr id="139" name="Shape 137"/>
+          <p:cNvSpPr/>
+          <p:nvPr/>
+        </p:nvSpPr>
+        <p:spPr>
+          <a:xfrm>
+            <a:off x="3291840" y="4197096"/>
             <a:ext cx="1325880" cy="365760"/>
           </a:xfrm>
           <a:prstGeom prst="rect">
@@ -12407,13 +12781,13 @@
       </p:sp>
       <p:sp>
         <p:nvSpPr>
-          <p:cNvPr id="128" name="Text 126"/>
-          <p:cNvSpPr/>
-          <p:nvPr/>
-        </p:nvSpPr>
-        <p:spPr>
-          <a:xfrm>
-            <a:off x="3319272" y="4032504"/>
+          <p:cNvPr id="140" name="Text 138"/>
+          <p:cNvSpPr/>
+          <p:nvPr/>
+        </p:nvSpPr>
+        <p:spPr>
+          <a:xfrm>
+            <a:off x="3319272" y="4197096"/>
             <a:ext cx="1271016" cy="365760"/>
           </a:xfrm>
           <a:prstGeom prst="rect">
@@ -12446,13 +12820,13 @@
       </p:sp>
       <p:sp>
         <p:nvSpPr>
-          <p:cNvPr id="129" name="Shape 127"/>
-          <p:cNvSpPr/>
-          <p:nvPr/>
-        </p:nvSpPr>
-        <p:spPr>
-          <a:xfrm>
-            <a:off x="4617720" y="4032504"/>
+          <p:cNvPr id="141" name="Shape 139"/>
+          <p:cNvSpPr/>
+          <p:nvPr/>
+        </p:nvSpPr>
+        <p:spPr>
+          <a:xfrm>
+            <a:off x="4617720" y="4197096"/>
             <a:ext cx="1325880" cy="365760"/>
           </a:xfrm>
           <a:prstGeom prst="rect">
@@ -12466,13 +12840,13 @@
       </p:sp>
       <p:sp>
         <p:nvSpPr>
-          <p:cNvPr id="130" name="Text 128"/>
-          <p:cNvSpPr/>
-          <p:nvPr/>
-        </p:nvSpPr>
-        <p:spPr>
-          <a:xfrm>
-            <a:off x="4645152" y="4032504"/>
+          <p:cNvPr id="142" name="Text 140"/>
+          <p:cNvSpPr/>
+          <p:nvPr/>
+        </p:nvSpPr>
+        <p:spPr>
+          <a:xfrm>
+            <a:off x="4645152" y="4197096"/>
             <a:ext cx="1271016" cy="365760"/>
           </a:xfrm>
           <a:prstGeom prst="rect">
@@ -12505,13 +12879,13 @@
       </p:sp>
       <p:sp>
         <p:nvSpPr>
-          <p:cNvPr id="131" name="Shape 129"/>
-          <p:cNvSpPr/>
-          <p:nvPr/>
-        </p:nvSpPr>
-        <p:spPr>
-          <a:xfrm>
-            <a:off x="5943600" y="4032504"/>
+          <p:cNvPr id="143" name="Shape 141"/>
+          <p:cNvSpPr/>
+          <p:nvPr/>
+        </p:nvSpPr>
+        <p:spPr>
+          <a:xfrm>
+            <a:off x="5943600" y="4197096"/>
             <a:ext cx="1325880" cy="365760"/>
           </a:xfrm>
           <a:prstGeom prst="rect">
@@ -12525,13 +12899,13 @@
       </p:sp>
       <p:sp>
         <p:nvSpPr>
-          <p:cNvPr id="132" name="Text 130"/>
-          <p:cNvSpPr/>
-          <p:nvPr/>
-        </p:nvSpPr>
-        <p:spPr>
-          <a:xfrm>
-            <a:off x="5971032" y="4032504"/>
+          <p:cNvPr id="144" name="Text 142"/>
+          <p:cNvSpPr/>
+          <p:nvPr/>
+        </p:nvSpPr>
+        <p:spPr>
+          <a:xfrm>
+            <a:off x="5971032" y="4197096"/>
             <a:ext cx="1271016" cy="365760"/>
           </a:xfrm>
           <a:prstGeom prst="rect">
@@ -12581,13 +12955,13 @@
       </p:sp>
       <p:sp>
         <p:nvSpPr>
-          <p:cNvPr id="133" name="Shape 131"/>
-          <p:cNvSpPr/>
-          <p:nvPr/>
-        </p:nvSpPr>
-        <p:spPr>
-          <a:xfrm>
-            <a:off x="7269480" y="4032504"/>
+          <p:cNvPr id="145" name="Shape 143"/>
+          <p:cNvSpPr/>
+          <p:nvPr/>
+        </p:nvSpPr>
+        <p:spPr>
+          <a:xfrm>
+            <a:off x="7269480" y="4197096"/>
             <a:ext cx="1325880" cy="365760"/>
           </a:xfrm>
           <a:prstGeom prst="rect">
@@ -12601,13 +12975,13 @@
       </p:sp>
       <p:sp>
         <p:nvSpPr>
-          <p:cNvPr id="134" name="Text 132"/>
-          <p:cNvSpPr/>
-          <p:nvPr/>
-        </p:nvSpPr>
-        <p:spPr>
-          <a:xfrm>
-            <a:off x="7296912" y="4032504"/>
+          <p:cNvPr id="146" name="Text 144"/>
+          <p:cNvSpPr/>
+          <p:nvPr/>
+        </p:nvSpPr>
+        <p:spPr>
+          <a:xfrm>
+            <a:off x="7296912" y="4197096"/>
             <a:ext cx="1271016" cy="365760"/>
           </a:xfrm>
           <a:prstGeom prst="rect">
@@ -12657,18 +13031,18 @@
       </p:sp>
       <p:sp>
         <p:nvSpPr>
-          <p:cNvPr id="135" name="Shape 133"/>
-          <p:cNvSpPr/>
-          <p:nvPr/>
-        </p:nvSpPr>
-        <p:spPr>
-          <a:xfrm>
-            <a:off x="274320" y="4471416"/>
-            <a:ext cx="8595360" cy="310896"/>
+          <p:cNvPr id="147" name="Shape 145"/>
+          <p:cNvSpPr/>
+          <p:nvPr/>
+        </p:nvSpPr>
+        <p:spPr>
+          <a:xfrm>
+            <a:off x="274320" y="4617720"/>
+            <a:ext cx="8595360" cy="274320"/>
           </a:xfrm>
           <a:prstGeom prst="roundRect">
             <a:avLst>
-              <a:gd name="adj" fmla="val 17647"/>
+              <a:gd name="adj" fmla="val 20000"/>
             </a:avLst>
           </a:prstGeom>
           <a:solidFill>
@@ -12684,14 +13058,14 @@
       </p:sp>
       <p:sp>
         <p:nvSpPr>
-          <p:cNvPr id="136" name="Text 134"/>
-          <p:cNvSpPr/>
-          <p:nvPr/>
-        </p:nvSpPr>
-        <p:spPr>
-          <a:xfrm>
-            <a:off x="384048" y="4471416"/>
-            <a:ext cx="8375904" cy="310896"/>
+          <p:cNvPr id="148" name="Text 146"/>
+          <p:cNvSpPr/>
+          <p:nvPr/>
+        </p:nvSpPr>
+        <p:spPr>
+          <a:xfrm>
+            <a:off x="365760" y="4617720"/>
+            <a:ext cx="8412480" cy="274320"/>
           </a:xfrm>
           <a:prstGeom prst="rect">
             <a:avLst/>
@@ -12707,7 +13081,7 @@
               <a:buNone/>
             </a:pPr>
             <a:r>
-              <a:rPr lang="en-US" sz="950" dirty="0">
+              <a:rPr lang="en-US" sz="850" dirty="0">
                 <a:solidFill>
                   <a:srgbClr val="E94560"/>
                 </a:solidFill>
@@ -12715,9 +13089,9 @@
                 <a:ea typeface="Arial" pitchFamily="34" charset="-122"/>
                 <a:cs typeface="Arial" pitchFamily="34" charset="-120"/>
               </a:rPr>
-              <a:t>★ P4(UTAGEなし)：月額固定費はほぼ¥0だが、決済・認証・動画保護の連携を新規に作り込む分、初期開発工数が増える</a:t>
-            </a:r>
-            <a:endParaRPr lang="en-US" sz="950" dirty="0"/>
+              <a:t>★ パターン4(UTAGEなし)：月額固定費はほぼ¥0で、Supabaseの無料DBによりマルチデバイス対応も可能。ただし決済・認証・動画保護を新規に作り込む分、初期開発工数が増える</a:t>
+            </a:r>
+            <a:endParaRPr lang="en-US" sz="850" dirty="0"/>
           </a:p>
         </p:txBody>
       </p:sp>

--- a/LOVEQUEST_MASTERS_提案書.pptx
+++ b/LOVEQUEST_MASTERS_提案書.pptx
@@ -8526,8 +8526,8 @@
         </p:nvSpPr>
         <p:spPr>
           <a:xfrm>
-            <a:off x="274320" y="804672"/>
-            <a:ext cx="2011680" cy="420624"/>
+            <a:off x="274320" y="786384"/>
+            <a:ext cx="2011680" cy="365760"/>
           </a:xfrm>
           <a:prstGeom prst="rect">
             <a:avLst/>
@@ -8546,8 +8546,8 @@
         </p:nvSpPr>
         <p:spPr>
           <a:xfrm>
-            <a:off x="2286000" y="804672"/>
-            <a:ext cx="1005840" cy="420624"/>
+            <a:off x="2286000" y="786384"/>
+            <a:ext cx="1005840" cy="365760"/>
           </a:xfrm>
           <a:prstGeom prst="rect">
             <a:avLst/>
@@ -8566,8 +8566,8 @@
         </p:nvSpPr>
         <p:spPr>
           <a:xfrm>
-            <a:off x="3291840" y="804672"/>
-            <a:ext cx="1325880" cy="420624"/>
+            <a:off x="3291840" y="786384"/>
+            <a:ext cx="1325880" cy="365760"/>
           </a:xfrm>
           <a:prstGeom prst="rect">
             <a:avLst/>
@@ -8591,8 +8591,8 @@
         </p:nvSpPr>
         <p:spPr>
           <a:xfrm>
-            <a:off x="4617720" y="804672"/>
-            <a:ext cx="1325880" cy="420624"/>
+            <a:off x="4617720" y="786384"/>
+            <a:ext cx="1325880" cy="365760"/>
           </a:xfrm>
           <a:prstGeom prst="rect">
             <a:avLst/>
@@ -8616,8 +8616,8 @@
         </p:nvSpPr>
         <p:spPr>
           <a:xfrm>
-            <a:off x="5943600" y="804672"/>
-            <a:ext cx="1325880" cy="420624"/>
+            <a:off x="5943600" y="786384"/>
+            <a:ext cx="1325880" cy="365760"/>
           </a:xfrm>
           <a:prstGeom prst="rect">
             <a:avLst/>
@@ -8641,8 +8641,8 @@
         </p:nvSpPr>
         <p:spPr>
           <a:xfrm>
-            <a:off x="7269480" y="804672"/>
-            <a:ext cx="1325880" cy="420624"/>
+            <a:off x="7269480" y="786384"/>
+            <a:ext cx="1325880" cy="365760"/>
           </a:xfrm>
           <a:prstGeom prst="rect">
             <a:avLst/>
@@ -8666,8 +8666,8 @@
         </p:nvSpPr>
         <p:spPr>
           <a:xfrm>
-            <a:off x="301752" y="822960"/>
-            <a:ext cx="1956816" cy="384048"/>
+            <a:off x="301752" y="804672"/>
+            <a:ext cx="1956816" cy="329184"/>
           </a:xfrm>
           <a:prstGeom prst="rect">
             <a:avLst/>
@@ -8705,8 +8705,8 @@
         </p:nvSpPr>
         <p:spPr>
           <a:xfrm>
-            <a:off x="2313432" y="822960"/>
-            <a:ext cx="950976" cy="384048"/>
+            <a:off x="2313432" y="804672"/>
+            <a:ext cx="950976" cy="329184"/>
           </a:xfrm>
           <a:prstGeom prst="rect">
             <a:avLst/>
@@ -8744,8 +8744,8 @@
         </p:nvSpPr>
         <p:spPr>
           <a:xfrm>
-            <a:off x="3319272" y="822960"/>
-            <a:ext cx="1271016" cy="384048"/>
+            <a:off x="3319272" y="804672"/>
+            <a:ext cx="1271016" cy="329184"/>
           </a:xfrm>
           <a:prstGeom prst="rect">
             <a:avLst/>
@@ -8800,8 +8800,8 @@
         </p:nvSpPr>
         <p:spPr>
           <a:xfrm>
-            <a:off x="4645152" y="822960"/>
-            <a:ext cx="1271016" cy="384048"/>
+            <a:off x="4645152" y="804672"/>
+            <a:ext cx="1271016" cy="329184"/>
           </a:xfrm>
           <a:prstGeom prst="rect">
             <a:avLst/>
@@ -8856,8 +8856,8 @@
         </p:nvSpPr>
         <p:spPr>
           <a:xfrm>
-            <a:off x="5971032" y="822960"/>
-            <a:ext cx="1271016" cy="384048"/>
+            <a:off x="5971032" y="804672"/>
+            <a:ext cx="1271016" cy="329184"/>
           </a:xfrm>
           <a:prstGeom prst="rect">
             <a:avLst/>
@@ -8912,8 +8912,8 @@
         </p:nvSpPr>
         <p:spPr>
           <a:xfrm>
-            <a:off x="7296912" y="822960"/>
-            <a:ext cx="1271016" cy="384048"/>
+            <a:off x="7296912" y="804672"/>
+            <a:ext cx="1271016" cy="329184"/>
           </a:xfrm>
           <a:prstGeom prst="rect">
             <a:avLst/>
@@ -8968,8 +8968,8 @@
         </p:nvSpPr>
         <p:spPr>
           <a:xfrm>
-            <a:off x="274320" y="1225296"/>
-            <a:ext cx="2011680" cy="292608"/>
+            <a:off x="274320" y="1152144"/>
+            <a:ext cx="2011680" cy="246888"/>
           </a:xfrm>
           <a:prstGeom prst="rect">
             <a:avLst/>
@@ -8988,8 +8988,8 @@
         </p:nvSpPr>
         <p:spPr>
           <a:xfrm>
-            <a:off x="2286000" y="1225296"/>
-            <a:ext cx="1005840" cy="292608"/>
+            <a:off x="2286000" y="1152144"/>
+            <a:ext cx="1005840" cy="246888"/>
           </a:xfrm>
           <a:prstGeom prst="rect">
             <a:avLst/>
@@ -9008,8 +9008,8 @@
         </p:nvSpPr>
         <p:spPr>
           <a:xfrm>
-            <a:off x="3291840" y="1225296"/>
-            <a:ext cx="1325880" cy="292608"/>
+            <a:off x="3291840" y="1152144"/>
+            <a:ext cx="1325880" cy="246888"/>
           </a:xfrm>
           <a:prstGeom prst="rect">
             <a:avLst/>
@@ -9033,8 +9033,8 @@
         </p:nvSpPr>
         <p:spPr>
           <a:xfrm>
-            <a:off x="4617720" y="1225296"/>
-            <a:ext cx="1325880" cy="292608"/>
+            <a:off x="4617720" y="1152144"/>
+            <a:ext cx="1325880" cy="246888"/>
           </a:xfrm>
           <a:prstGeom prst="rect">
             <a:avLst/>
@@ -9058,8 +9058,8 @@
         </p:nvSpPr>
         <p:spPr>
           <a:xfrm>
-            <a:off x="5943600" y="1225296"/>
-            <a:ext cx="1325880" cy="292608"/>
+            <a:off x="5943600" y="1152144"/>
+            <a:ext cx="1325880" cy="246888"/>
           </a:xfrm>
           <a:prstGeom prst="rect">
             <a:avLst/>
@@ -9083,8 +9083,8 @@
         </p:nvSpPr>
         <p:spPr>
           <a:xfrm>
-            <a:off x="7269480" y="1225296"/>
-            <a:ext cx="1325880" cy="292608"/>
+            <a:off x="7269480" y="1152144"/>
+            <a:ext cx="1325880" cy="246888"/>
           </a:xfrm>
           <a:prstGeom prst="rect">
             <a:avLst/>
@@ -9108,8 +9108,8 @@
         </p:nvSpPr>
         <p:spPr>
           <a:xfrm>
-            <a:off x="329184" y="1225296"/>
-            <a:ext cx="1920240" cy="292608"/>
+            <a:off x="329184" y="1152144"/>
+            <a:ext cx="1920240" cy="246888"/>
           </a:xfrm>
           <a:prstGeom prst="rect">
             <a:avLst/>
@@ -9147,8 +9147,8 @@
         </p:nvSpPr>
         <p:spPr>
           <a:xfrm>
-            <a:off x="2313432" y="1225296"/>
-            <a:ext cx="950976" cy="292608"/>
+            <a:off x="2313432" y="1152144"/>
+            <a:ext cx="950976" cy="246888"/>
           </a:xfrm>
           <a:prstGeom prst="rect">
             <a:avLst/>
@@ -9186,8 +9186,8 @@
         </p:nvSpPr>
         <p:spPr>
           <a:xfrm>
-            <a:off x="3319272" y="1225296"/>
-            <a:ext cx="1271016" cy="292608"/>
+            <a:off x="3319272" y="1152144"/>
+            <a:ext cx="1271016" cy="246888"/>
           </a:xfrm>
           <a:prstGeom prst="rect">
             <a:avLst/>
@@ -9225,8 +9225,8 @@
         </p:nvSpPr>
         <p:spPr>
           <a:xfrm>
-            <a:off x="4645152" y="1225296"/>
-            <a:ext cx="1271016" cy="292608"/>
+            <a:off x="4645152" y="1152144"/>
+            <a:ext cx="1271016" cy="246888"/>
           </a:xfrm>
           <a:prstGeom prst="rect">
             <a:avLst/>
@@ -9264,8 +9264,8 @@
         </p:nvSpPr>
         <p:spPr>
           <a:xfrm>
-            <a:off x="5971032" y="1225296"/>
-            <a:ext cx="1271016" cy="292608"/>
+            <a:off x="5971032" y="1152144"/>
+            <a:ext cx="1271016" cy="246888"/>
           </a:xfrm>
           <a:prstGeom prst="rect">
             <a:avLst/>
@@ -9303,8 +9303,8 @@
         </p:nvSpPr>
         <p:spPr>
           <a:xfrm>
-            <a:off x="7296912" y="1225296"/>
-            <a:ext cx="1271016" cy="292608"/>
+            <a:off x="7296912" y="1152144"/>
+            <a:ext cx="1271016" cy="246888"/>
           </a:xfrm>
           <a:prstGeom prst="rect">
             <a:avLst/>
@@ -9342,8 +9342,8 @@
         </p:nvSpPr>
         <p:spPr>
           <a:xfrm>
-            <a:off x="274320" y="1517904"/>
-            <a:ext cx="2011680" cy="292608"/>
+            <a:off x="274320" y="1399032"/>
+            <a:ext cx="2011680" cy="246888"/>
           </a:xfrm>
           <a:prstGeom prst="rect">
             <a:avLst/>
@@ -9362,8 +9362,8 @@
         </p:nvSpPr>
         <p:spPr>
           <a:xfrm>
-            <a:off x="2286000" y="1517904"/>
-            <a:ext cx="1005840" cy="292608"/>
+            <a:off x="2286000" y="1399032"/>
+            <a:ext cx="1005840" cy="246888"/>
           </a:xfrm>
           <a:prstGeom prst="rect">
             <a:avLst/>
@@ -9382,8 +9382,8 @@
         </p:nvSpPr>
         <p:spPr>
           <a:xfrm>
-            <a:off x="3291840" y="1517904"/>
-            <a:ext cx="1325880" cy="292608"/>
+            <a:off x="3291840" y="1399032"/>
+            <a:ext cx="1325880" cy="246888"/>
           </a:xfrm>
           <a:prstGeom prst="rect">
             <a:avLst/>
@@ -9407,8 +9407,8 @@
         </p:nvSpPr>
         <p:spPr>
           <a:xfrm>
-            <a:off x="4617720" y="1517904"/>
-            <a:ext cx="1325880" cy="292608"/>
+            <a:off x="4617720" y="1399032"/>
+            <a:ext cx="1325880" cy="246888"/>
           </a:xfrm>
           <a:prstGeom prst="rect">
             <a:avLst/>
@@ -9432,8 +9432,8 @@
         </p:nvSpPr>
         <p:spPr>
           <a:xfrm>
-            <a:off x="5943600" y="1517904"/>
-            <a:ext cx="1325880" cy="292608"/>
+            <a:off x="5943600" y="1399032"/>
+            <a:ext cx="1325880" cy="246888"/>
           </a:xfrm>
           <a:prstGeom prst="rect">
             <a:avLst/>
@@ -9457,8 +9457,8 @@
         </p:nvSpPr>
         <p:spPr>
           <a:xfrm>
-            <a:off x="7269480" y="1517904"/>
-            <a:ext cx="1325880" cy="292608"/>
+            <a:off x="7269480" y="1399032"/>
+            <a:ext cx="1325880" cy="246888"/>
           </a:xfrm>
           <a:prstGeom prst="rect">
             <a:avLst/>
@@ -9482,8 +9482,8 @@
         </p:nvSpPr>
         <p:spPr>
           <a:xfrm>
-            <a:off x="329184" y="1517904"/>
-            <a:ext cx="1920240" cy="292608"/>
+            <a:off x="329184" y="1399032"/>
+            <a:ext cx="1920240" cy="246888"/>
           </a:xfrm>
           <a:prstGeom prst="rect">
             <a:avLst/>
@@ -9521,8 +9521,8 @@
         </p:nvSpPr>
         <p:spPr>
           <a:xfrm>
-            <a:off x="2313432" y="1517904"/>
-            <a:ext cx="950976" cy="292608"/>
+            <a:off x="2313432" y="1399032"/>
+            <a:ext cx="950976" cy="246888"/>
           </a:xfrm>
           <a:prstGeom prst="rect">
             <a:avLst/>
@@ -9560,8 +9560,8 @@
         </p:nvSpPr>
         <p:spPr>
           <a:xfrm>
-            <a:off x="3319272" y="1517904"/>
-            <a:ext cx="1271016" cy="292608"/>
+            <a:off x="3319272" y="1399032"/>
+            <a:ext cx="1271016" cy="246888"/>
           </a:xfrm>
           <a:prstGeom prst="rect">
             <a:avLst/>
@@ -9599,8 +9599,8 @@
         </p:nvSpPr>
         <p:spPr>
           <a:xfrm>
-            <a:off x="4645152" y="1517904"/>
-            <a:ext cx="1271016" cy="292608"/>
+            <a:off x="4645152" y="1399032"/>
+            <a:ext cx="1271016" cy="246888"/>
           </a:xfrm>
           <a:prstGeom prst="rect">
             <a:avLst/>
@@ -9638,8 +9638,8 @@
         </p:nvSpPr>
         <p:spPr>
           <a:xfrm>
-            <a:off x="5971032" y="1517904"/>
-            <a:ext cx="1271016" cy="292608"/>
+            <a:off x="5971032" y="1399032"/>
+            <a:ext cx="1271016" cy="246888"/>
           </a:xfrm>
           <a:prstGeom prst="rect">
             <a:avLst/>
@@ -9677,8 +9677,8 @@
         </p:nvSpPr>
         <p:spPr>
           <a:xfrm>
-            <a:off x="7296912" y="1517904"/>
-            <a:ext cx="1271016" cy="292608"/>
+            <a:off x="7296912" y="1399032"/>
+            <a:ext cx="1271016" cy="246888"/>
           </a:xfrm>
           <a:prstGeom prst="rect">
             <a:avLst/>
@@ -9716,8 +9716,8 @@
         </p:nvSpPr>
         <p:spPr>
           <a:xfrm>
-            <a:off x="274320" y="1810512"/>
-            <a:ext cx="2011680" cy="292608"/>
+            <a:off x="274320" y="1645920"/>
+            <a:ext cx="2011680" cy="246888"/>
           </a:xfrm>
           <a:prstGeom prst="rect">
             <a:avLst/>
@@ -9736,8 +9736,8 @@
         </p:nvSpPr>
         <p:spPr>
           <a:xfrm>
-            <a:off x="2286000" y="1810512"/>
-            <a:ext cx="1005840" cy="292608"/>
+            <a:off x="2286000" y="1645920"/>
+            <a:ext cx="1005840" cy="246888"/>
           </a:xfrm>
           <a:prstGeom prst="rect">
             <a:avLst/>
@@ -9756,8 +9756,8 @@
         </p:nvSpPr>
         <p:spPr>
           <a:xfrm>
-            <a:off x="3291840" y="1810512"/>
-            <a:ext cx="1325880" cy="292608"/>
+            <a:off x="3291840" y="1645920"/>
+            <a:ext cx="1325880" cy="246888"/>
           </a:xfrm>
           <a:prstGeom prst="rect">
             <a:avLst/>
@@ -9781,8 +9781,8 @@
         </p:nvSpPr>
         <p:spPr>
           <a:xfrm>
-            <a:off x="4617720" y="1810512"/>
-            <a:ext cx="1325880" cy="292608"/>
+            <a:off x="4617720" y="1645920"/>
+            <a:ext cx="1325880" cy="246888"/>
           </a:xfrm>
           <a:prstGeom prst="rect">
             <a:avLst/>
@@ -9806,8 +9806,8 @@
         </p:nvSpPr>
         <p:spPr>
           <a:xfrm>
-            <a:off x="5943600" y="1810512"/>
-            <a:ext cx="1325880" cy="292608"/>
+            <a:off x="5943600" y="1645920"/>
+            <a:ext cx="1325880" cy="246888"/>
           </a:xfrm>
           <a:prstGeom prst="rect">
             <a:avLst/>
@@ -9831,8 +9831,8 @@
         </p:nvSpPr>
         <p:spPr>
           <a:xfrm>
-            <a:off x="7269480" y="1810512"/>
-            <a:ext cx="1325880" cy="292608"/>
+            <a:off x="7269480" y="1645920"/>
+            <a:ext cx="1325880" cy="246888"/>
           </a:xfrm>
           <a:prstGeom prst="rect">
             <a:avLst/>
@@ -9856,8 +9856,8 @@
         </p:nvSpPr>
         <p:spPr>
           <a:xfrm>
-            <a:off x="329184" y="1810512"/>
-            <a:ext cx="1920240" cy="292608"/>
+            <a:off x="329184" y="1645920"/>
+            <a:ext cx="1920240" cy="246888"/>
           </a:xfrm>
           <a:prstGeom prst="rect">
             <a:avLst/>
@@ -9895,8 +9895,8 @@
         </p:nvSpPr>
         <p:spPr>
           <a:xfrm>
-            <a:off x="2313432" y="1810512"/>
-            <a:ext cx="950976" cy="292608"/>
+            <a:off x="2313432" y="1645920"/>
+            <a:ext cx="950976" cy="246888"/>
           </a:xfrm>
           <a:prstGeom prst="rect">
             <a:avLst/>
@@ -9934,8 +9934,8 @@
         </p:nvSpPr>
         <p:spPr>
           <a:xfrm>
-            <a:off x="3319272" y="1810512"/>
-            <a:ext cx="1271016" cy="292608"/>
+            <a:off x="3319272" y="1645920"/>
+            <a:ext cx="1271016" cy="246888"/>
           </a:xfrm>
           <a:prstGeom prst="rect">
             <a:avLst/>
@@ -9973,8 +9973,8 @@
         </p:nvSpPr>
         <p:spPr>
           <a:xfrm>
-            <a:off x="4645152" y="1810512"/>
-            <a:ext cx="1271016" cy="292608"/>
+            <a:off x="4645152" y="1645920"/>
+            <a:ext cx="1271016" cy="246888"/>
           </a:xfrm>
           <a:prstGeom prst="rect">
             <a:avLst/>
@@ -10012,8 +10012,8 @@
         </p:nvSpPr>
         <p:spPr>
           <a:xfrm>
-            <a:off x="5971032" y="1810512"/>
-            <a:ext cx="1271016" cy="292608"/>
+            <a:off x="5971032" y="1645920"/>
+            <a:ext cx="1271016" cy="246888"/>
           </a:xfrm>
           <a:prstGeom prst="rect">
             <a:avLst/>
@@ -10051,8 +10051,8 @@
         </p:nvSpPr>
         <p:spPr>
           <a:xfrm>
-            <a:off x="7296912" y="1810512"/>
-            <a:ext cx="1271016" cy="292608"/>
+            <a:off x="7296912" y="1645920"/>
+            <a:ext cx="1271016" cy="246888"/>
           </a:xfrm>
           <a:prstGeom prst="rect">
             <a:avLst/>
@@ -10090,8 +10090,8 @@
         </p:nvSpPr>
         <p:spPr>
           <a:xfrm>
-            <a:off x="274320" y="2103120"/>
-            <a:ext cx="2011680" cy="292608"/>
+            <a:off x="274320" y="1892808"/>
+            <a:ext cx="2011680" cy="246888"/>
           </a:xfrm>
           <a:prstGeom prst="rect">
             <a:avLst/>
@@ -10110,8 +10110,8 @@
         </p:nvSpPr>
         <p:spPr>
           <a:xfrm>
-            <a:off x="2286000" y="2103120"/>
-            <a:ext cx="1005840" cy="292608"/>
+            <a:off x="2286000" y="1892808"/>
+            <a:ext cx="1005840" cy="246888"/>
           </a:xfrm>
           <a:prstGeom prst="rect">
             <a:avLst/>
@@ -10130,8 +10130,8 @@
         </p:nvSpPr>
         <p:spPr>
           <a:xfrm>
-            <a:off x="3291840" y="2103120"/>
-            <a:ext cx="1325880" cy="292608"/>
+            <a:off x="3291840" y="1892808"/>
+            <a:ext cx="1325880" cy="246888"/>
           </a:xfrm>
           <a:prstGeom prst="rect">
             <a:avLst/>
@@ -10155,8 +10155,8 @@
         </p:nvSpPr>
         <p:spPr>
           <a:xfrm>
-            <a:off x="4617720" y="2103120"/>
-            <a:ext cx="1325880" cy="292608"/>
+            <a:off x="4617720" y="1892808"/>
+            <a:ext cx="1325880" cy="246888"/>
           </a:xfrm>
           <a:prstGeom prst="rect">
             <a:avLst/>
@@ -10180,8 +10180,8 @@
         </p:nvSpPr>
         <p:spPr>
           <a:xfrm>
-            <a:off x="5943600" y="2103120"/>
-            <a:ext cx="1325880" cy="292608"/>
+            <a:off x="5943600" y="1892808"/>
+            <a:ext cx="1325880" cy="246888"/>
           </a:xfrm>
           <a:prstGeom prst="rect">
             <a:avLst/>
@@ -10205,8 +10205,8 @@
         </p:nvSpPr>
         <p:spPr>
           <a:xfrm>
-            <a:off x="7269480" y="2103120"/>
-            <a:ext cx="1325880" cy="292608"/>
+            <a:off x="7269480" y="1892808"/>
+            <a:ext cx="1325880" cy="246888"/>
           </a:xfrm>
           <a:prstGeom prst="rect">
             <a:avLst/>
@@ -10230,8 +10230,8 @@
         </p:nvSpPr>
         <p:spPr>
           <a:xfrm>
-            <a:off x="329184" y="2103120"/>
-            <a:ext cx="1920240" cy="292608"/>
+            <a:off x="329184" y="1892808"/>
+            <a:ext cx="1920240" cy="246888"/>
           </a:xfrm>
           <a:prstGeom prst="rect">
             <a:avLst/>
@@ -10269,8 +10269,8 @@
         </p:nvSpPr>
         <p:spPr>
           <a:xfrm>
-            <a:off x="2313432" y="2103120"/>
-            <a:ext cx="950976" cy="292608"/>
+            <a:off x="2313432" y="1892808"/>
+            <a:ext cx="950976" cy="246888"/>
           </a:xfrm>
           <a:prstGeom prst="rect">
             <a:avLst/>
@@ -10308,8 +10308,8 @@
         </p:nvSpPr>
         <p:spPr>
           <a:xfrm>
-            <a:off x="3319272" y="2103120"/>
-            <a:ext cx="1271016" cy="292608"/>
+            <a:off x="3319272" y="1892808"/>
+            <a:ext cx="1271016" cy="246888"/>
           </a:xfrm>
           <a:prstGeom prst="rect">
             <a:avLst/>
@@ -10347,8 +10347,8 @@
         </p:nvSpPr>
         <p:spPr>
           <a:xfrm>
-            <a:off x="4645152" y="2103120"/>
-            <a:ext cx="1271016" cy="292608"/>
+            <a:off x="4645152" y="1892808"/>
+            <a:ext cx="1271016" cy="246888"/>
           </a:xfrm>
           <a:prstGeom prst="rect">
             <a:avLst/>
@@ -10386,8 +10386,8 @@
         </p:nvSpPr>
         <p:spPr>
           <a:xfrm>
-            <a:off x="5971032" y="2103120"/>
-            <a:ext cx="1271016" cy="292608"/>
+            <a:off x="5971032" y="1892808"/>
+            <a:ext cx="1271016" cy="246888"/>
           </a:xfrm>
           <a:prstGeom prst="rect">
             <a:avLst/>
@@ -10425,8 +10425,8 @@
         </p:nvSpPr>
         <p:spPr>
           <a:xfrm>
-            <a:off x="7296912" y="2103120"/>
-            <a:ext cx="1271016" cy="292608"/>
+            <a:off x="7296912" y="1892808"/>
+            <a:ext cx="1271016" cy="246888"/>
           </a:xfrm>
           <a:prstGeom prst="rect">
             <a:avLst/>
@@ -10464,8 +10464,8 @@
         </p:nvSpPr>
         <p:spPr>
           <a:xfrm>
-            <a:off x="274320" y="2395728"/>
-            <a:ext cx="2011680" cy="292608"/>
+            <a:off x="274320" y="2139696"/>
+            <a:ext cx="2011680" cy="246888"/>
           </a:xfrm>
           <a:prstGeom prst="rect">
             <a:avLst/>
@@ -10484,8 +10484,8 @@
         </p:nvSpPr>
         <p:spPr>
           <a:xfrm>
-            <a:off x="2286000" y="2395728"/>
-            <a:ext cx="1005840" cy="292608"/>
+            <a:off x="2286000" y="2139696"/>
+            <a:ext cx="1005840" cy="246888"/>
           </a:xfrm>
           <a:prstGeom prst="rect">
             <a:avLst/>
@@ -10504,8 +10504,8 @@
         </p:nvSpPr>
         <p:spPr>
           <a:xfrm>
-            <a:off x="3291840" y="2395728"/>
-            <a:ext cx="1325880" cy="292608"/>
+            <a:off x="3291840" y="2139696"/>
+            <a:ext cx="1325880" cy="246888"/>
           </a:xfrm>
           <a:prstGeom prst="rect">
             <a:avLst/>
@@ -10529,8 +10529,8 @@
         </p:nvSpPr>
         <p:spPr>
           <a:xfrm>
-            <a:off x="4617720" y="2395728"/>
-            <a:ext cx="1325880" cy="292608"/>
+            <a:off x="4617720" y="2139696"/>
+            <a:ext cx="1325880" cy="246888"/>
           </a:xfrm>
           <a:prstGeom prst="rect">
             <a:avLst/>
@@ -10554,8 +10554,8 @@
         </p:nvSpPr>
         <p:spPr>
           <a:xfrm>
-            <a:off x="5943600" y="2395728"/>
-            <a:ext cx="1325880" cy="292608"/>
+            <a:off x="5943600" y="2139696"/>
+            <a:ext cx="1325880" cy="246888"/>
           </a:xfrm>
           <a:prstGeom prst="rect">
             <a:avLst/>
@@ -10579,8 +10579,8 @@
         </p:nvSpPr>
         <p:spPr>
           <a:xfrm>
-            <a:off x="7269480" y="2395728"/>
-            <a:ext cx="1325880" cy="292608"/>
+            <a:off x="7269480" y="2139696"/>
+            <a:ext cx="1325880" cy="246888"/>
           </a:xfrm>
           <a:prstGeom prst="rect">
             <a:avLst/>
@@ -10604,8 +10604,8 @@
         </p:nvSpPr>
         <p:spPr>
           <a:xfrm>
-            <a:off x="329184" y="2395728"/>
-            <a:ext cx="1920240" cy="292608"/>
+            <a:off x="329184" y="2139696"/>
+            <a:ext cx="1920240" cy="246888"/>
           </a:xfrm>
           <a:prstGeom prst="rect">
             <a:avLst/>
@@ -10643,8 +10643,8 @@
         </p:nvSpPr>
         <p:spPr>
           <a:xfrm>
-            <a:off x="2313432" y="2395728"/>
-            <a:ext cx="950976" cy="292608"/>
+            <a:off x="2313432" y="2139696"/>
+            <a:ext cx="950976" cy="246888"/>
           </a:xfrm>
           <a:prstGeom prst="rect">
             <a:avLst/>
@@ -10682,8 +10682,8 @@
         </p:nvSpPr>
         <p:spPr>
           <a:xfrm>
-            <a:off x="3319272" y="2395728"/>
-            <a:ext cx="1271016" cy="292608"/>
+            <a:off x="3319272" y="2139696"/>
+            <a:ext cx="1271016" cy="246888"/>
           </a:xfrm>
           <a:prstGeom prst="rect">
             <a:avLst/>
@@ -10721,8 +10721,8 @@
         </p:nvSpPr>
         <p:spPr>
           <a:xfrm>
-            <a:off x="4645152" y="2395728"/>
-            <a:ext cx="1271016" cy="292608"/>
+            <a:off x="4645152" y="2139696"/>
+            <a:ext cx="1271016" cy="246888"/>
           </a:xfrm>
           <a:prstGeom prst="rect">
             <a:avLst/>
@@ -10760,8 +10760,8 @@
         </p:nvSpPr>
         <p:spPr>
           <a:xfrm>
-            <a:off x="5971032" y="2395728"/>
-            <a:ext cx="1271016" cy="292608"/>
+            <a:off x="5971032" y="2139696"/>
+            <a:ext cx="1271016" cy="246888"/>
           </a:xfrm>
           <a:prstGeom prst="rect">
             <a:avLst/>
@@ -10799,8 +10799,8 @@
         </p:nvSpPr>
         <p:spPr>
           <a:xfrm>
-            <a:off x="7296912" y="2395728"/>
-            <a:ext cx="1271016" cy="292608"/>
+            <a:off x="7296912" y="2139696"/>
+            <a:ext cx="1271016" cy="246888"/>
           </a:xfrm>
           <a:prstGeom prst="rect">
             <a:avLst/>
@@ -10838,8 +10838,8 @@
         </p:nvSpPr>
         <p:spPr>
           <a:xfrm>
-            <a:off x="274320" y="2688336"/>
-            <a:ext cx="2011680" cy="292608"/>
+            <a:off x="274320" y="2386584"/>
+            <a:ext cx="2011680" cy="246888"/>
           </a:xfrm>
           <a:prstGeom prst="rect">
             <a:avLst/>
@@ -10858,8 +10858,8 @@
         </p:nvSpPr>
         <p:spPr>
           <a:xfrm>
-            <a:off x="2286000" y="2688336"/>
-            <a:ext cx="1005840" cy="292608"/>
+            <a:off x="2286000" y="2386584"/>
+            <a:ext cx="1005840" cy="246888"/>
           </a:xfrm>
           <a:prstGeom prst="rect">
             <a:avLst/>
@@ -10878,8 +10878,8 @@
         </p:nvSpPr>
         <p:spPr>
           <a:xfrm>
-            <a:off x="3291840" y="2688336"/>
-            <a:ext cx="1325880" cy="292608"/>
+            <a:off x="3291840" y="2386584"/>
+            <a:ext cx="1325880" cy="246888"/>
           </a:xfrm>
           <a:prstGeom prst="rect">
             <a:avLst/>
@@ -10903,8 +10903,8 @@
         </p:nvSpPr>
         <p:spPr>
           <a:xfrm>
-            <a:off x="4617720" y="2688336"/>
-            <a:ext cx="1325880" cy="292608"/>
+            <a:off x="4617720" y="2386584"/>
+            <a:ext cx="1325880" cy="246888"/>
           </a:xfrm>
           <a:prstGeom prst="rect">
             <a:avLst/>
@@ -10928,8 +10928,8 @@
         </p:nvSpPr>
         <p:spPr>
           <a:xfrm>
-            <a:off x="5943600" y="2688336"/>
-            <a:ext cx="1325880" cy="292608"/>
+            <a:off x="5943600" y="2386584"/>
+            <a:ext cx="1325880" cy="246888"/>
           </a:xfrm>
           <a:prstGeom prst="rect">
             <a:avLst/>
@@ -10953,8 +10953,8 @@
         </p:nvSpPr>
         <p:spPr>
           <a:xfrm>
-            <a:off x="7269480" y="2688336"/>
-            <a:ext cx="1325880" cy="292608"/>
+            <a:off x="7269480" y="2386584"/>
+            <a:ext cx="1325880" cy="246888"/>
           </a:xfrm>
           <a:prstGeom prst="rect">
             <a:avLst/>
@@ -10978,8 +10978,8 @@
         </p:nvSpPr>
         <p:spPr>
           <a:xfrm>
-            <a:off x="329184" y="2688336"/>
-            <a:ext cx="1920240" cy="292608"/>
+            <a:off x="329184" y="2386584"/>
+            <a:ext cx="1920240" cy="246888"/>
           </a:xfrm>
           <a:prstGeom prst="rect">
             <a:avLst/>
@@ -11017,8 +11017,8 @@
         </p:nvSpPr>
         <p:spPr>
           <a:xfrm>
-            <a:off x="2313432" y="2688336"/>
-            <a:ext cx="950976" cy="292608"/>
+            <a:off x="2313432" y="2386584"/>
+            <a:ext cx="950976" cy="246888"/>
           </a:xfrm>
           <a:prstGeom prst="rect">
             <a:avLst/>
@@ -11056,8 +11056,8 @@
         </p:nvSpPr>
         <p:spPr>
           <a:xfrm>
-            <a:off x="3319272" y="2688336"/>
-            <a:ext cx="1271016" cy="292608"/>
+            <a:off x="3319272" y="2386584"/>
+            <a:ext cx="1271016" cy="246888"/>
           </a:xfrm>
           <a:prstGeom prst="rect">
             <a:avLst/>
@@ -11095,8 +11095,8 @@
         </p:nvSpPr>
         <p:spPr>
           <a:xfrm>
-            <a:off x="4645152" y="2688336"/>
-            <a:ext cx="1271016" cy="292608"/>
+            <a:off x="4645152" y="2386584"/>
+            <a:ext cx="1271016" cy="246888"/>
           </a:xfrm>
           <a:prstGeom prst="rect">
             <a:avLst/>
@@ -11134,8 +11134,8 @@
         </p:nvSpPr>
         <p:spPr>
           <a:xfrm>
-            <a:off x="5971032" y="2688336"/>
-            <a:ext cx="1271016" cy="292608"/>
+            <a:off x="5971032" y="2386584"/>
+            <a:ext cx="1271016" cy="246888"/>
           </a:xfrm>
           <a:prstGeom prst="rect">
             <a:avLst/>
@@ -11173,8 +11173,8 @@
         </p:nvSpPr>
         <p:spPr>
           <a:xfrm>
-            <a:off x="7296912" y="2688336"/>
-            <a:ext cx="1271016" cy="292608"/>
+            <a:off x="7296912" y="2386584"/>
+            <a:ext cx="1271016" cy="246888"/>
           </a:xfrm>
           <a:prstGeom prst="rect">
             <a:avLst/>
@@ -11212,8 +11212,8 @@
         </p:nvSpPr>
         <p:spPr>
           <a:xfrm>
-            <a:off x="274320" y="2980944"/>
-            <a:ext cx="2011680" cy="292608"/>
+            <a:off x="274320" y="2633472"/>
+            <a:ext cx="2011680" cy="246888"/>
           </a:xfrm>
           <a:prstGeom prst="rect">
             <a:avLst/>
@@ -11232,8 +11232,8 @@
         </p:nvSpPr>
         <p:spPr>
           <a:xfrm>
-            <a:off x="2286000" y="2980944"/>
-            <a:ext cx="1005840" cy="292608"/>
+            <a:off x="2286000" y="2633472"/>
+            <a:ext cx="1005840" cy="246888"/>
           </a:xfrm>
           <a:prstGeom prst="rect">
             <a:avLst/>
@@ -11252,8 +11252,8 @@
         </p:nvSpPr>
         <p:spPr>
           <a:xfrm>
-            <a:off x="3291840" y="2980944"/>
-            <a:ext cx="1325880" cy="292608"/>
+            <a:off x="3291840" y="2633472"/>
+            <a:ext cx="1325880" cy="246888"/>
           </a:xfrm>
           <a:prstGeom prst="rect">
             <a:avLst/>
@@ -11277,8 +11277,8 @@
         </p:nvSpPr>
         <p:spPr>
           <a:xfrm>
-            <a:off x="4617720" y="2980944"/>
-            <a:ext cx="1325880" cy="292608"/>
+            <a:off x="4617720" y="2633472"/>
+            <a:ext cx="1325880" cy="246888"/>
           </a:xfrm>
           <a:prstGeom prst="rect">
             <a:avLst/>
@@ -11302,8 +11302,8 @@
         </p:nvSpPr>
         <p:spPr>
           <a:xfrm>
-            <a:off x="5943600" y="2980944"/>
-            <a:ext cx="1325880" cy="292608"/>
+            <a:off x="5943600" y="2633472"/>
+            <a:ext cx="1325880" cy="246888"/>
           </a:xfrm>
           <a:prstGeom prst="rect">
             <a:avLst/>
@@ -11327,8 +11327,8 @@
         </p:nvSpPr>
         <p:spPr>
           <a:xfrm>
-            <a:off x="7269480" y="2980944"/>
-            <a:ext cx="1325880" cy="292608"/>
+            <a:off x="7269480" y="2633472"/>
+            <a:ext cx="1325880" cy="246888"/>
           </a:xfrm>
           <a:prstGeom prst="rect">
             <a:avLst/>
@@ -11352,8 +11352,8 @@
         </p:nvSpPr>
         <p:spPr>
           <a:xfrm>
-            <a:off x="329184" y="2980944"/>
-            <a:ext cx="1920240" cy="292608"/>
+            <a:off x="329184" y="2633472"/>
+            <a:ext cx="1920240" cy="246888"/>
           </a:xfrm>
           <a:prstGeom prst="rect">
             <a:avLst/>
@@ -11391,8 +11391,8 @@
         </p:nvSpPr>
         <p:spPr>
           <a:xfrm>
-            <a:off x="2313432" y="2980944"/>
-            <a:ext cx="950976" cy="292608"/>
+            <a:off x="2313432" y="2633472"/>
+            <a:ext cx="950976" cy="246888"/>
           </a:xfrm>
           <a:prstGeom prst="rect">
             <a:avLst/>
@@ -11430,8 +11430,8 @@
         </p:nvSpPr>
         <p:spPr>
           <a:xfrm>
-            <a:off x="3319272" y="2980944"/>
-            <a:ext cx="1271016" cy="292608"/>
+            <a:off x="3319272" y="2633472"/>
+            <a:ext cx="1271016" cy="246888"/>
           </a:xfrm>
           <a:prstGeom prst="rect">
             <a:avLst/>
@@ -11469,8 +11469,8 @@
         </p:nvSpPr>
         <p:spPr>
           <a:xfrm>
-            <a:off x="4645152" y="2980944"/>
-            <a:ext cx="1271016" cy="292608"/>
+            <a:off x="4645152" y="2633472"/>
+            <a:ext cx="1271016" cy="246888"/>
           </a:xfrm>
           <a:prstGeom prst="rect">
             <a:avLst/>
@@ -11508,8 +11508,8 @@
         </p:nvSpPr>
         <p:spPr>
           <a:xfrm>
-            <a:off x="5971032" y="2980944"/>
-            <a:ext cx="1271016" cy="292608"/>
+            <a:off x="5971032" y="2633472"/>
+            <a:ext cx="1271016" cy="246888"/>
           </a:xfrm>
           <a:prstGeom prst="rect">
             <a:avLst/>
@@ -11547,8 +11547,8 @@
         </p:nvSpPr>
         <p:spPr>
           <a:xfrm>
-            <a:off x="7296912" y="2980944"/>
-            <a:ext cx="1271016" cy="292608"/>
+            <a:off x="7296912" y="2633472"/>
+            <a:ext cx="1271016" cy="246888"/>
           </a:xfrm>
           <a:prstGeom prst="rect">
             <a:avLst/>
@@ -11586,8 +11586,8 @@
         </p:nvSpPr>
         <p:spPr>
           <a:xfrm>
-            <a:off x="274320" y="3273552"/>
-            <a:ext cx="2011680" cy="292608"/>
+            <a:off x="274320" y="2880360"/>
+            <a:ext cx="2011680" cy="246888"/>
           </a:xfrm>
           <a:prstGeom prst="rect">
             <a:avLst/>
@@ -11606,8 +11606,8 @@
         </p:nvSpPr>
         <p:spPr>
           <a:xfrm>
-            <a:off x="2286000" y="3273552"/>
-            <a:ext cx="1005840" cy="292608"/>
+            <a:off x="2286000" y="2880360"/>
+            <a:ext cx="1005840" cy="246888"/>
           </a:xfrm>
           <a:prstGeom prst="rect">
             <a:avLst/>
@@ -11626,8 +11626,8 @@
         </p:nvSpPr>
         <p:spPr>
           <a:xfrm>
-            <a:off x="3291840" y="3273552"/>
-            <a:ext cx="1325880" cy="292608"/>
+            <a:off x="3291840" y="2880360"/>
+            <a:ext cx="1325880" cy="246888"/>
           </a:xfrm>
           <a:prstGeom prst="rect">
             <a:avLst/>
@@ -11651,8 +11651,8 @@
         </p:nvSpPr>
         <p:spPr>
           <a:xfrm>
-            <a:off x="4617720" y="3273552"/>
-            <a:ext cx="1325880" cy="292608"/>
+            <a:off x="4617720" y="2880360"/>
+            <a:ext cx="1325880" cy="246888"/>
           </a:xfrm>
           <a:prstGeom prst="rect">
             <a:avLst/>
@@ -11676,8 +11676,8 @@
         </p:nvSpPr>
         <p:spPr>
           <a:xfrm>
-            <a:off x="5943600" y="3273552"/>
-            <a:ext cx="1325880" cy="292608"/>
+            <a:off x="5943600" y="2880360"/>
+            <a:ext cx="1325880" cy="246888"/>
           </a:xfrm>
           <a:prstGeom prst="rect">
             <a:avLst/>
@@ -11701,8 +11701,8 @@
         </p:nvSpPr>
         <p:spPr>
           <a:xfrm>
-            <a:off x="7269480" y="3273552"/>
-            <a:ext cx="1325880" cy="292608"/>
+            <a:off x="7269480" y="2880360"/>
+            <a:ext cx="1325880" cy="246888"/>
           </a:xfrm>
           <a:prstGeom prst="rect">
             <a:avLst/>
@@ -11726,8 +11726,8 @@
         </p:nvSpPr>
         <p:spPr>
           <a:xfrm>
-            <a:off x="329184" y="3273552"/>
-            <a:ext cx="1920240" cy="292608"/>
+            <a:off x="329184" y="2880360"/>
+            <a:ext cx="1920240" cy="246888"/>
           </a:xfrm>
           <a:prstGeom prst="rect">
             <a:avLst/>
@@ -11765,8 +11765,8 @@
         </p:nvSpPr>
         <p:spPr>
           <a:xfrm>
-            <a:off x="2313432" y="3273552"/>
-            <a:ext cx="950976" cy="292608"/>
+            <a:off x="2313432" y="2880360"/>
+            <a:ext cx="950976" cy="246888"/>
           </a:xfrm>
           <a:prstGeom prst="rect">
             <a:avLst/>
@@ -11804,8 +11804,8 @@
         </p:nvSpPr>
         <p:spPr>
           <a:xfrm>
-            <a:off x="3319272" y="3273552"/>
-            <a:ext cx="1271016" cy="292608"/>
+            <a:off x="3319272" y="2880360"/>
+            <a:ext cx="1271016" cy="246888"/>
           </a:xfrm>
           <a:prstGeom prst="rect">
             <a:avLst/>
@@ -11843,8 +11843,8 @@
         </p:nvSpPr>
         <p:spPr>
           <a:xfrm>
-            <a:off x="4645152" y="3273552"/>
-            <a:ext cx="1271016" cy="292608"/>
+            <a:off x="4645152" y="2880360"/>
+            <a:ext cx="1271016" cy="246888"/>
           </a:xfrm>
           <a:prstGeom prst="rect">
             <a:avLst/>
@@ -11882,8 +11882,8 @@
         </p:nvSpPr>
         <p:spPr>
           <a:xfrm>
-            <a:off x="5971032" y="3273552"/>
-            <a:ext cx="1271016" cy="292608"/>
+            <a:off x="5971032" y="2880360"/>
+            <a:ext cx="1271016" cy="246888"/>
           </a:xfrm>
           <a:prstGeom prst="rect">
             <a:avLst/>
@@ -11921,8 +11921,8 @@
         </p:nvSpPr>
         <p:spPr>
           <a:xfrm>
-            <a:off x="7296912" y="3273552"/>
-            <a:ext cx="1271016" cy="292608"/>
+            <a:off x="7296912" y="2880360"/>
+            <a:ext cx="1271016" cy="246888"/>
           </a:xfrm>
           <a:prstGeom prst="rect">
             <a:avLst/>
@@ -11960,8 +11960,8 @@
         </p:nvSpPr>
         <p:spPr>
           <a:xfrm>
-            <a:off x="274320" y="3566160"/>
-            <a:ext cx="2011680" cy="292608"/>
+            <a:off x="274320" y="3127248"/>
+            <a:ext cx="2011680" cy="246888"/>
           </a:xfrm>
           <a:prstGeom prst="rect">
             <a:avLst/>
@@ -11980,8 +11980,8 @@
         </p:nvSpPr>
         <p:spPr>
           <a:xfrm>
-            <a:off x="2286000" y="3566160"/>
-            <a:ext cx="1005840" cy="292608"/>
+            <a:off x="2286000" y="3127248"/>
+            <a:ext cx="1005840" cy="246888"/>
           </a:xfrm>
           <a:prstGeom prst="rect">
             <a:avLst/>
@@ -12000,8 +12000,8 @@
         </p:nvSpPr>
         <p:spPr>
           <a:xfrm>
-            <a:off x="3291840" y="3566160"/>
-            <a:ext cx="1325880" cy="292608"/>
+            <a:off x="3291840" y="3127248"/>
+            <a:ext cx="1325880" cy="246888"/>
           </a:xfrm>
           <a:prstGeom prst="rect">
             <a:avLst/>
@@ -12025,8 +12025,8 @@
         </p:nvSpPr>
         <p:spPr>
           <a:xfrm>
-            <a:off x="4617720" y="3566160"/>
-            <a:ext cx="1325880" cy="292608"/>
+            <a:off x="4617720" y="3127248"/>
+            <a:ext cx="1325880" cy="246888"/>
           </a:xfrm>
           <a:prstGeom prst="rect">
             <a:avLst/>
@@ -12050,8 +12050,8 @@
         </p:nvSpPr>
         <p:spPr>
           <a:xfrm>
-            <a:off x="5943600" y="3566160"/>
-            <a:ext cx="1325880" cy="292608"/>
+            <a:off x="5943600" y="3127248"/>
+            <a:ext cx="1325880" cy="246888"/>
           </a:xfrm>
           <a:prstGeom prst="rect">
             <a:avLst/>
@@ -12075,8 +12075,8 @@
         </p:nvSpPr>
         <p:spPr>
           <a:xfrm>
-            <a:off x="7269480" y="3566160"/>
-            <a:ext cx="1325880" cy="292608"/>
+            <a:off x="7269480" y="3127248"/>
+            <a:ext cx="1325880" cy="246888"/>
           </a:xfrm>
           <a:prstGeom prst="rect">
             <a:avLst/>
@@ -12100,8 +12100,8 @@
         </p:nvSpPr>
         <p:spPr>
           <a:xfrm>
-            <a:off x="329184" y="3566160"/>
-            <a:ext cx="1920240" cy="292608"/>
+            <a:off x="329184" y="3127248"/>
+            <a:ext cx="1920240" cy="246888"/>
           </a:xfrm>
           <a:prstGeom prst="rect">
             <a:avLst/>
@@ -12139,8 +12139,8 @@
         </p:nvSpPr>
         <p:spPr>
           <a:xfrm>
-            <a:off x="2313432" y="3566160"/>
-            <a:ext cx="950976" cy="292608"/>
+            <a:off x="2313432" y="3127248"/>
+            <a:ext cx="950976" cy="246888"/>
           </a:xfrm>
           <a:prstGeom prst="rect">
             <a:avLst/>
@@ -12178,8 +12178,8 @@
         </p:nvSpPr>
         <p:spPr>
           <a:xfrm>
-            <a:off x="3319272" y="3566160"/>
-            <a:ext cx="1271016" cy="292608"/>
+            <a:off x="3319272" y="3127248"/>
+            <a:ext cx="1271016" cy="246888"/>
           </a:xfrm>
           <a:prstGeom prst="rect">
             <a:avLst/>
@@ -12217,8 +12217,8 @@
         </p:nvSpPr>
         <p:spPr>
           <a:xfrm>
-            <a:off x="4645152" y="3566160"/>
-            <a:ext cx="1271016" cy="292608"/>
+            <a:off x="4645152" y="3127248"/>
+            <a:ext cx="1271016" cy="246888"/>
           </a:xfrm>
           <a:prstGeom prst="rect">
             <a:avLst/>
@@ -12256,8 +12256,8 @@
         </p:nvSpPr>
         <p:spPr>
           <a:xfrm>
-            <a:off x="5971032" y="3566160"/>
-            <a:ext cx="1271016" cy="292608"/>
+            <a:off x="5971032" y="3127248"/>
+            <a:ext cx="1271016" cy="246888"/>
           </a:xfrm>
           <a:prstGeom prst="rect">
             <a:avLst/>
@@ -12295,8 +12295,8 @@
         </p:nvSpPr>
         <p:spPr>
           <a:xfrm>
-            <a:off x="7296912" y="3566160"/>
-            <a:ext cx="1271016" cy="292608"/>
+            <a:off x="7296912" y="3127248"/>
+            <a:ext cx="1271016" cy="246888"/>
           </a:xfrm>
           <a:prstGeom prst="rect">
             <a:avLst/>
@@ -12334,8 +12334,8 @@
         </p:nvSpPr>
         <p:spPr>
           <a:xfrm>
-            <a:off x="274320" y="3858768"/>
-            <a:ext cx="2011680" cy="292608"/>
+            <a:off x="274320" y="3374136"/>
+            <a:ext cx="2011680" cy="246888"/>
           </a:xfrm>
           <a:prstGeom prst="rect">
             <a:avLst/>
@@ -12354,8 +12354,8 @@
         </p:nvSpPr>
         <p:spPr>
           <a:xfrm>
-            <a:off x="2286000" y="3858768"/>
-            <a:ext cx="1005840" cy="292608"/>
+            <a:off x="2286000" y="3374136"/>
+            <a:ext cx="1005840" cy="246888"/>
           </a:xfrm>
           <a:prstGeom prst="rect">
             <a:avLst/>
@@ -12374,8 +12374,8 @@
         </p:nvSpPr>
         <p:spPr>
           <a:xfrm>
-            <a:off x="3291840" y="3858768"/>
-            <a:ext cx="1325880" cy="292608"/>
+            <a:off x="3291840" y="3374136"/>
+            <a:ext cx="1325880" cy="246888"/>
           </a:xfrm>
           <a:prstGeom prst="rect">
             <a:avLst/>
@@ -12399,8 +12399,8 @@
         </p:nvSpPr>
         <p:spPr>
           <a:xfrm>
-            <a:off x="4617720" y="3858768"/>
-            <a:ext cx="1325880" cy="292608"/>
+            <a:off x="4617720" y="3374136"/>
+            <a:ext cx="1325880" cy="246888"/>
           </a:xfrm>
           <a:prstGeom prst="rect">
             <a:avLst/>
@@ -12424,8 +12424,8 @@
         </p:nvSpPr>
         <p:spPr>
           <a:xfrm>
-            <a:off x="5943600" y="3858768"/>
-            <a:ext cx="1325880" cy="292608"/>
+            <a:off x="5943600" y="3374136"/>
+            <a:ext cx="1325880" cy="246888"/>
           </a:xfrm>
           <a:prstGeom prst="rect">
             <a:avLst/>
@@ -12449,8 +12449,8 @@
         </p:nvSpPr>
         <p:spPr>
           <a:xfrm>
-            <a:off x="7269480" y="3858768"/>
-            <a:ext cx="1325880" cy="292608"/>
+            <a:off x="7269480" y="3374136"/>
+            <a:ext cx="1325880" cy="246888"/>
           </a:xfrm>
           <a:prstGeom prst="rect">
             <a:avLst/>
@@ -12474,8 +12474,8 @@
         </p:nvSpPr>
         <p:spPr>
           <a:xfrm>
-            <a:off x="329184" y="3858768"/>
-            <a:ext cx="1920240" cy="292608"/>
+            <a:off x="329184" y="3374136"/>
+            <a:ext cx="1920240" cy="246888"/>
           </a:xfrm>
           <a:prstGeom prst="rect">
             <a:avLst/>
@@ -12513,8 +12513,8 @@
         </p:nvSpPr>
         <p:spPr>
           <a:xfrm>
-            <a:off x="2313432" y="3858768"/>
-            <a:ext cx="950976" cy="292608"/>
+            <a:off x="2313432" y="3374136"/>
+            <a:ext cx="950976" cy="246888"/>
           </a:xfrm>
           <a:prstGeom prst="rect">
             <a:avLst/>
@@ -12552,8 +12552,8 @@
         </p:nvSpPr>
         <p:spPr>
           <a:xfrm>
-            <a:off x="3319272" y="3858768"/>
-            <a:ext cx="1271016" cy="292608"/>
+            <a:off x="3319272" y="3374136"/>
+            <a:ext cx="1271016" cy="246888"/>
           </a:xfrm>
           <a:prstGeom prst="rect">
             <a:avLst/>
@@ -12591,8 +12591,8 @@
         </p:nvSpPr>
         <p:spPr>
           <a:xfrm>
-            <a:off x="4645152" y="3858768"/>
-            <a:ext cx="1271016" cy="292608"/>
+            <a:off x="4645152" y="3374136"/>
+            <a:ext cx="1271016" cy="246888"/>
           </a:xfrm>
           <a:prstGeom prst="rect">
             <a:avLst/>
@@ -12630,8 +12630,8 @@
         </p:nvSpPr>
         <p:spPr>
           <a:xfrm>
-            <a:off x="5971032" y="3858768"/>
-            <a:ext cx="1271016" cy="292608"/>
+            <a:off x="5971032" y="3374136"/>
+            <a:ext cx="1271016" cy="246888"/>
           </a:xfrm>
           <a:prstGeom prst="rect">
             <a:avLst/>
@@ -12669,8 +12669,8 @@
         </p:nvSpPr>
         <p:spPr>
           <a:xfrm>
-            <a:off x="7296912" y="3858768"/>
-            <a:ext cx="1271016" cy="292608"/>
+            <a:off x="7296912" y="3374136"/>
+            <a:ext cx="1271016" cy="246888"/>
           </a:xfrm>
           <a:prstGeom prst="rect">
             <a:avLst/>
@@ -12708,8 +12708,8 @@
         </p:nvSpPr>
         <p:spPr>
           <a:xfrm>
-            <a:off x="274320" y="4197096"/>
-            <a:ext cx="3017520" cy="365760"/>
+            <a:off x="274320" y="3666744"/>
+            <a:ext cx="3017520" cy="310896"/>
           </a:xfrm>
           <a:prstGeom prst="rect">
             <a:avLst/>
@@ -12728,8 +12728,8 @@
         </p:nvSpPr>
         <p:spPr>
           <a:xfrm>
-            <a:off x="329184" y="4197096"/>
-            <a:ext cx="1920240" cy="365760"/>
+            <a:off x="329184" y="3666744"/>
+            <a:ext cx="1920240" cy="310896"/>
           </a:xfrm>
           <a:prstGeom prst="rect">
             <a:avLst/>
@@ -12745,7 +12745,7 @@
               <a:buNone/>
             </a:pPr>
             <a:r>
-              <a:rPr lang="en-US" sz="1150" b="1" dirty="0">
+              <a:rPr lang="en-US" sz="1050" b="1" dirty="0">
                 <a:solidFill>
                   <a:srgbClr val="FFFFFF"/>
                 </a:solidFill>
@@ -12755,7 +12755,7 @@
               </a:rPr>
               <a:t>合計 / 月</a:t>
             </a:r>
-            <a:endParaRPr lang="en-US" sz="1150" dirty="0"/>
+            <a:endParaRPr lang="en-US" sz="1050" dirty="0"/>
           </a:p>
         </p:txBody>
       </p:sp>
@@ -12767,8 +12767,8 @@
         </p:nvSpPr>
         <p:spPr>
           <a:xfrm>
-            <a:off x="3291840" y="4197096"/>
-            <a:ext cx="1325880" cy="365760"/>
+            <a:off x="3291840" y="3666744"/>
+            <a:ext cx="1325880" cy="310896"/>
           </a:xfrm>
           <a:prstGeom prst="rect">
             <a:avLst/>
@@ -12787,24 +12787,24 @@
         </p:nvSpPr>
         <p:spPr>
           <a:xfrm>
-            <a:off x="3319272" y="4197096"/>
-            <a:ext cx="1271016" cy="365760"/>
-          </a:xfrm>
-          <a:prstGeom prst="rect">
-            <a:avLst/>
-          </a:prstGeom>
-          <a:noFill/>
-          <a:ln/>
-        </p:spPr>
-        <p:txBody>
-          <a:bodyPr wrap="square" lIns="0" tIns="0" rIns="0" bIns="0" rtlCol="0" anchor="ctr"/>
-          <a:lstStyle/>
-          <a:p>
-            <a:pPr algn="ctr" indent="0" marL="0">
-              <a:buNone/>
-            </a:pPr>
-            <a:r>
-              <a:rPr lang="en-US" sz="950" b="1" dirty="0">
+            <a:off x="3319272" y="3666744"/>
+            <a:ext cx="1271016" cy="310896"/>
+          </a:xfrm>
+          <a:prstGeom prst="rect">
+            <a:avLst/>
+          </a:prstGeom>
+          <a:noFill/>
+          <a:ln/>
+        </p:spPr>
+        <p:txBody>
+          <a:bodyPr wrap="square" lIns="0" tIns="0" rIns="0" bIns="0" rtlCol="0" anchor="ctr"/>
+          <a:lstStyle/>
+          <a:p>
+            <a:pPr algn="ctr" indent="0" marL="0">
+              <a:buNone/>
+            </a:pPr>
+            <a:r>
+              <a:rPr lang="en-US" sz="900" b="1" dirty="0">
                 <a:solidFill>
                   <a:srgbClr val="0D0D1A"/>
                 </a:solidFill>
@@ -12814,7 +12814,7 @@
               </a:rPr>
               <a:t>約20,000円</a:t>
             </a:r>
-            <a:endParaRPr lang="en-US" sz="950" dirty="0"/>
+            <a:endParaRPr lang="en-US" sz="900" dirty="0"/>
           </a:p>
         </p:txBody>
       </p:sp>
@@ -12826,8 +12826,8 @@
         </p:nvSpPr>
         <p:spPr>
           <a:xfrm>
-            <a:off x="4617720" y="4197096"/>
-            <a:ext cx="1325880" cy="365760"/>
+            <a:off x="4617720" y="3666744"/>
+            <a:ext cx="1325880" cy="310896"/>
           </a:xfrm>
           <a:prstGeom prst="rect">
             <a:avLst/>
@@ -12846,24 +12846,24 @@
         </p:nvSpPr>
         <p:spPr>
           <a:xfrm>
-            <a:off x="4645152" y="4197096"/>
-            <a:ext cx="1271016" cy="365760"/>
-          </a:xfrm>
-          <a:prstGeom prst="rect">
-            <a:avLst/>
-          </a:prstGeom>
-          <a:noFill/>
-          <a:ln/>
-        </p:spPr>
-        <p:txBody>
-          <a:bodyPr wrap="square" lIns="0" tIns="0" rIns="0" bIns="0" rtlCol="0" anchor="ctr"/>
-          <a:lstStyle/>
-          <a:p>
-            <a:pPr algn="ctr" indent="0" marL="0">
-              <a:buNone/>
-            </a:pPr>
-            <a:r>
-              <a:rPr lang="en-US" sz="950" b="1" dirty="0">
+            <a:off x="4645152" y="3666744"/>
+            <a:ext cx="1271016" cy="310896"/>
+          </a:xfrm>
+          <a:prstGeom prst="rect">
+            <a:avLst/>
+          </a:prstGeom>
+          <a:noFill/>
+          <a:ln/>
+        </p:spPr>
+        <p:txBody>
+          <a:bodyPr wrap="square" lIns="0" tIns="0" rIns="0" bIns="0" rtlCol="0" anchor="ctr"/>
+          <a:lstStyle/>
+          <a:p>
+            <a:pPr algn="ctr" indent="0" marL="0">
+              <a:buNone/>
+            </a:pPr>
+            <a:r>
+              <a:rPr lang="en-US" sz="900" b="1" dirty="0">
                 <a:solidFill>
                   <a:srgbClr val="0D0D1A"/>
                 </a:solidFill>
@@ -12873,7 +12873,7 @@
               </a:rPr>
               <a:t>約20,150円</a:t>
             </a:r>
-            <a:endParaRPr lang="en-US" sz="950" dirty="0"/>
+            <a:endParaRPr lang="en-US" sz="900" dirty="0"/>
           </a:p>
         </p:txBody>
       </p:sp>
@@ -12885,8 +12885,8 @@
         </p:nvSpPr>
         <p:spPr>
           <a:xfrm>
-            <a:off x="5943600" y="4197096"/>
-            <a:ext cx="1325880" cy="365760"/>
+            <a:off x="5943600" y="3666744"/>
+            <a:ext cx="1325880" cy="310896"/>
           </a:xfrm>
           <a:prstGeom prst="rect">
             <a:avLst/>
@@ -12905,24 +12905,24 @@
         </p:nvSpPr>
         <p:spPr>
           <a:xfrm>
-            <a:off x="5971032" y="4197096"/>
-            <a:ext cx="1271016" cy="365760"/>
-          </a:xfrm>
-          <a:prstGeom prst="rect">
-            <a:avLst/>
-          </a:prstGeom>
-          <a:noFill/>
-          <a:ln/>
-        </p:spPr>
-        <p:txBody>
-          <a:bodyPr wrap="square" lIns="0" tIns="0" rIns="0" bIns="0" rtlCol="0" anchor="ctr"/>
-          <a:lstStyle/>
-          <a:p>
-            <a:pPr algn="ctr" indent="0" marL="0">
-              <a:buNone/>
-            </a:pPr>
-            <a:r>
-              <a:rPr lang="en-US" sz="950" b="1" dirty="0">
+            <a:off x="5971032" y="3666744"/>
+            <a:ext cx="1271016" cy="310896"/>
+          </a:xfrm>
+          <a:prstGeom prst="rect">
+            <a:avLst/>
+          </a:prstGeom>
+          <a:noFill/>
+          <a:ln/>
+        </p:spPr>
+        <p:txBody>
+          <a:bodyPr wrap="square" lIns="0" tIns="0" rIns="0" bIns="0" rtlCol="0" anchor="ctr"/>
+          <a:lstStyle/>
+          <a:p>
+            <a:pPr algn="ctr" indent="0" marL="0">
+              <a:buNone/>
+            </a:pPr>
+            <a:r>
+              <a:rPr lang="en-US" sz="900" b="1" dirty="0">
                 <a:solidFill>
                   <a:srgbClr val="0D0D1A"/>
                 </a:solidFill>
@@ -12932,14 +12932,14 @@
               </a:rPr>
               <a:t>約23,000〜</a:t>
             </a:r>
-            <a:endParaRPr lang="en-US" sz="950" dirty="0"/>
-          </a:p>
-          <a:p>
-            <a:pPr algn="ctr" indent="0" marL="0">
-              <a:buNone/>
-            </a:pPr>
-            <a:r>
-              <a:rPr lang="en-US" sz="950" b="1" dirty="0">
+            <a:endParaRPr lang="en-US" sz="900" dirty="0"/>
+          </a:p>
+          <a:p>
+            <a:pPr algn="ctr" indent="0" marL="0">
+              <a:buNone/>
+            </a:pPr>
+            <a:r>
+              <a:rPr lang="en-US" sz="900" b="1" dirty="0">
                 <a:solidFill>
                   <a:srgbClr val="0D0D1A"/>
                 </a:solidFill>
@@ -12949,7 +12949,7 @@
               </a:rPr>
               <a:t>30,000円</a:t>
             </a:r>
-            <a:endParaRPr lang="en-US" sz="950" dirty="0"/>
+            <a:endParaRPr lang="en-US" sz="900" dirty="0"/>
           </a:p>
         </p:txBody>
       </p:sp>
@@ -12961,8 +12961,8 @@
         </p:nvSpPr>
         <p:spPr>
           <a:xfrm>
-            <a:off x="7269480" y="4197096"/>
-            <a:ext cx="1325880" cy="365760"/>
+            <a:off x="7269480" y="3666744"/>
+            <a:ext cx="1325880" cy="310896"/>
           </a:xfrm>
           <a:prstGeom prst="rect">
             <a:avLst/>
@@ -12981,24 +12981,24 @@
         </p:nvSpPr>
         <p:spPr>
           <a:xfrm>
-            <a:off x="7296912" y="4197096"/>
-            <a:ext cx="1271016" cy="365760"/>
-          </a:xfrm>
-          <a:prstGeom prst="rect">
-            <a:avLst/>
-          </a:prstGeom>
-          <a:noFill/>
-          <a:ln/>
-        </p:spPr>
-        <p:txBody>
-          <a:bodyPr wrap="square" lIns="0" tIns="0" rIns="0" bIns="0" rtlCol="0" anchor="ctr"/>
-          <a:lstStyle/>
-          <a:p>
-            <a:pPr algn="ctr" indent="0" marL="0">
-              <a:buNone/>
-            </a:pPr>
-            <a:r>
-              <a:rPr lang="en-US" sz="950" b="1" dirty="0">
+            <a:off x="7296912" y="3666744"/>
+            <a:ext cx="1271016" cy="310896"/>
+          </a:xfrm>
+          <a:prstGeom prst="rect">
+            <a:avLst/>
+          </a:prstGeom>
+          <a:noFill/>
+          <a:ln/>
+        </p:spPr>
+        <p:txBody>
+          <a:bodyPr wrap="square" lIns="0" tIns="0" rIns="0" bIns="0" rtlCol="0" anchor="ctr"/>
+          <a:lstStyle/>
+          <a:p>
+            <a:pPr algn="ctr" indent="0" marL="0">
+              <a:buNone/>
+            </a:pPr>
+            <a:r>
+              <a:rPr lang="en-US" sz="900" b="1" dirty="0">
                 <a:solidFill>
                   <a:srgbClr val="0D0D1A"/>
                 </a:solidFill>
@@ -13008,14 +13008,14 @@
               </a:rPr>
               <a:t>手数料</a:t>
             </a:r>
-            <a:endParaRPr lang="en-US" sz="950" dirty="0"/>
-          </a:p>
-          <a:p>
-            <a:pPr algn="ctr" indent="0" marL="0">
-              <a:buNone/>
-            </a:pPr>
-            <a:r>
-              <a:rPr lang="en-US" sz="950" b="1" dirty="0">
+            <a:endParaRPr lang="en-US" sz="900" dirty="0"/>
+          </a:p>
+          <a:p>
+            <a:pPr algn="ctr" indent="0" marL="0">
+              <a:buNone/>
+            </a:pPr>
+            <a:r>
+              <a:rPr lang="en-US" sz="900" b="1" dirty="0">
                 <a:solidFill>
                   <a:srgbClr val="0D0D1A"/>
                 </a:solidFill>
@@ -13025,7 +13025,7 @@
               </a:rPr>
               <a:t>＋数百円</a:t>
             </a:r>
-            <a:endParaRPr lang="en-US" sz="950" dirty="0"/>
+            <a:endParaRPr lang="en-US" sz="900" dirty="0"/>
           </a:p>
         </p:txBody>
       </p:sp>
@@ -13037,12 +13037,573 @@
         </p:nvSpPr>
         <p:spPr>
           <a:xfrm>
-            <a:off x="274320" y="4617720"/>
-            <a:ext cx="8595360" cy="274320"/>
+            <a:off x="274320" y="4032504"/>
+            <a:ext cx="3017520" cy="457200"/>
+          </a:xfrm>
+          <a:prstGeom prst="rect">
+            <a:avLst/>
+          </a:prstGeom>
+          <a:solidFill>
+            <a:srgbClr val="14142A"/>
+          </a:solidFill>
+          <a:ln w="12700">
+            <a:solidFill>
+              <a:srgbClr val="333355"/>
+            </a:solidFill>
+            <a:prstDash val="solid"/>
+          </a:ln>
+        </p:spPr>
+      </p:sp>
+      <p:sp>
+        <p:nvSpPr>
+          <p:cNvPr id="148" name="Text 146"/>
+          <p:cNvSpPr/>
+          <p:nvPr/>
+        </p:nvSpPr>
+        <p:spPr>
+          <a:xfrm>
+            <a:off x="329184" y="4032504"/>
+            <a:ext cx="2907792" cy="457200"/>
+          </a:xfrm>
+          <a:prstGeom prst="rect">
+            <a:avLst/>
+          </a:prstGeom>
+          <a:noFill/>
+          <a:ln/>
+        </p:spPr>
+        <p:txBody>
+          <a:bodyPr wrap="square" lIns="0" tIns="0" rIns="0" bIns="0" rtlCol="0" anchor="ctr"/>
+          <a:lstStyle/>
+          <a:p>
+            <a:pPr indent="0" marL="0">
+              <a:buNone/>
+            </a:pPr>
+            <a:r>
+              <a:rPr lang="en-US" sz="1000" b="1" dirty="0">
+                <a:solidFill>
+                  <a:srgbClr val="FFFFFF"/>
+                </a:solidFill>
+                <a:latin typeface="Arial" pitchFamily="34" charset="0"/>
+                <a:ea typeface="Arial" pitchFamily="34" charset="-122"/>
+                <a:cs typeface="Arial" pitchFamily="34" charset="-120"/>
+              </a:rPr>
+              <a:t>運用の</a:t>
+            </a:r>
+            <a:endParaRPr lang="en-US" sz="1000" dirty="0"/>
+          </a:p>
+          <a:p>
+            <a:pPr indent="0" marL="0">
+              <a:buNone/>
+            </a:pPr>
+            <a:r>
+              <a:rPr lang="en-US" sz="1000" b="1" dirty="0">
+                <a:solidFill>
+                  <a:srgbClr val="FFFFFF"/>
+                </a:solidFill>
+                <a:latin typeface="Arial" pitchFamily="34" charset="0"/>
+                <a:ea typeface="Arial" pitchFamily="34" charset="-122"/>
+                <a:cs typeface="Arial" pitchFamily="34" charset="-120"/>
+              </a:rPr>
+              <a:t>持続可能性</a:t>
+            </a:r>
+            <a:endParaRPr lang="en-US" sz="1000" dirty="0"/>
+          </a:p>
+        </p:txBody>
+      </p:sp>
+      <p:sp>
+        <p:nvSpPr>
+          <p:cNvPr id="149" name="Shape 147"/>
+          <p:cNvSpPr/>
+          <p:nvPr/>
+        </p:nvSpPr>
+        <p:spPr>
+          <a:xfrm>
+            <a:off x="3291840" y="4032504"/>
+            <a:ext cx="1325880" cy="457200"/>
+          </a:xfrm>
+          <a:prstGeom prst="rect">
+            <a:avLst/>
+          </a:prstGeom>
+          <a:solidFill>
+            <a:srgbClr val="14142A"/>
+          </a:solidFill>
+          <a:ln w="12700">
+            <a:solidFill>
+              <a:srgbClr val="333355"/>
+            </a:solidFill>
+            <a:prstDash val="solid"/>
+          </a:ln>
+        </p:spPr>
+      </p:sp>
+      <p:sp>
+        <p:nvSpPr>
+          <p:cNvPr id="150" name="Text 148"/>
+          <p:cNvSpPr/>
+          <p:nvPr/>
+        </p:nvSpPr>
+        <p:spPr>
+          <a:xfrm>
+            <a:off x="3319272" y="4059936"/>
+            <a:ext cx="1271016" cy="219456"/>
+          </a:xfrm>
+          <a:prstGeom prst="rect">
+            <a:avLst/>
+          </a:prstGeom>
+          <a:noFill/>
+          <a:ln/>
+        </p:spPr>
+        <p:txBody>
+          <a:bodyPr wrap="square" lIns="0" tIns="0" rIns="0" bIns="0" rtlCol="0" anchor="ctr"/>
+          <a:lstStyle/>
+          <a:p>
+            <a:pPr algn="ctr" indent="0" marL="0">
+              <a:buNone/>
+            </a:pPr>
+            <a:r>
+              <a:rPr lang="en-US" sz="1400" b="1" dirty="0">
+                <a:solidFill>
+                  <a:srgbClr val="4CAF73"/>
+                </a:solidFill>
+                <a:latin typeface="Arial" pitchFamily="34" charset="0"/>
+                <a:ea typeface="Arial" pitchFamily="34" charset="-122"/>
+                <a:cs typeface="Arial" pitchFamily="34" charset="-120"/>
+              </a:rPr>
+              <a:t>◎</a:t>
+            </a:r>
+            <a:endParaRPr lang="en-US" sz="1400" dirty="0"/>
+          </a:p>
+        </p:txBody>
+      </p:sp>
+      <p:sp>
+        <p:nvSpPr>
+          <p:cNvPr id="151" name="Text 149"/>
+          <p:cNvSpPr/>
+          <p:nvPr/>
+        </p:nvSpPr>
+        <p:spPr>
+          <a:xfrm>
+            <a:off x="3310128" y="4261104"/>
+            <a:ext cx="1289304" cy="210312"/>
+          </a:xfrm>
+          <a:prstGeom prst="rect">
+            <a:avLst/>
+          </a:prstGeom>
+          <a:noFill/>
+          <a:ln/>
+        </p:spPr>
+        <p:txBody>
+          <a:bodyPr wrap="square" lIns="0" tIns="0" rIns="0" bIns="0" rtlCol="0" anchor="t"/>
+          <a:lstStyle/>
+          <a:p>
+            <a:pPr algn="ctr" indent="0" marL="0">
+              <a:buNone/>
+            </a:pPr>
+            <a:r>
+              <a:rPr lang="en-US" sz="730" dirty="0">
+                <a:solidFill>
+                  <a:srgbClr val="E0E0E0"/>
+                </a:solidFill>
+                <a:latin typeface="Arial" pitchFamily="34" charset="0"/>
+                <a:ea typeface="Arial" pitchFamily="34" charset="-122"/>
+                <a:cs typeface="Arial" pitchFamily="34" charset="-120"/>
+              </a:rPr>
+              <a:t>ワンストップ</a:t>
+            </a:r>
+            <a:endParaRPr lang="en-US" sz="730" dirty="0"/>
+          </a:p>
+          <a:p>
+            <a:pPr algn="ctr" indent="0" marL="0">
+              <a:buNone/>
+            </a:pPr>
+            <a:r>
+              <a:rPr lang="en-US" sz="730" dirty="0">
+                <a:solidFill>
+                  <a:srgbClr val="E0E0E0"/>
+                </a:solidFill>
+                <a:latin typeface="Arial" pitchFamily="34" charset="0"/>
+                <a:ea typeface="Arial" pitchFamily="34" charset="-122"/>
+                <a:cs typeface="Arial" pitchFamily="34" charset="-120"/>
+              </a:rPr>
+              <a:t>(UTAGE1社)</a:t>
+            </a:r>
+            <a:endParaRPr lang="en-US" sz="730" dirty="0"/>
+          </a:p>
+        </p:txBody>
+      </p:sp>
+      <p:sp>
+        <p:nvSpPr>
+          <p:cNvPr id="152" name="Shape 150"/>
+          <p:cNvSpPr/>
+          <p:nvPr/>
+        </p:nvSpPr>
+        <p:spPr>
+          <a:xfrm>
+            <a:off x="4617720" y="4032504"/>
+            <a:ext cx="1325880" cy="457200"/>
+          </a:xfrm>
+          <a:prstGeom prst="rect">
+            <a:avLst/>
+          </a:prstGeom>
+          <a:solidFill>
+            <a:srgbClr val="14142A"/>
+          </a:solidFill>
+          <a:ln w="12700">
+            <a:solidFill>
+              <a:srgbClr val="333355"/>
+            </a:solidFill>
+            <a:prstDash val="solid"/>
+          </a:ln>
+        </p:spPr>
+      </p:sp>
+      <p:sp>
+        <p:nvSpPr>
+          <p:cNvPr id="153" name="Text 151"/>
+          <p:cNvSpPr/>
+          <p:nvPr/>
+        </p:nvSpPr>
+        <p:spPr>
+          <a:xfrm>
+            <a:off x="4645152" y="4059936"/>
+            <a:ext cx="1271016" cy="219456"/>
+          </a:xfrm>
+          <a:prstGeom prst="rect">
+            <a:avLst/>
+          </a:prstGeom>
+          <a:noFill/>
+          <a:ln/>
+        </p:spPr>
+        <p:txBody>
+          <a:bodyPr wrap="square" lIns="0" tIns="0" rIns="0" bIns="0" rtlCol="0" anchor="ctr"/>
+          <a:lstStyle/>
+          <a:p>
+            <a:pPr algn="ctr" indent="0" marL="0">
+              <a:buNone/>
+            </a:pPr>
+            <a:r>
+              <a:rPr lang="en-US" sz="1400" b="1" dirty="0">
+                <a:solidFill>
+                  <a:srgbClr val="4CAF73"/>
+                </a:solidFill>
+                <a:latin typeface="Arial" pitchFamily="34" charset="0"/>
+                <a:ea typeface="Arial" pitchFamily="34" charset="-122"/>
+                <a:cs typeface="Arial" pitchFamily="34" charset="-120"/>
+              </a:rPr>
+              <a:t>◎</a:t>
+            </a:r>
+            <a:endParaRPr lang="en-US" sz="1400" dirty="0"/>
+          </a:p>
+        </p:txBody>
+      </p:sp>
+      <p:sp>
+        <p:nvSpPr>
+          <p:cNvPr id="154" name="Text 152"/>
+          <p:cNvSpPr/>
+          <p:nvPr/>
+        </p:nvSpPr>
+        <p:spPr>
+          <a:xfrm>
+            <a:off x="4636008" y="4261104"/>
+            <a:ext cx="1289304" cy="210312"/>
+          </a:xfrm>
+          <a:prstGeom prst="rect">
+            <a:avLst/>
+          </a:prstGeom>
+          <a:noFill/>
+          <a:ln/>
+        </p:spPr>
+        <p:txBody>
+          <a:bodyPr wrap="square" lIns="0" tIns="0" rIns="0" bIns="0" rtlCol="0" anchor="t"/>
+          <a:lstStyle/>
+          <a:p>
+            <a:pPr algn="ctr" indent="0" marL="0">
+              <a:buNone/>
+            </a:pPr>
+            <a:r>
+              <a:rPr lang="en-US" sz="730" dirty="0">
+                <a:solidFill>
+                  <a:srgbClr val="E0E0E0"/>
+                </a:solidFill>
+                <a:latin typeface="Arial" pitchFamily="34" charset="0"/>
+                <a:ea typeface="Arial" pitchFamily="34" charset="-122"/>
+                <a:cs typeface="Arial" pitchFamily="34" charset="-120"/>
+              </a:rPr>
+              <a:t>ワンストップ</a:t>
+            </a:r>
+            <a:endParaRPr lang="en-US" sz="730" dirty="0"/>
+          </a:p>
+          <a:p>
+            <a:pPr algn="ctr" indent="0" marL="0">
+              <a:buNone/>
+            </a:pPr>
+            <a:r>
+              <a:rPr lang="en-US" sz="730" dirty="0">
+                <a:solidFill>
+                  <a:srgbClr val="E0E0E0"/>
+                </a:solidFill>
+                <a:latin typeface="Arial" pitchFamily="34" charset="0"/>
+                <a:ea typeface="Arial" pitchFamily="34" charset="-122"/>
+                <a:cs typeface="Arial" pitchFamily="34" charset="-120"/>
+              </a:rPr>
+              <a:t>(UTAGE1社)</a:t>
+            </a:r>
+            <a:endParaRPr lang="en-US" sz="730" dirty="0"/>
+          </a:p>
+        </p:txBody>
+      </p:sp>
+      <p:sp>
+        <p:nvSpPr>
+          <p:cNvPr id="155" name="Shape 153"/>
+          <p:cNvSpPr/>
+          <p:nvPr/>
+        </p:nvSpPr>
+        <p:spPr>
+          <a:xfrm>
+            <a:off x="5943600" y="4032504"/>
+            <a:ext cx="1325880" cy="457200"/>
+          </a:xfrm>
+          <a:prstGeom prst="rect">
+            <a:avLst/>
+          </a:prstGeom>
+          <a:solidFill>
+            <a:srgbClr val="14142A"/>
+          </a:solidFill>
+          <a:ln w="12700">
+            <a:solidFill>
+              <a:srgbClr val="333355"/>
+            </a:solidFill>
+            <a:prstDash val="solid"/>
+          </a:ln>
+        </p:spPr>
+      </p:sp>
+      <p:sp>
+        <p:nvSpPr>
+          <p:cNvPr id="156" name="Text 154"/>
+          <p:cNvSpPr/>
+          <p:nvPr/>
+        </p:nvSpPr>
+        <p:spPr>
+          <a:xfrm>
+            <a:off x="5971032" y="4059936"/>
+            <a:ext cx="1271016" cy="219456"/>
+          </a:xfrm>
+          <a:prstGeom prst="rect">
+            <a:avLst/>
+          </a:prstGeom>
+          <a:noFill/>
+          <a:ln/>
+        </p:spPr>
+        <p:txBody>
+          <a:bodyPr wrap="square" lIns="0" tIns="0" rIns="0" bIns="0" rtlCol="0" anchor="ctr"/>
+          <a:lstStyle/>
+          <a:p>
+            <a:pPr algn="ctr" indent="0" marL="0">
+              <a:buNone/>
+            </a:pPr>
+            <a:r>
+              <a:rPr lang="en-US" sz="1400" b="1" dirty="0">
+                <a:solidFill>
+                  <a:srgbClr val="F5A623"/>
+                </a:solidFill>
+                <a:latin typeface="Arial" pitchFamily="34" charset="0"/>
+                <a:ea typeface="Arial" pitchFamily="34" charset="-122"/>
+                <a:cs typeface="Arial" pitchFamily="34" charset="-120"/>
+              </a:rPr>
+              <a:t>○</a:t>
+            </a:r>
+            <a:endParaRPr lang="en-US" sz="1400" dirty="0"/>
+          </a:p>
+        </p:txBody>
+      </p:sp>
+      <p:sp>
+        <p:nvSpPr>
+          <p:cNvPr id="157" name="Text 155"/>
+          <p:cNvSpPr/>
+          <p:nvPr/>
+        </p:nvSpPr>
+        <p:spPr>
+          <a:xfrm>
+            <a:off x="5961888" y="4261104"/>
+            <a:ext cx="1289304" cy="210312"/>
+          </a:xfrm>
+          <a:prstGeom prst="rect">
+            <a:avLst/>
+          </a:prstGeom>
+          <a:noFill/>
+          <a:ln/>
+        </p:spPr>
+        <p:txBody>
+          <a:bodyPr wrap="square" lIns="0" tIns="0" rIns="0" bIns="0" rtlCol="0" anchor="t"/>
+          <a:lstStyle/>
+          <a:p>
+            <a:pPr algn="ctr" indent="0" marL="0">
+              <a:buNone/>
+            </a:pPr>
+            <a:r>
+              <a:rPr lang="en-US" sz="730" dirty="0">
+                <a:solidFill>
+                  <a:srgbClr val="E0E0E0"/>
+                </a:solidFill>
+                <a:latin typeface="Arial" pitchFamily="34" charset="0"/>
+                <a:ea typeface="Arial" pitchFamily="34" charset="-122"/>
+                <a:cs typeface="Arial" pitchFamily="34" charset="-120"/>
+              </a:rPr>
+              <a:t>2社体制</a:t>
+            </a:r>
+            <a:endParaRPr lang="en-US" sz="730" dirty="0"/>
+          </a:p>
+          <a:p>
+            <a:pPr algn="ctr" indent="0" marL="0">
+              <a:buNone/>
+            </a:pPr>
+            <a:r>
+              <a:rPr lang="en-US" sz="730" dirty="0">
+                <a:solidFill>
+                  <a:srgbClr val="E0E0E0"/>
+                </a:solidFill>
+                <a:latin typeface="Arial" pitchFamily="34" charset="0"/>
+                <a:ea typeface="Arial" pitchFamily="34" charset="-122"/>
+                <a:cs typeface="Arial" pitchFamily="34" charset="-120"/>
+              </a:rPr>
+              <a:t>(UTAGE+AWS)</a:t>
+            </a:r>
+            <a:endParaRPr lang="en-US" sz="730" dirty="0"/>
+          </a:p>
+        </p:txBody>
+      </p:sp>
+      <p:sp>
+        <p:nvSpPr>
+          <p:cNvPr id="158" name="Shape 156"/>
+          <p:cNvSpPr/>
+          <p:nvPr/>
+        </p:nvSpPr>
+        <p:spPr>
+          <a:xfrm>
+            <a:off x="7269480" y="4032504"/>
+            <a:ext cx="1325880" cy="457200"/>
+          </a:xfrm>
+          <a:prstGeom prst="rect">
+            <a:avLst/>
+          </a:prstGeom>
+          <a:solidFill>
+            <a:srgbClr val="14142A"/>
+          </a:solidFill>
+          <a:ln w="12700">
+            <a:solidFill>
+              <a:srgbClr val="333355"/>
+            </a:solidFill>
+            <a:prstDash val="solid"/>
+          </a:ln>
+        </p:spPr>
+      </p:sp>
+      <p:sp>
+        <p:nvSpPr>
+          <p:cNvPr id="159" name="Text 157"/>
+          <p:cNvSpPr/>
+          <p:nvPr/>
+        </p:nvSpPr>
+        <p:spPr>
+          <a:xfrm>
+            <a:off x="7296912" y="4059936"/>
+            <a:ext cx="1271016" cy="219456"/>
+          </a:xfrm>
+          <a:prstGeom prst="rect">
+            <a:avLst/>
+          </a:prstGeom>
+          <a:noFill/>
+          <a:ln/>
+        </p:spPr>
+        <p:txBody>
+          <a:bodyPr wrap="square" lIns="0" tIns="0" rIns="0" bIns="0" rtlCol="0" anchor="ctr"/>
+          <a:lstStyle/>
+          <a:p>
+            <a:pPr algn="ctr" indent="0" marL="0">
+              <a:buNone/>
+            </a:pPr>
+            <a:r>
+              <a:rPr lang="en-US" sz="1400" b="1" dirty="0">
+                <a:solidFill>
+                  <a:srgbClr val="E94560"/>
+                </a:solidFill>
+                <a:latin typeface="Arial" pitchFamily="34" charset="0"/>
+                <a:ea typeface="Arial" pitchFamily="34" charset="-122"/>
+                <a:cs typeface="Arial" pitchFamily="34" charset="-120"/>
+              </a:rPr>
+              <a:t>△</a:t>
+            </a:r>
+            <a:endParaRPr lang="en-US" sz="1400" dirty="0"/>
+          </a:p>
+        </p:txBody>
+      </p:sp>
+      <p:sp>
+        <p:nvSpPr>
+          <p:cNvPr id="160" name="Text 158"/>
+          <p:cNvSpPr/>
+          <p:nvPr/>
+        </p:nvSpPr>
+        <p:spPr>
+          <a:xfrm>
+            <a:off x="7287768" y="4261104"/>
+            <a:ext cx="1289304" cy="210312"/>
+          </a:xfrm>
+          <a:prstGeom prst="rect">
+            <a:avLst/>
+          </a:prstGeom>
+          <a:noFill/>
+          <a:ln/>
+        </p:spPr>
+        <p:txBody>
+          <a:bodyPr wrap="square" lIns="0" tIns="0" rIns="0" bIns="0" rtlCol="0" anchor="t"/>
+          <a:lstStyle/>
+          <a:p>
+            <a:pPr algn="ctr" indent="0" marL="0">
+              <a:buNone/>
+            </a:pPr>
+            <a:r>
+              <a:rPr lang="en-US" sz="730" dirty="0">
+                <a:solidFill>
+                  <a:srgbClr val="E0E0E0"/>
+                </a:solidFill>
+                <a:latin typeface="Arial" pitchFamily="34" charset="0"/>
+                <a:ea typeface="Arial" pitchFamily="34" charset="-122"/>
+                <a:cs typeface="Arial" pitchFamily="34" charset="-120"/>
+              </a:rPr>
+              <a:t>3社体制</a:t>
+            </a:r>
+            <a:endParaRPr lang="en-US" sz="730" dirty="0"/>
+          </a:p>
+          <a:p>
+            <a:pPr algn="ctr" indent="0" marL="0">
+              <a:buNone/>
+            </a:pPr>
+            <a:r>
+              <a:rPr lang="en-US" sz="730" dirty="0">
+                <a:solidFill>
+                  <a:srgbClr val="E0E0E0"/>
+                </a:solidFill>
+                <a:latin typeface="Arial" pitchFamily="34" charset="0"/>
+                <a:ea typeface="Arial" pitchFamily="34" charset="-122"/>
+                <a:cs typeface="Arial" pitchFamily="34" charset="-120"/>
+              </a:rPr>
+              <a:t>(分散・要監視)</a:t>
+            </a:r>
+            <a:endParaRPr lang="en-US" sz="730" dirty="0"/>
+          </a:p>
+        </p:txBody>
+      </p:sp>
+      <p:sp>
+        <p:nvSpPr>
+          <p:cNvPr id="161" name="Shape 159"/>
+          <p:cNvSpPr/>
+          <p:nvPr/>
+        </p:nvSpPr>
+        <p:spPr>
+          <a:xfrm>
+            <a:off x="274320" y="4535424"/>
+            <a:ext cx="8595360" cy="256032"/>
           </a:xfrm>
           <a:prstGeom prst="roundRect">
             <a:avLst>
-              <a:gd name="adj" fmla="val 20000"/>
+              <a:gd name="adj" fmla="val 21429"/>
             </a:avLst>
           </a:prstGeom>
           <a:solidFill>
@@ -13058,14 +13619,14 @@
       </p:sp>
       <p:sp>
         <p:nvSpPr>
-          <p:cNvPr id="148" name="Text 146"/>
-          <p:cNvSpPr/>
-          <p:nvPr/>
-        </p:nvSpPr>
-        <p:spPr>
-          <a:xfrm>
-            <a:off x="365760" y="4617720"/>
-            <a:ext cx="8412480" cy="274320"/>
+          <p:cNvPr id="162" name="Text 160"/>
+          <p:cNvSpPr/>
+          <p:nvPr/>
+        </p:nvSpPr>
+        <p:spPr>
+          <a:xfrm>
+            <a:off x="365760" y="4535424"/>
+            <a:ext cx="8412480" cy="256032"/>
           </a:xfrm>
           <a:prstGeom prst="rect">
             <a:avLst/>
@@ -13081,7 +13642,7 @@
               <a:buNone/>
             </a:pPr>
             <a:r>
-              <a:rPr lang="en-US" sz="850" dirty="0">
+              <a:rPr lang="en-US" sz="830" dirty="0">
                 <a:solidFill>
                   <a:srgbClr val="E94560"/>
                 </a:solidFill>
@@ -13089,9 +13650,9 @@
                 <a:ea typeface="Arial" pitchFamily="34" charset="-122"/>
                 <a:cs typeface="Arial" pitchFamily="34" charset="-120"/>
               </a:rPr>
-              <a:t>★ パターン4(UTAGEなし)：月額固定費はほぼ¥0で、Supabaseの無料DBによりマルチデバイス対応も可能。ただし決済・認証・動画保護を新規に作り込む分、初期開発工数が増える</a:t>
-            </a:r>
-            <a:endParaRPr lang="en-US" sz="850" dirty="0"/>
+              <a:t>★ パターン4は月額固定費が最安だが、3社分の仕様変更・障害対応・サービス継続リスクを自前で追う必要がある点に注意</a:t>
+            </a:r>
+            <a:endParaRPr lang="en-US" sz="830" dirty="0"/>
           </a:p>
         </p:txBody>
       </p:sp>
